--- a/2026-1/clase_03/apuntes_clase3.pptx
+++ b/2026-1/clase_03/apuntes_clase3.pptx
@@ -36,13 +36,7 @@
     <p:sldId id="291" r:id="rId30"/>
     <p:sldId id="292" r:id="rId31"/>
     <p:sldId id="293" r:id="rId32"/>
-    <p:sldId id="273" r:id="rId33"/>
-    <p:sldId id="294" r:id="rId34"/>
-    <p:sldId id="274" r:id="rId35"/>
-    <p:sldId id="295" r:id="rId36"/>
-    <p:sldId id="296" r:id="rId37"/>
-    <p:sldId id="297" r:id="rId38"/>
-    <p:sldId id="298" r:id="rId39"/>
+    <p:sldId id="298" r:id="rId33"/>
   </p:sldIdLst>
   <p:sldSz cx="12192000" cy="6858000"/>
   <p:notesSz cx="6858000" cy="9144000"/>
@@ -141,6 +135,11 @@
       </a:defRPr>
     </a:lvl9pPr>
   </p:defaultTextStyle>
+  <p:extLst>
+    <p:ext uri="{EFAFB233-063F-42B5-8137-9DF3F51BA10A}">
+      <p15:sldGuideLst xmlns:p15="http://schemas.microsoft.com/office/powerpoint/2012/main"/>
+    </p:ext>
+  </p:extLst>
 </p:presentation>
 </file>
 
@@ -293,7 +292,7 @@
           <a:p>
             <a:fld id="{163E4E5A-E75E-4899-90F5-DDB39F3E781F}" type="datetimeFigureOut">
               <a:rPr lang="es-CO" smtClean="0"/>
-              <a:t>16/02/2026</a:t>
+              <a:t>19/02/2026</a:t>
             </a:fld>
             <a:endParaRPr lang="es-CO"/>
           </a:p>
@@ -493,7 +492,7 @@
           <a:p>
             <a:fld id="{163E4E5A-E75E-4899-90F5-DDB39F3E781F}" type="datetimeFigureOut">
               <a:rPr lang="es-CO" smtClean="0"/>
-              <a:t>16/02/2026</a:t>
+              <a:t>19/02/2026</a:t>
             </a:fld>
             <a:endParaRPr lang="es-CO"/>
           </a:p>
@@ -703,7 +702,7 @@
           <a:p>
             <a:fld id="{163E4E5A-E75E-4899-90F5-DDB39F3E781F}" type="datetimeFigureOut">
               <a:rPr lang="es-CO" smtClean="0"/>
-              <a:t>16/02/2026</a:t>
+              <a:t>19/02/2026</a:t>
             </a:fld>
             <a:endParaRPr lang="es-CO"/>
           </a:p>
@@ -903,7 +902,7 @@
           <a:p>
             <a:fld id="{163E4E5A-E75E-4899-90F5-DDB39F3E781F}" type="datetimeFigureOut">
               <a:rPr lang="es-CO" smtClean="0"/>
-              <a:t>16/02/2026</a:t>
+              <a:t>19/02/2026</a:t>
             </a:fld>
             <a:endParaRPr lang="es-CO"/>
           </a:p>
@@ -1179,7 +1178,7 @@
           <a:p>
             <a:fld id="{163E4E5A-E75E-4899-90F5-DDB39F3E781F}" type="datetimeFigureOut">
               <a:rPr lang="es-CO" smtClean="0"/>
-              <a:t>16/02/2026</a:t>
+              <a:t>19/02/2026</a:t>
             </a:fld>
             <a:endParaRPr lang="es-CO"/>
           </a:p>
@@ -1447,7 +1446,7 @@
           <a:p>
             <a:fld id="{163E4E5A-E75E-4899-90F5-DDB39F3E781F}" type="datetimeFigureOut">
               <a:rPr lang="es-CO" smtClean="0"/>
-              <a:t>16/02/2026</a:t>
+              <a:t>19/02/2026</a:t>
             </a:fld>
             <a:endParaRPr lang="es-CO"/>
           </a:p>
@@ -1862,7 +1861,7 @@
           <a:p>
             <a:fld id="{163E4E5A-E75E-4899-90F5-DDB39F3E781F}" type="datetimeFigureOut">
               <a:rPr lang="es-CO" smtClean="0"/>
-              <a:t>16/02/2026</a:t>
+              <a:t>19/02/2026</a:t>
             </a:fld>
             <a:endParaRPr lang="es-CO"/>
           </a:p>
@@ -2004,7 +2003,7 @@
           <a:p>
             <a:fld id="{163E4E5A-E75E-4899-90F5-DDB39F3E781F}" type="datetimeFigureOut">
               <a:rPr lang="es-CO" smtClean="0"/>
-              <a:t>16/02/2026</a:t>
+              <a:t>19/02/2026</a:t>
             </a:fld>
             <a:endParaRPr lang="es-CO"/>
           </a:p>
@@ -2117,7 +2116,7 @@
           <a:p>
             <a:fld id="{163E4E5A-E75E-4899-90F5-DDB39F3E781F}" type="datetimeFigureOut">
               <a:rPr lang="es-CO" smtClean="0"/>
-              <a:t>16/02/2026</a:t>
+              <a:t>19/02/2026</a:t>
             </a:fld>
             <a:endParaRPr lang="es-CO"/>
           </a:p>
@@ -2430,7 +2429,7 @@
           <a:p>
             <a:fld id="{163E4E5A-E75E-4899-90F5-DDB39F3E781F}" type="datetimeFigureOut">
               <a:rPr lang="es-CO" smtClean="0"/>
-              <a:t>16/02/2026</a:t>
+              <a:t>19/02/2026</a:t>
             </a:fld>
             <a:endParaRPr lang="es-CO"/>
           </a:p>
@@ -2719,7 +2718,7 @@
           <a:p>
             <a:fld id="{163E4E5A-E75E-4899-90F5-DDB39F3E781F}" type="datetimeFigureOut">
               <a:rPr lang="es-CO" smtClean="0"/>
-              <a:t>16/02/2026</a:t>
+              <a:t>19/02/2026</a:t>
             </a:fld>
             <a:endParaRPr lang="es-CO"/>
           </a:p>
@@ -2962,7 +2961,7 @@
           <a:p>
             <a:fld id="{163E4E5A-E75E-4899-90F5-DDB39F3E781F}" type="datetimeFigureOut">
               <a:rPr lang="es-CO" smtClean="0"/>
-              <a:t>16/02/2026</a:t>
+              <a:t>19/02/2026</a:t>
             </a:fld>
             <a:endParaRPr lang="es-CO"/>
           </a:p>
@@ -5881,8 +5880,8 @@
           </a:p>
         </p:txBody>
       </p:sp>
-      <mc:AlternateContent xmlns:mc="http://schemas.openxmlformats.org/markup-compatibility/2006">
-        <mc:Choice xmlns:a14="http://schemas.microsoft.com/office/drawing/2010/main" Requires="a14">
+      <mc:AlternateContent xmlns:mc="http://schemas.openxmlformats.org/markup-compatibility/2006" xmlns:a14="http://schemas.microsoft.com/office/drawing/2010/main">
+        <mc:Choice Requires="a14">
           <p:graphicFrame>
             <p:nvGraphicFramePr>
               <p:cNvPr id="4" name="Tabla 4">
@@ -6176,7 +6175,7 @@
             </a:graphic>
           </p:graphicFrame>
         </mc:Choice>
-        <mc:Fallback>
+        <mc:Fallback xmlns="">
           <p:graphicFrame>
             <p:nvGraphicFramePr>
               <p:cNvPr id="4" name="Tabla 4">
@@ -6471,8 +6470,8 @@
           </p:graphicFrame>
         </mc:Fallback>
       </mc:AlternateContent>
-      <mc:AlternateContent xmlns:mc="http://schemas.openxmlformats.org/markup-compatibility/2006">
-        <mc:Choice xmlns:a14="http://schemas.microsoft.com/office/drawing/2010/main" Requires="a14">
+      <mc:AlternateContent xmlns:mc="http://schemas.openxmlformats.org/markup-compatibility/2006" xmlns:a14="http://schemas.microsoft.com/office/drawing/2010/main">
+        <mc:Choice Requires="a14">
           <p:graphicFrame>
             <p:nvGraphicFramePr>
               <p:cNvPr id="5" name="Tabla 4">
@@ -7208,7 +7207,7 @@
             </a:graphic>
           </p:graphicFrame>
         </mc:Choice>
-        <mc:Fallback>
+        <mc:Fallback xmlns="">
           <p:graphicFrame>
             <p:nvGraphicFramePr>
               <p:cNvPr id="5" name="Tabla 4">
@@ -7945,8 +7944,8 @@
           </p:graphicFrame>
         </mc:Fallback>
       </mc:AlternateContent>
-      <mc:AlternateContent xmlns:mc="http://schemas.openxmlformats.org/markup-compatibility/2006">
-        <mc:Choice xmlns:a14="http://schemas.microsoft.com/office/drawing/2010/main" Requires="a14">
+      <mc:AlternateContent xmlns:mc="http://schemas.openxmlformats.org/markup-compatibility/2006" xmlns:a14="http://schemas.microsoft.com/office/drawing/2010/main">
+        <mc:Choice Requires="a14">
           <p:graphicFrame>
             <p:nvGraphicFramePr>
               <p:cNvPr id="6" name="Tabla 4">
@@ -8682,7 +8681,7 @@
             </a:graphic>
           </p:graphicFrame>
         </mc:Choice>
-        <mc:Fallback>
+        <mc:Fallback xmlns="">
           <p:graphicFrame>
             <p:nvGraphicFramePr>
               <p:cNvPr id="6" name="Tabla 4">
@@ -9419,8 +9418,8 @@
           </p:graphicFrame>
         </mc:Fallback>
       </mc:AlternateContent>
-      <mc:AlternateContent xmlns:mc="http://schemas.openxmlformats.org/markup-compatibility/2006">
-        <mc:Choice xmlns:a14="http://schemas.microsoft.com/office/drawing/2010/main" Requires="a14">
+      <mc:AlternateContent xmlns:mc="http://schemas.openxmlformats.org/markup-compatibility/2006" xmlns:a14="http://schemas.microsoft.com/office/drawing/2010/main">
+        <mc:Choice Requires="a14">
           <p:graphicFrame>
             <p:nvGraphicFramePr>
               <p:cNvPr id="7" name="Tabla 4">
@@ -10156,7 +10155,7 @@
             </a:graphic>
           </p:graphicFrame>
         </mc:Choice>
-        <mc:Fallback>
+        <mc:Fallback xmlns="">
           <p:graphicFrame>
             <p:nvGraphicFramePr>
               <p:cNvPr id="7" name="Tabla 4">
@@ -10893,8 +10892,8 @@
           </p:graphicFrame>
         </mc:Fallback>
       </mc:AlternateContent>
-      <mc:AlternateContent xmlns:mc="http://schemas.openxmlformats.org/markup-compatibility/2006">
-        <mc:Choice xmlns:a14="http://schemas.microsoft.com/office/drawing/2010/main" Requires="a14">
+      <mc:AlternateContent xmlns:mc="http://schemas.openxmlformats.org/markup-compatibility/2006" xmlns:a14="http://schemas.microsoft.com/office/drawing/2010/main">
+        <mc:Choice Requires="a14">
           <p:graphicFrame>
             <p:nvGraphicFramePr>
               <p:cNvPr id="8" name="Tabla 4">
@@ -11630,7 +11629,7 @@
             </a:graphic>
           </p:graphicFrame>
         </mc:Choice>
-        <mc:Fallback>
+        <mc:Fallback xmlns="">
           <p:graphicFrame>
             <p:nvGraphicFramePr>
               <p:cNvPr id="8" name="Tabla 4">
@@ -12367,8 +12366,8 @@
           </p:graphicFrame>
         </mc:Fallback>
       </mc:AlternateContent>
-      <mc:AlternateContent xmlns:mc="http://schemas.openxmlformats.org/markup-compatibility/2006">
-        <mc:Choice xmlns:a14="http://schemas.microsoft.com/office/drawing/2010/main" Requires="a14">
+      <mc:AlternateContent xmlns:mc="http://schemas.openxmlformats.org/markup-compatibility/2006" xmlns:a14="http://schemas.microsoft.com/office/drawing/2010/main">
+        <mc:Choice Requires="a14">
           <p:graphicFrame>
             <p:nvGraphicFramePr>
               <p:cNvPr id="9" name="Tabla 4">
@@ -13104,7 +13103,7 @@
             </a:graphic>
           </p:graphicFrame>
         </mc:Choice>
-        <mc:Fallback>
+        <mc:Fallback xmlns="">
           <p:graphicFrame>
             <p:nvGraphicFramePr>
               <p:cNvPr id="9" name="Tabla 4">
@@ -14190,8 +14189,8 @@
           </a:p>
         </p:txBody>
       </p:sp>
-      <mc:AlternateContent xmlns:mc="http://schemas.openxmlformats.org/markup-compatibility/2006">
-        <mc:Choice xmlns:a14="http://schemas.microsoft.com/office/drawing/2010/main" Requires="a14">
+      <mc:AlternateContent xmlns:mc="http://schemas.openxmlformats.org/markup-compatibility/2006" xmlns:a14="http://schemas.microsoft.com/office/drawing/2010/main">
+        <mc:Choice Requires="a14">
           <p:graphicFrame>
             <p:nvGraphicFramePr>
               <p:cNvPr id="4" name="Tabla 4">
@@ -14479,7 +14478,7 @@
             </a:graphic>
           </p:graphicFrame>
         </mc:Choice>
-        <mc:Fallback>
+        <mc:Fallback xmlns="">
           <p:graphicFrame>
             <p:nvGraphicFramePr>
               <p:cNvPr id="4" name="Tabla 4">
@@ -14883,8 +14882,8 @@
           </a:p>
         </p:txBody>
       </p:sp>
-      <mc:AlternateContent xmlns:mc="http://schemas.openxmlformats.org/markup-compatibility/2006">
-        <mc:Choice xmlns:a14="http://schemas.microsoft.com/office/drawing/2010/main" Requires="a14">
+      <mc:AlternateContent xmlns:mc="http://schemas.openxmlformats.org/markup-compatibility/2006" xmlns:a14="http://schemas.microsoft.com/office/drawing/2010/main">
+        <mc:Choice Requires="a14">
           <p:graphicFrame>
             <p:nvGraphicFramePr>
               <p:cNvPr id="16" name="Tabla 15">
@@ -15620,7 +15619,7 @@
             </a:graphic>
           </p:graphicFrame>
         </mc:Choice>
-        <mc:Fallback>
+        <mc:Fallback xmlns="">
           <p:graphicFrame>
             <p:nvGraphicFramePr>
               <p:cNvPr id="16" name="Tabla 15">
@@ -16472,8 +16471,8 @@
           </a:p>
         </p:txBody>
       </p:sp>
-      <mc:AlternateContent xmlns:mc="http://schemas.openxmlformats.org/markup-compatibility/2006">
-        <mc:Choice xmlns:a14="http://schemas.microsoft.com/office/drawing/2010/main" Requires="a14">
+      <mc:AlternateContent xmlns:mc="http://schemas.openxmlformats.org/markup-compatibility/2006" xmlns:a14="http://schemas.microsoft.com/office/drawing/2010/main">
+        <mc:Choice Requires="a14">
           <p:graphicFrame>
             <p:nvGraphicFramePr>
               <p:cNvPr id="5" name="Tabla 4">
@@ -17209,7 +17208,7 @@
             </a:graphic>
           </p:graphicFrame>
         </mc:Choice>
-        <mc:Fallback>
+        <mc:Fallback xmlns="">
           <p:graphicFrame>
             <p:nvGraphicFramePr>
               <p:cNvPr id="5" name="Tabla 4">
@@ -18061,8 +18060,8 @@
           </a:p>
         </p:txBody>
       </p:sp>
-      <mc:AlternateContent xmlns:mc="http://schemas.openxmlformats.org/markup-compatibility/2006">
-        <mc:Choice xmlns:a14="http://schemas.microsoft.com/office/drawing/2010/main" Requires="a14">
+      <mc:AlternateContent xmlns:mc="http://schemas.openxmlformats.org/markup-compatibility/2006" xmlns:a14="http://schemas.microsoft.com/office/drawing/2010/main">
+        <mc:Choice Requires="a14">
           <p:graphicFrame>
             <p:nvGraphicFramePr>
               <p:cNvPr id="6" name="Tabla 4">
@@ -18798,7 +18797,7 @@
             </a:graphic>
           </p:graphicFrame>
         </mc:Choice>
-        <mc:Fallback>
+        <mc:Fallback xmlns="">
           <p:graphicFrame>
             <p:nvGraphicFramePr>
               <p:cNvPr id="6" name="Tabla 4">
@@ -19650,8 +19649,8 @@
           </a:p>
         </p:txBody>
       </p:sp>
-      <mc:AlternateContent xmlns:mc="http://schemas.openxmlformats.org/markup-compatibility/2006">
-        <mc:Choice xmlns:a14="http://schemas.microsoft.com/office/drawing/2010/main" Requires="a14">
+      <mc:AlternateContent xmlns:mc="http://schemas.openxmlformats.org/markup-compatibility/2006" xmlns:a14="http://schemas.microsoft.com/office/drawing/2010/main">
+        <mc:Choice Requires="a14">
           <p:graphicFrame>
             <p:nvGraphicFramePr>
               <p:cNvPr id="5" name="Tabla 4">
@@ -20387,7 +20386,7 @@
             </a:graphic>
           </p:graphicFrame>
         </mc:Choice>
-        <mc:Fallback>
+        <mc:Fallback xmlns="">
           <p:graphicFrame>
             <p:nvGraphicFramePr>
               <p:cNvPr id="5" name="Tabla 4">
@@ -21238,8 +21237,8 @@
           </a:p>
         </p:txBody>
       </p:sp>
-      <mc:AlternateContent xmlns:mc="http://schemas.openxmlformats.org/markup-compatibility/2006">
-        <mc:Choice xmlns:a14="http://schemas.microsoft.com/office/drawing/2010/main" Requires="a14">
+      <mc:AlternateContent xmlns:mc="http://schemas.openxmlformats.org/markup-compatibility/2006" xmlns:a14="http://schemas.microsoft.com/office/drawing/2010/main">
+        <mc:Choice Requires="a14">
           <p:graphicFrame>
             <p:nvGraphicFramePr>
               <p:cNvPr id="5" name="Tabla 4">
@@ -21975,7 +21974,7 @@
             </a:graphic>
           </p:graphicFrame>
         </mc:Choice>
-        <mc:Fallback>
+        <mc:Fallback xmlns="">
           <p:graphicFrame>
             <p:nvGraphicFramePr>
               <p:cNvPr id="5" name="Tabla 4">
@@ -22993,8 +22992,8 @@
           </a:p>
         </p:txBody>
       </p:sp>
-      <mc:AlternateContent xmlns:mc="http://schemas.openxmlformats.org/markup-compatibility/2006">
-        <mc:Choice xmlns:a14="http://schemas.microsoft.com/office/drawing/2010/main" Requires="a14">
+      <mc:AlternateContent xmlns:mc="http://schemas.openxmlformats.org/markup-compatibility/2006" xmlns:a14="http://schemas.microsoft.com/office/drawing/2010/main">
+        <mc:Choice Requires="a14">
           <p:sp>
             <p:nvSpPr>
               <p:cNvPr id="3" name="Marcador de contenido 2">
@@ -23211,18 +23210,7 @@
                         <a:latin typeface="Cambria Math" panose="02040503050406030204" pitchFamily="18" charset="0"/>
                         <a:ea typeface="Cambria Math" panose="02040503050406030204" pitchFamily="18" charset="0"/>
                       </a:rPr>
-                      <m:t>∧</m:t>
-                    </m:r>
-                    <m:r>
-                      <a:rPr lang="es-MX" sz="2000" b="0" i="1" smtClean="0">
-                        <a:solidFill>
-                          <a:srgbClr val="5C5962"/>
-                        </a:solidFill>
-                        <a:effectLst/>
-                        <a:latin typeface="Cambria Math" panose="02040503050406030204" pitchFamily="18" charset="0"/>
-                        <a:ea typeface="Cambria Math" panose="02040503050406030204" pitchFamily="18" charset="0"/>
-                      </a:rPr>
-                      <m:t>¬</m:t>
+                      <m:t>∧¬</m:t>
                     </m:r>
                     <m:r>
                       <a:rPr lang="es-MX" sz="2000" b="0" i="1" smtClean="0">
@@ -23283,7 +23271,7 @@
                     <m:d>
                       <m:dPr>
                         <m:ctrlPr>
-                          <a:rPr lang="es-MX" sz="2000" b="0" i="0" smtClean="0">
+                          <a:rPr lang="es-MX" sz="2000" b="0" i="1" smtClean="0">
                             <a:solidFill>
                               <a:srgbClr val="5C5962"/>
                             </a:solidFill>
@@ -23858,7 +23846,7 @@
                     <m:d>
                       <m:dPr>
                         <m:ctrlPr>
-                          <a:rPr lang="es-MX" sz="2000" b="0" i="0" smtClean="0">
+                          <a:rPr lang="es-MX" sz="2000" b="0" i="1" smtClean="0">
                             <a:solidFill>
                               <a:srgbClr val="5C5962"/>
                             </a:solidFill>
@@ -24083,7 +24071,7 @@
             </p:txBody>
           </p:sp>
         </mc:Choice>
-        <mc:Fallback>
+        <mc:Fallback xmlns="">
           <p:sp>
             <p:nvSpPr>
               <p:cNvPr id="3" name="Marcador de contenido 2">
@@ -24190,8 +24178,8 @@
           </a:p>
         </p:txBody>
       </p:sp>
-      <mc:AlternateContent xmlns:mc="http://schemas.openxmlformats.org/markup-compatibility/2006">
-        <mc:Choice xmlns:a14="http://schemas.microsoft.com/office/drawing/2010/main" Requires="a14">
+      <mc:AlternateContent xmlns:mc="http://schemas.openxmlformats.org/markup-compatibility/2006" xmlns:a14="http://schemas.microsoft.com/office/drawing/2010/main">
+        <mc:Choice Requires="a14">
           <p:sp>
             <p:nvSpPr>
               <p:cNvPr id="3" name="Marcador de contenido 2">
@@ -24401,18 +24389,7 @@
                         <a:latin typeface="Cambria Math" panose="02040503050406030204" pitchFamily="18" charset="0"/>
                         <a:ea typeface="Cambria Math" panose="02040503050406030204" pitchFamily="18" charset="0"/>
                       </a:rPr>
-                      <m:t>∧</m:t>
-                    </m:r>
-                    <m:r>
-                      <a:rPr lang="es-MX" sz="2000" b="0" i="1" smtClean="0">
-                        <a:solidFill>
-                          <a:srgbClr val="5C5962"/>
-                        </a:solidFill>
-                        <a:effectLst/>
-                        <a:latin typeface="Cambria Math" panose="02040503050406030204" pitchFamily="18" charset="0"/>
-                        <a:ea typeface="Cambria Math" panose="02040503050406030204" pitchFamily="18" charset="0"/>
-                      </a:rPr>
-                      <m:t>¬</m:t>
+                      <m:t>∧¬</m:t>
                     </m:r>
                     <m:r>
                       <a:rPr lang="es-MX" sz="2000" b="0" i="1" smtClean="0">
@@ -24444,7 +24421,7 @@
             </p:txBody>
           </p:sp>
         </mc:Choice>
-        <mc:Fallback>
+        <mc:Fallback xmlns="">
           <p:sp>
             <p:nvSpPr>
               <p:cNvPr id="3" name="Marcador de contenido 2">
@@ -24663,8 +24640,8 @@
           </a:p>
         </p:txBody>
       </p:sp>
-      <mc:AlternateContent xmlns:mc="http://schemas.openxmlformats.org/markup-compatibility/2006">
-        <mc:Choice xmlns:a14="http://schemas.microsoft.com/office/drawing/2010/main" Requires="a14">
+      <mc:AlternateContent xmlns:mc="http://schemas.openxmlformats.org/markup-compatibility/2006" xmlns:a14="http://schemas.microsoft.com/office/drawing/2010/main">
+        <mc:Choice Requires="a14">
           <p:sp>
             <p:nvSpPr>
               <p:cNvPr id="3" name="Marcador de contenido 2">
@@ -25050,7 +25027,7 @@
             </p:txBody>
           </p:sp>
         </mc:Choice>
-        <mc:Fallback>
+        <mc:Fallback xmlns="">
           <p:sp>
             <p:nvSpPr>
               <p:cNvPr id="3" name="Marcador de contenido 2">
@@ -25157,8 +25134,8 @@
           </a:p>
         </p:txBody>
       </p:sp>
-      <mc:AlternateContent xmlns:mc="http://schemas.openxmlformats.org/markup-compatibility/2006">
-        <mc:Choice xmlns:a14="http://schemas.microsoft.com/office/drawing/2010/main" Requires="a14">
+      <mc:AlternateContent xmlns:mc="http://schemas.openxmlformats.org/markup-compatibility/2006" xmlns:a14="http://schemas.microsoft.com/office/drawing/2010/main">
+        <mc:Choice Requires="a14">
           <p:sp>
             <p:nvSpPr>
               <p:cNvPr id="3" name="Marcador de contenido 2">
@@ -25709,7 +25686,7 @@
             </p:txBody>
           </p:sp>
         </mc:Choice>
-        <mc:Fallback>
+        <mc:Fallback xmlns="">
           <p:sp>
             <p:nvSpPr>
               <p:cNvPr id="3" name="Marcador de contenido 2">
@@ -25767,5905 +25744,6 @@
 </file>
 
 <file path=ppt/slides/slide32.xml><?xml version="1.0" encoding="utf-8"?>
-<p:sld xmlns:a="http://schemas.openxmlformats.org/drawingml/2006/main" xmlns:r="http://schemas.openxmlformats.org/officeDocument/2006/relationships" xmlns:p="http://schemas.openxmlformats.org/presentationml/2006/main">
-  <p:cSld>
-    <p:spTree>
-      <p:nvGrpSpPr>
-        <p:cNvPr id="1" name=""/>
-        <p:cNvGrpSpPr/>
-        <p:nvPr/>
-      </p:nvGrpSpPr>
-      <p:grpSpPr>
-        <a:xfrm>
-          <a:off x="0" y="0"/>
-          <a:ext cx="0" cy="0"/>
-          <a:chOff x="0" y="0"/>
-          <a:chExt cx="0" cy="0"/>
-        </a:xfrm>
-      </p:grpSpPr>
-      <p:sp>
-        <p:nvSpPr>
-          <p:cNvPr id="2" name="Título 1">
-            <a:extLst>
-              <a:ext uri="{FF2B5EF4-FFF2-40B4-BE49-F238E27FC236}">
-                <a16:creationId xmlns:a16="http://schemas.microsoft.com/office/drawing/2014/main" id="{363AF66F-7D38-4DEC-A157-5A496140F1BF}"/>
-              </a:ext>
-            </a:extLst>
-          </p:cNvPr>
-          <p:cNvSpPr>
-            <a:spLocks noGrp="1"/>
-          </p:cNvSpPr>
-          <p:nvPr>
-            <p:ph type="title"/>
-          </p:nvPr>
-        </p:nvSpPr>
-        <p:spPr>
-          <a:xfrm>
-            <a:off x="838199" y="226580"/>
-            <a:ext cx="10515600" cy="1325563"/>
-          </a:xfrm>
-        </p:spPr>
-        <p:txBody>
-          <a:bodyPr/>
-          <a:lstStyle/>
-          <a:p>
-            <a:r>
-              <a:rPr lang="es-CO" dirty="0"/>
-              <a:t>Tablas de verdad</a:t>
-            </a:r>
-          </a:p>
-        </p:txBody>
-      </p:sp>
-      <p:sp>
-        <p:nvSpPr>
-          <p:cNvPr id="3" name="Marcador de contenido 2">
-            <a:extLst>
-              <a:ext uri="{FF2B5EF4-FFF2-40B4-BE49-F238E27FC236}">
-                <a16:creationId xmlns:a16="http://schemas.microsoft.com/office/drawing/2014/main" id="{8C611C1C-AB20-4127-87E3-88401D8503D0}"/>
-              </a:ext>
-            </a:extLst>
-          </p:cNvPr>
-          <p:cNvSpPr>
-            <a:spLocks noGrp="1"/>
-          </p:cNvSpPr>
-          <p:nvPr>
-            <p:ph idx="1"/>
-          </p:nvPr>
-        </p:nvSpPr>
-        <p:spPr>
-          <a:xfrm>
-            <a:off x="360218" y="1375234"/>
-            <a:ext cx="11471563" cy="1742039"/>
-          </a:xfrm>
-        </p:spPr>
-        <p:txBody>
-          <a:bodyPr>
-            <a:normAutofit/>
-          </a:bodyPr>
-          <a:lstStyle/>
-          <a:p>
-            <a:pPr marL="0" indent="0">
-              <a:buNone/>
-            </a:pPr>
-            <a:r>
-              <a:rPr lang="es-MX" b="1" dirty="0">
-                <a:solidFill>
-                  <a:schemeClr val="accent2"/>
-                </a:solidFill>
-              </a:rPr>
-              <a:t>Definición</a:t>
-            </a:r>
-          </a:p>
-          <a:p>
-            <a:r>
-              <a:rPr lang="es-MX" sz="2000" dirty="0">
-                <a:solidFill>
-                  <a:srgbClr val="131314"/>
-                </a:solidFill>
-              </a:rPr>
-              <a:t>Herramienta tabular empleada para analizar todos los posibles valores de verdad de la expresión que evalúa.</a:t>
-            </a:r>
-          </a:p>
-          <a:p>
-            <a:r>
-              <a:rPr lang="es-MX" sz="2000" b="0" i="0" dirty="0">
-                <a:solidFill>
-                  <a:srgbClr val="131314"/>
-                </a:solidFill>
-                <a:effectLst/>
-              </a:rPr>
-              <a:t>Alternativa a la evaluación de expresiones lógicas que facilita la tarea de evaluar.</a:t>
-            </a:r>
-          </a:p>
-          <a:p>
-            <a:pPr lvl="1"/>
-            <a:endParaRPr lang="es-MX" sz="1600" b="0" i="0" dirty="0">
-              <a:solidFill>
-                <a:srgbClr val="131314"/>
-              </a:solidFill>
-              <a:effectLst/>
-              <a:latin typeface="Google Sans Text"/>
-            </a:endParaRPr>
-          </a:p>
-          <a:p>
-            <a:pPr marL="0" indent="0">
-              <a:buNone/>
-            </a:pPr>
-            <a:endParaRPr lang="es-MX" dirty="0"/>
-          </a:p>
-        </p:txBody>
-      </p:sp>
-      <mc:AlternateContent xmlns:mc="http://schemas.openxmlformats.org/markup-compatibility/2006">
-        <mc:Choice xmlns:a14="http://schemas.microsoft.com/office/drawing/2010/main" Requires="a14">
-          <p:graphicFrame>
-            <p:nvGraphicFramePr>
-              <p:cNvPr id="4" name="Tabla 4">
-                <a:extLst>
-                  <a:ext uri="{FF2B5EF4-FFF2-40B4-BE49-F238E27FC236}">
-                    <a16:creationId xmlns:a16="http://schemas.microsoft.com/office/drawing/2014/main" id="{0F501037-3838-4096-B05E-78C31FBAAC97}"/>
-                  </a:ext>
-                </a:extLst>
-              </p:cNvPr>
-              <p:cNvGraphicFramePr>
-                <a:graphicFrameLocks noGrp="1"/>
-              </p:cNvGraphicFramePr>
-              <p:nvPr>
-                <p:extLst>
-                  <p:ext uri="{D42A27DB-BD31-4B8C-83A1-F6EECF244321}">
-                    <p14:modId xmlns:p14="http://schemas.microsoft.com/office/powerpoint/2010/main" val="1833097949"/>
-                  </p:ext>
-                </p:extLst>
-              </p:nvPr>
-            </p:nvGraphicFramePr>
-            <p:xfrm>
-              <a:off x="1910583" y="3937576"/>
-              <a:ext cx="1135628" cy="1280160"/>
-            </p:xfrm>
-            <a:graphic>
-              <a:graphicData uri="http://schemas.openxmlformats.org/drawingml/2006/table">
-                <a:tbl>
-                  <a:tblPr firstRow="1" bandRow="1"/>
-                  <a:tblGrid>
-                    <a:gridCol w="567814">
-                      <a:extLst>
-                        <a:ext uri="{9D8B030D-6E8A-4147-A177-3AD203B41FA5}">
-                          <a16:colId xmlns:a16="http://schemas.microsoft.com/office/drawing/2014/main" val="384604534"/>
-                        </a:ext>
-                      </a:extLst>
-                    </a:gridCol>
-                    <a:gridCol w="567814">
-                      <a:extLst>
-                        <a:ext uri="{9D8B030D-6E8A-4147-A177-3AD203B41FA5}">
-                          <a16:colId xmlns:a16="http://schemas.microsoft.com/office/drawing/2014/main" val="79869298"/>
-                        </a:ext>
-                      </a:extLst>
-                    </a:gridCol>
-                  </a:tblGrid>
-                  <a:tr h="352522">
-                    <a:tc>
-                      <a:txBody>
-                        <a:bodyPr/>
-                        <a:lstStyle/>
-                        <a:p>
-                          <a:pPr algn="ctr"/>
-                          <a14:m>
-                            <m:oMathPara xmlns:m="http://schemas.openxmlformats.org/officeDocument/2006/math">
-                              <m:oMathParaPr>
-                                <m:jc m:val="centerGroup"/>
-                              </m:oMathParaPr>
-                              <m:oMath xmlns:m="http://schemas.openxmlformats.org/officeDocument/2006/math">
-                                <m:r>
-                                  <a:rPr lang="es-MX" sz="2200" b="1" i="1" smtClean="0">
-                                    <a:latin typeface="Cambria Math" panose="02040503050406030204" pitchFamily="18" charset="0"/>
-                                    <a:ea typeface="Roboto" panose="02000000000000000000" pitchFamily="2" charset="0"/>
-                                  </a:rPr>
-                                  <m:t>𝒑</m:t>
-                                </m:r>
-                              </m:oMath>
-                            </m:oMathPara>
-                          </a14:m>
-                          <a:endParaRPr lang="es-CO" sz="2200" b="1" dirty="0">
-                            <a:latin typeface="Roboto" panose="02000000000000000000" pitchFamily="2" charset="0"/>
-                            <a:ea typeface="Roboto" panose="02000000000000000000" pitchFamily="2" charset="0"/>
-                          </a:endParaRPr>
-                        </a:p>
-                      </a:txBody>
-                      <a:tcPr/>
-                    </a:tc>
-                    <a:tc>
-                      <a:txBody>
-                        <a:bodyPr/>
-                        <a:lstStyle/>
-                        <a:p>
-                          <a:pPr algn="ctr"/>
-                          <a14:m>
-                            <m:oMathPara xmlns:m="http://schemas.openxmlformats.org/officeDocument/2006/math">
-                              <m:oMathParaPr>
-                                <m:jc m:val="centerGroup"/>
-                              </m:oMathParaPr>
-                              <m:oMath xmlns:m="http://schemas.openxmlformats.org/officeDocument/2006/math">
-                                <m:r>
-                                  <a:rPr lang="es-MX" sz="2200" b="1" i="1" smtClean="0">
-                                    <a:latin typeface="Cambria Math" panose="02040503050406030204" pitchFamily="18" charset="0"/>
-                                    <a:ea typeface="Roboto" panose="02000000000000000000" pitchFamily="2" charset="0"/>
-                                  </a:rPr>
-                                  <m:t>¬</m:t>
-                                </m:r>
-                                <m:r>
-                                  <a:rPr lang="es-MX" sz="2200" b="1" i="1" smtClean="0">
-                                    <a:latin typeface="Cambria Math" panose="02040503050406030204" pitchFamily="18" charset="0"/>
-                                    <a:ea typeface="Roboto" panose="02000000000000000000" pitchFamily="2" charset="0"/>
-                                  </a:rPr>
-                                  <m:t>𝒑</m:t>
-                                </m:r>
-                              </m:oMath>
-                            </m:oMathPara>
-                          </a14:m>
-                          <a:endParaRPr lang="es-CO" sz="2200" b="1" dirty="0">
-                            <a:latin typeface="Roboto" panose="02000000000000000000" pitchFamily="2" charset="0"/>
-                            <a:ea typeface="Roboto" panose="02000000000000000000" pitchFamily="2" charset="0"/>
-                          </a:endParaRPr>
-                        </a:p>
-                      </a:txBody>
-                      <a:tcPr/>
-                    </a:tc>
-                    <a:extLst>
-                      <a:ext uri="{0D108BD9-81ED-4DB2-BD59-A6C34878D82A}">
-                        <a16:rowId xmlns:a16="http://schemas.microsoft.com/office/drawing/2014/main" val="113670299"/>
-                      </a:ext>
-                    </a:extLst>
-                  </a:tr>
-                  <a:tr h="352522">
-                    <a:tc>
-                      <a:txBody>
-                        <a:bodyPr/>
-                        <a:lstStyle/>
-                        <a:p>
-                          <a:pPr marL="0" marR="0" lvl="0" indent="0" algn="ctr" defTabSz="914400" rtl="0" eaLnBrk="1" fontAlgn="auto" latinLnBrk="0" hangingPunct="1">
-                            <a:lnSpc>
-                              <a:spcPct val="100000"/>
-                            </a:lnSpc>
-                            <a:spcBef>
-                              <a:spcPts val="0"/>
-                            </a:spcBef>
-                            <a:spcAft>
-                              <a:spcPts val="0"/>
-                            </a:spcAft>
-                            <a:buClr>
-                              <a:srgbClr val="000000"/>
-                            </a:buClr>
-                            <a:buSzTx/>
-                            <a:buFont typeface="Arial"/>
-                            <a:buNone/>
-                            <a:tabLst/>
-                            <a:defRPr/>
-                          </a:pPr>
-                          <a14:m>
-                            <m:oMathPara xmlns:m="http://schemas.openxmlformats.org/officeDocument/2006/math">
-                              <m:oMathParaPr>
-                                <m:jc m:val="centerGroup"/>
-                              </m:oMathParaPr>
-                              <m:oMath xmlns:m="http://schemas.openxmlformats.org/officeDocument/2006/math">
-                                <m:r>
-                                  <a:rPr lang="es-MX" sz="2200" b="0" i="1" smtClean="0">
-                                    <a:latin typeface="Cambria Math" panose="02040503050406030204" pitchFamily="18" charset="0"/>
-                                    <a:ea typeface="Roboto" panose="02000000000000000000" pitchFamily="2" charset="0"/>
-                                  </a:rPr>
-                                  <m:t>𝐹</m:t>
-                                </m:r>
-                              </m:oMath>
-                            </m:oMathPara>
-                          </a14:m>
-                          <a:endParaRPr lang="es-CO" sz="2200" dirty="0">
-                            <a:latin typeface="Roboto" panose="02000000000000000000" pitchFamily="2" charset="0"/>
-                            <a:ea typeface="Roboto" panose="02000000000000000000" pitchFamily="2" charset="0"/>
-                          </a:endParaRPr>
-                        </a:p>
-                      </a:txBody>
-                      <a:tcPr/>
-                    </a:tc>
-                    <a:tc>
-                      <a:txBody>
-                        <a:bodyPr/>
-                        <a:lstStyle/>
-                        <a:p>
-                          <a:pPr algn="ctr"/>
-                          <a14:m>
-                            <m:oMathPara xmlns:m="http://schemas.openxmlformats.org/officeDocument/2006/math">
-                              <m:oMathParaPr>
-                                <m:jc m:val="centerGroup"/>
-                              </m:oMathParaPr>
-                              <m:oMath xmlns:m="http://schemas.openxmlformats.org/officeDocument/2006/math">
-                                <m:r>
-                                  <a:rPr lang="es-MX" sz="2200" b="0" i="1" smtClean="0">
-                                    <a:latin typeface="Cambria Math" panose="02040503050406030204" pitchFamily="18" charset="0"/>
-                                    <a:ea typeface="Roboto" panose="02000000000000000000" pitchFamily="2" charset="0"/>
-                                  </a:rPr>
-                                  <m:t>𝑉</m:t>
-                                </m:r>
-                              </m:oMath>
-                            </m:oMathPara>
-                          </a14:m>
-                          <a:endParaRPr lang="es-CO" sz="2200" dirty="0">
-                            <a:latin typeface="Roboto" panose="02000000000000000000" pitchFamily="2" charset="0"/>
-                            <a:ea typeface="Roboto" panose="02000000000000000000" pitchFamily="2" charset="0"/>
-                          </a:endParaRPr>
-                        </a:p>
-                      </a:txBody>
-                      <a:tcPr/>
-                    </a:tc>
-                    <a:extLst>
-                      <a:ext uri="{0D108BD9-81ED-4DB2-BD59-A6C34878D82A}">
-                        <a16:rowId xmlns:a16="http://schemas.microsoft.com/office/drawing/2014/main" val="1805549228"/>
-                      </a:ext>
-                    </a:extLst>
-                  </a:tr>
-                  <a:tr h="352522">
-                    <a:tc>
-                      <a:txBody>
-                        <a:bodyPr/>
-                        <a:lstStyle/>
-                        <a:p>
-                          <a:pPr algn="ctr"/>
-                          <a14:m>
-                            <m:oMathPara xmlns:m="http://schemas.openxmlformats.org/officeDocument/2006/math">
-                              <m:oMathParaPr>
-                                <m:jc m:val="centerGroup"/>
-                              </m:oMathParaPr>
-                              <m:oMath xmlns:m="http://schemas.openxmlformats.org/officeDocument/2006/math">
-                                <m:r>
-                                  <a:rPr lang="es-MX" sz="2200" b="0" i="1" smtClean="0">
-                                    <a:latin typeface="Cambria Math" panose="02040503050406030204" pitchFamily="18" charset="0"/>
-                                    <a:ea typeface="Roboto" panose="02000000000000000000" pitchFamily="2" charset="0"/>
-                                  </a:rPr>
-                                  <m:t>𝑉</m:t>
-                                </m:r>
-                              </m:oMath>
-                            </m:oMathPara>
-                          </a14:m>
-                          <a:endParaRPr lang="es-CO" sz="2200" dirty="0">
-                            <a:latin typeface="Roboto" panose="02000000000000000000" pitchFamily="2" charset="0"/>
-                            <a:ea typeface="Roboto" panose="02000000000000000000" pitchFamily="2" charset="0"/>
-                          </a:endParaRPr>
-                        </a:p>
-                      </a:txBody>
-                      <a:tcPr/>
-                    </a:tc>
-                    <a:tc>
-                      <a:txBody>
-                        <a:bodyPr/>
-                        <a:lstStyle/>
-                        <a:p>
-                          <a:pPr marL="0" marR="0" lvl="0" indent="0" algn="ctr" defTabSz="914400" rtl="0" eaLnBrk="1" fontAlgn="auto" latinLnBrk="0" hangingPunct="1">
-                            <a:lnSpc>
-                              <a:spcPct val="100000"/>
-                            </a:lnSpc>
-                            <a:spcBef>
-                              <a:spcPts val="0"/>
-                            </a:spcBef>
-                            <a:spcAft>
-                              <a:spcPts val="0"/>
-                            </a:spcAft>
-                            <a:buClr>
-                              <a:srgbClr val="000000"/>
-                            </a:buClr>
-                            <a:buSzTx/>
-                            <a:buFont typeface="Arial"/>
-                            <a:buNone/>
-                            <a:tabLst/>
-                            <a:defRPr/>
-                          </a:pPr>
-                          <a14:m>
-                            <m:oMathPara xmlns:m="http://schemas.openxmlformats.org/officeDocument/2006/math">
-                              <m:oMathParaPr>
-                                <m:jc m:val="centerGroup"/>
-                              </m:oMathParaPr>
-                              <m:oMath xmlns:m="http://schemas.openxmlformats.org/officeDocument/2006/math">
-                                <m:r>
-                                  <a:rPr lang="es-MX" sz="2200" b="0" i="1" smtClean="0">
-                                    <a:latin typeface="Cambria Math" panose="02040503050406030204" pitchFamily="18" charset="0"/>
-                                    <a:ea typeface="Cambria Math" panose="02040503050406030204" pitchFamily="18" charset="0"/>
-                                  </a:rPr>
-                                  <m:t>𝐹</m:t>
-                                </m:r>
-                              </m:oMath>
-                            </m:oMathPara>
-                          </a14:m>
-                          <a:endParaRPr lang="es-CO" sz="2200" dirty="0">
-                            <a:latin typeface="Roboto" panose="02000000000000000000" pitchFamily="2" charset="0"/>
-                            <a:ea typeface="Roboto" panose="02000000000000000000" pitchFamily="2" charset="0"/>
-                          </a:endParaRPr>
-                        </a:p>
-                      </a:txBody>
-                      <a:tcPr/>
-                    </a:tc>
-                    <a:extLst>
-                      <a:ext uri="{0D108BD9-81ED-4DB2-BD59-A6C34878D82A}">
-                        <a16:rowId xmlns:a16="http://schemas.microsoft.com/office/drawing/2014/main" val="2353127006"/>
-                      </a:ext>
-                    </a:extLst>
-                  </a:tr>
-                </a:tbl>
-              </a:graphicData>
-            </a:graphic>
-          </p:graphicFrame>
-        </mc:Choice>
-        <mc:Fallback>
-          <p:graphicFrame>
-            <p:nvGraphicFramePr>
-              <p:cNvPr id="4" name="Tabla 4">
-                <a:extLst>
-                  <a:ext uri="{FF2B5EF4-FFF2-40B4-BE49-F238E27FC236}">
-                    <a16:creationId xmlns:a16="http://schemas.microsoft.com/office/drawing/2014/main" id="{0F501037-3838-4096-B05E-78C31FBAAC97}"/>
-                  </a:ext>
-                </a:extLst>
-              </p:cNvPr>
-              <p:cNvGraphicFramePr>
-                <a:graphicFrameLocks noGrp="1"/>
-              </p:cNvGraphicFramePr>
-              <p:nvPr>
-                <p:extLst>
-                  <p:ext uri="{D42A27DB-BD31-4B8C-83A1-F6EECF244321}">
-                    <p14:modId xmlns:p14="http://schemas.microsoft.com/office/powerpoint/2010/main" val="1833097949"/>
-                  </p:ext>
-                </p:extLst>
-              </p:nvPr>
-            </p:nvGraphicFramePr>
-            <p:xfrm>
-              <a:off x="1910583" y="3937576"/>
-              <a:ext cx="1135628" cy="1280160"/>
-            </p:xfrm>
-            <a:graphic>
-              <a:graphicData uri="http://schemas.openxmlformats.org/drawingml/2006/table">
-                <a:tbl>
-                  <a:tblPr firstRow="1" bandRow="1"/>
-                  <a:tblGrid>
-                    <a:gridCol w="567814">
-                      <a:extLst>
-                        <a:ext uri="{9D8B030D-6E8A-4147-A177-3AD203B41FA5}">
-                          <a16:colId xmlns:a16="http://schemas.microsoft.com/office/drawing/2014/main" val="384604534"/>
-                        </a:ext>
-                      </a:extLst>
-                    </a:gridCol>
-                    <a:gridCol w="567814">
-                      <a:extLst>
-                        <a:ext uri="{9D8B030D-6E8A-4147-A177-3AD203B41FA5}">
-                          <a16:colId xmlns:a16="http://schemas.microsoft.com/office/drawing/2014/main" val="79869298"/>
-                        </a:ext>
-                      </a:extLst>
-                    </a:gridCol>
-                  </a:tblGrid>
-                  <a:tr h="352522">
-                    <a:tc>
-                      <a:txBody>
-                        <a:bodyPr/>
-                        <a:lstStyle/>
-                        <a:p>
-                          <a:pPr algn="ctr"/>
-                          <a14:m xmlns:a14="http://schemas.microsoft.com/office/drawing/2010/main">
-                            <m:oMathPara xmlns:m="http://schemas.openxmlformats.org/officeDocument/2006/math">
-                              <m:oMathParaPr>
-                                <m:jc m:val="centerGroup"/>
-                              </m:oMathParaPr>
-                              <m:oMath xmlns:m="http://schemas.openxmlformats.org/officeDocument/2006/math">
-                                <m:r>
-                                  <a:rPr lang="es-MX" sz="2200" b="1" i="1" smtClean="0">
-                                    <a:latin typeface="Cambria Math" panose="02040503050406030204" pitchFamily="18" charset="0"/>
-                                    <a:ea typeface="Roboto" panose="02000000000000000000" pitchFamily="2" charset="0"/>
-                                  </a:rPr>
-                                  <m:t>𝒑</m:t>
-                                </m:r>
-                              </m:oMath>
-                            </m:oMathPara>
-                          </a14:m>
-                          <a:endParaRPr lang="es-CO" sz="2200" b="1" dirty="0">
-                            <a:latin typeface="Roboto" panose="02000000000000000000" pitchFamily="2" charset="0"/>
-                            <a:ea typeface="Roboto" panose="02000000000000000000" pitchFamily="2" charset="0"/>
-                          </a:endParaRPr>
-                        </a:p>
-                      </a:txBody>
-                      <a:tcPr/>
-                    </a:tc>
-                    <a:tc>
-                      <a:txBody>
-                        <a:bodyPr/>
-                        <a:lstStyle/>
-                        <a:p>
-                          <a:pPr algn="ctr"/>
-                          <a14:m xmlns:a14="http://schemas.microsoft.com/office/drawing/2010/main">
-                            <m:oMathPara xmlns:m="http://schemas.openxmlformats.org/officeDocument/2006/math">
-                              <m:oMathParaPr>
-                                <m:jc m:val="centerGroup"/>
-                              </m:oMathParaPr>
-                              <m:oMath xmlns:m="http://schemas.openxmlformats.org/officeDocument/2006/math">
-                                <m:r>
-                                  <a:rPr lang="es-MX" sz="2200" b="1" i="1" smtClean="0">
-                                    <a:latin typeface="Cambria Math" panose="02040503050406030204" pitchFamily="18" charset="0"/>
-                                    <a:ea typeface="Roboto" panose="02000000000000000000" pitchFamily="2" charset="0"/>
-                                  </a:rPr>
-                                  <m:t>¬</m:t>
-                                </m:r>
-                                <m:r>
-                                  <a:rPr lang="es-MX" sz="2200" b="1" i="1" smtClean="0">
-                                    <a:latin typeface="Cambria Math" panose="02040503050406030204" pitchFamily="18" charset="0"/>
-                                    <a:ea typeface="Roboto" panose="02000000000000000000" pitchFamily="2" charset="0"/>
-                                  </a:rPr>
-                                  <m:t>𝒑</m:t>
-                                </m:r>
-                              </m:oMath>
-                            </m:oMathPara>
-                          </a14:m>
-                          <a:endParaRPr lang="es-CO" sz="2200" b="1" dirty="0">
-                            <a:latin typeface="Roboto" panose="02000000000000000000" pitchFamily="2" charset="0"/>
-                            <a:ea typeface="Roboto" panose="02000000000000000000" pitchFamily="2" charset="0"/>
-                          </a:endParaRPr>
-                        </a:p>
-                      </a:txBody>
-                      <a:tcPr/>
-                    </a:tc>
-                    <a:extLst>
-                      <a:ext uri="{0D108BD9-81ED-4DB2-BD59-A6C34878D82A}">
-                        <a16:rowId xmlns:a16="http://schemas.microsoft.com/office/drawing/2014/main" val="113670299"/>
-                      </a:ext>
-                    </a:extLst>
-                  </a:tr>
-                  <a:tr h="352522">
-                    <a:tc>
-                      <a:txBody>
-                        <a:bodyPr/>
-                        <a:lstStyle/>
-                        <a:p>
-                          <a:pPr marL="0" marR="0" lvl="0" indent="0" algn="ctr" defTabSz="914400" rtl="0" eaLnBrk="1" fontAlgn="auto" latinLnBrk="0" hangingPunct="1">
-                            <a:lnSpc>
-                              <a:spcPct val="100000"/>
-                            </a:lnSpc>
-                            <a:spcBef>
-                              <a:spcPts val="0"/>
-                            </a:spcBef>
-                            <a:spcAft>
-                              <a:spcPts val="0"/>
-                            </a:spcAft>
-                            <a:buClr>
-                              <a:srgbClr val="000000"/>
-                            </a:buClr>
-                            <a:buSzTx/>
-                            <a:buFont typeface="Arial"/>
-                            <a:buNone/>
-                            <a:tabLst/>
-                            <a:defRPr/>
-                          </a:pPr>
-                          <a14:m xmlns:a14="http://schemas.microsoft.com/office/drawing/2010/main">
-                            <m:oMathPara xmlns:m="http://schemas.openxmlformats.org/officeDocument/2006/math">
-                              <m:oMathParaPr>
-                                <m:jc m:val="centerGroup"/>
-                              </m:oMathParaPr>
-                              <m:oMath xmlns:m="http://schemas.openxmlformats.org/officeDocument/2006/math">
-                                <m:r>
-                                  <a:rPr lang="es-MX" sz="2200" b="0" i="1" smtClean="0">
-                                    <a:latin typeface="Cambria Math" panose="02040503050406030204" pitchFamily="18" charset="0"/>
-                                    <a:ea typeface="Roboto" panose="02000000000000000000" pitchFamily="2" charset="0"/>
-                                  </a:rPr>
-                                  <m:t>𝐹</m:t>
-                                </m:r>
-                              </m:oMath>
-                            </m:oMathPara>
-                          </a14:m>
-                          <a:endParaRPr lang="es-CO" sz="2200" dirty="0">
-                            <a:latin typeface="Roboto" panose="02000000000000000000" pitchFamily="2" charset="0"/>
-                            <a:ea typeface="Roboto" panose="02000000000000000000" pitchFamily="2" charset="0"/>
-                          </a:endParaRPr>
-                        </a:p>
-                      </a:txBody>
-                      <a:tcPr/>
-                    </a:tc>
-                    <a:tc>
-                      <a:txBody>
-                        <a:bodyPr/>
-                        <a:lstStyle/>
-                        <a:p>
-                          <a:pPr algn="ctr"/>
-                          <a14:m xmlns:a14="http://schemas.microsoft.com/office/drawing/2010/main">
-                            <m:oMathPara xmlns:m="http://schemas.openxmlformats.org/officeDocument/2006/math">
-                              <m:oMathParaPr>
-                                <m:jc m:val="centerGroup"/>
-                              </m:oMathParaPr>
-                              <m:oMath xmlns:m="http://schemas.openxmlformats.org/officeDocument/2006/math">
-                                <m:r>
-                                  <a:rPr lang="es-MX" sz="2200" b="0" i="1" smtClean="0">
-                                    <a:latin typeface="Cambria Math" panose="02040503050406030204" pitchFamily="18" charset="0"/>
-                                    <a:ea typeface="Roboto" panose="02000000000000000000" pitchFamily="2" charset="0"/>
-                                  </a:rPr>
-                                  <m:t>𝑉</m:t>
-                                </m:r>
-                              </m:oMath>
-                            </m:oMathPara>
-                          </a14:m>
-                          <a:endParaRPr lang="es-CO" sz="2200" dirty="0">
-                            <a:latin typeface="Roboto" panose="02000000000000000000" pitchFamily="2" charset="0"/>
-                            <a:ea typeface="Roboto" panose="02000000000000000000" pitchFamily="2" charset="0"/>
-                          </a:endParaRPr>
-                        </a:p>
-                      </a:txBody>
-                      <a:tcPr/>
-                    </a:tc>
-                    <a:extLst>
-                      <a:ext uri="{0D108BD9-81ED-4DB2-BD59-A6C34878D82A}">
-                        <a16:rowId xmlns:a16="http://schemas.microsoft.com/office/drawing/2014/main" val="1805549228"/>
-                      </a:ext>
-                    </a:extLst>
-                  </a:tr>
-                  <a:tr h="352522">
-                    <a:tc>
-                      <a:txBody>
-                        <a:bodyPr/>
-                        <a:lstStyle/>
-                        <a:p>
-                          <a:pPr algn="ctr"/>
-                          <a14:m xmlns:a14="http://schemas.microsoft.com/office/drawing/2010/main">
-                            <m:oMathPara xmlns:m="http://schemas.openxmlformats.org/officeDocument/2006/math">
-                              <m:oMathParaPr>
-                                <m:jc m:val="centerGroup"/>
-                              </m:oMathParaPr>
-                              <m:oMath xmlns:m="http://schemas.openxmlformats.org/officeDocument/2006/math">
-                                <m:r>
-                                  <a:rPr lang="es-MX" sz="2200" b="0" i="1" smtClean="0">
-                                    <a:latin typeface="Cambria Math" panose="02040503050406030204" pitchFamily="18" charset="0"/>
-                                    <a:ea typeface="Roboto" panose="02000000000000000000" pitchFamily="2" charset="0"/>
-                                  </a:rPr>
-                                  <m:t>𝑉</m:t>
-                                </m:r>
-                              </m:oMath>
-                            </m:oMathPara>
-                          </a14:m>
-                          <a:endParaRPr lang="es-CO" sz="2200" dirty="0">
-                            <a:latin typeface="Roboto" panose="02000000000000000000" pitchFamily="2" charset="0"/>
-                            <a:ea typeface="Roboto" panose="02000000000000000000" pitchFamily="2" charset="0"/>
-                          </a:endParaRPr>
-                        </a:p>
-                      </a:txBody>
-                      <a:tcPr/>
-                    </a:tc>
-                    <a:tc>
-                      <a:txBody>
-                        <a:bodyPr/>
-                        <a:lstStyle/>
-                        <a:p>
-                          <a:pPr marL="0" marR="0" lvl="0" indent="0" algn="ctr" defTabSz="914400" rtl="0" eaLnBrk="1" fontAlgn="auto" latinLnBrk="0" hangingPunct="1">
-                            <a:lnSpc>
-                              <a:spcPct val="100000"/>
-                            </a:lnSpc>
-                            <a:spcBef>
-                              <a:spcPts val="0"/>
-                            </a:spcBef>
-                            <a:spcAft>
-                              <a:spcPts val="0"/>
-                            </a:spcAft>
-                            <a:buClr>
-                              <a:srgbClr val="000000"/>
-                            </a:buClr>
-                            <a:buSzTx/>
-                            <a:buFont typeface="Arial"/>
-                            <a:buNone/>
-                            <a:tabLst/>
-                            <a:defRPr/>
-                          </a:pPr>
-                          <a14:m xmlns:a14="http://schemas.microsoft.com/office/drawing/2010/main">
-                            <m:oMathPara xmlns:m="http://schemas.openxmlformats.org/officeDocument/2006/math">
-                              <m:oMathParaPr>
-                                <m:jc m:val="centerGroup"/>
-                              </m:oMathParaPr>
-                              <m:oMath xmlns:m="http://schemas.openxmlformats.org/officeDocument/2006/math">
-                                <m:r>
-                                  <a:rPr lang="es-MX" sz="2200" b="0" i="1" smtClean="0">
-                                    <a:latin typeface="Cambria Math" panose="02040503050406030204" pitchFamily="18" charset="0"/>
-                                    <a:ea typeface="Cambria Math" panose="02040503050406030204" pitchFamily="18" charset="0"/>
-                                  </a:rPr>
-                                  <m:t>𝐹</m:t>
-                                </m:r>
-                              </m:oMath>
-                            </m:oMathPara>
-                          </a14:m>
-                          <a:endParaRPr lang="es-CO" sz="2200" dirty="0">
-                            <a:latin typeface="Roboto" panose="02000000000000000000" pitchFamily="2" charset="0"/>
-                            <a:ea typeface="Roboto" panose="02000000000000000000" pitchFamily="2" charset="0"/>
-                          </a:endParaRPr>
-                        </a:p>
-                      </a:txBody>
-                      <a:tcPr/>
-                    </a:tc>
-                    <a:extLst>
-                      <a:ext uri="{0D108BD9-81ED-4DB2-BD59-A6C34878D82A}">
-                        <a16:rowId xmlns:a16="http://schemas.microsoft.com/office/drawing/2014/main" val="2353127006"/>
-                      </a:ext>
-                    </a:extLst>
-                  </a:tr>
-                </a:tbl>
-              </a:graphicData>
-            </a:graphic>
-          </p:graphicFrame>
-        </mc:Fallback>
-      </mc:AlternateContent>
-      <mc:AlternateContent xmlns:mc="http://schemas.openxmlformats.org/markup-compatibility/2006">
-        <mc:Choice xmlns:a14="http://schemas.microsoft.com/office/drawing/2010/main" Requires="a14">
-          <p:graphicFrame>
-            <p:nvGraphicFramePr>
-              <p:cNvPr id="5" name="Tabla 4">
-                <a:extLst>
-                  <a:ext uri="{FF2B5EF4-FFF2-40B4-BE49-F238E27FC236}">
-                    <a16:creationId xmlns:a16="http://schemas.microsoft.com/office/drawing/2014/main" id="{0FB34195-E2AA-4909-A49F-F91AAE1BF04D}"/>
-                  </a:ext>
-                </a:extLst>
-              </p:cNvPr>
-              <p:cNvGraphicFramePr>
-                <a:graphicFrameLocks noGrp="1"/>
-              </p:cNvGraphicFramePr>
-              <p:nvPr>
-                <p:extLst>
-                  <p:ext uri="{D42A27DB-BD31-4B8C-83A1-F6EECF244321}">
-                    <p14:modId xmlns:p14="http://schemas.microsoft.com/office/powerpoint/2010/main" val="1352911169"/>
-                  </p:ext>
-                </p:extLst>
-              </p:nvPr>
-            </p:nvGraphicFramePr>
-            <p:xfrm>
-              <a:off x="4055592" y="3510856"/>
-              <a:ext cx="6261577" cy="2133600"/>
-            </p:xfrm>
-            <a:graphic>
-              <a:graphicData uri="http://schemas.openxmlformats.org/drawingml/2006/table">
-                <a:tbl>
-                  <a:tblPr firstRow="1" bandRow="1"/>
-                  <a:tblGrid>
-                    <a:gridCol w="544786">
-                      <a:extLst>
-                        <a:ext uri="{9D8B030D-6E8A-4147-A177-3AD203B41FA5}">
-                          <a16:colId xmlns:a16="http://schemas.microsoft.com/office/drawing/2014/main" val="776375974"/>
-                        </a:ext>
-                      </a:extLst>
-                    </a:gridCol>
-                    <a:gridCol w="544786">
-                      <a:extLst>
-                        <a:ext uri="{9D8B030D-6E8A-4147-A177-3AD203B41FA5}">
-                          <a16:colId xmlns:a16="http://schemas.microsoft.com/office/drawing/2014/main" val="384604534"/>
-                        </a:ext>
-                      </a:extLst>
-                    </a:gridCol>
-                    <a:gridCol w="1034401">
-                      <a:extLst>
-                        <a:ext uri="{9D8B030D-6E8A-4147-A177-3AD203B41FA5}">
-                          <a16:colId xmlns:a16="http://schemas.microsoft.com/office/drawing/2014/main" val="79869298"/>
-                        </a:ext>
-                      </a:extLst>
-                    </a:gridCol>
-                    <a:gridCol w="1034401">
-                      <a:extLst>
-                        <a:ext uri="{9D8B030D-6E8A-4147-A177-3AD203B41FA5}">
-                          <a16:colId xmlns:a16="http://schemas.microsoft.com/office/drawing/2014/main" val="3347906918"/>
-                        </a:ext>
-                      </a:extLst>
-                    </a:gridCol>
-                    <a:gridCol w="1034401">
-                      <a:extLst>
-                        <a:ext uri="{9D8B030D-6E8A-4147-A177-3AD203B41FA5}">
-                          <a16:colId xmlns:a16="http://schemas.microsoft.com/office/drawing/2014/main" val="912474650"/>
-                        </a:ext>
-                      </a:extLst>
-                    </a:gridCol>
-                    <a:gridCol w="1034401">
-                      <a:extLst>
-                        <a:ext uri="{9D8B030D-6E8A-4147-A177-3AD203B41FA5}">
-                          <a16:colId xmlns:a16="http://schemas.microsoft.com/office/drawing/2014/main" val="4025530010"/>
-                        </a:ext>
-                      </a:extLst>
-                    </a:gridCol>
-                    <a:gridCol w="1034401">
-                      <a:extLst>
-                        <a:ext uri="{9D8B030D-6E8A-4147-A177-3AD203B41FA5}">
-                          <a16:colId xmlns:a16="http://schemas.microsoft.com/office/drawing/2014/main" val="2172254775"/>
-                        </a:ext>
-                      </a:extLst>
-                    </a:gridCol>
-                  </a:tblGrid>
-                  <a:tr h="0">
-                    <a:tc>
-                      <a:txBody>
-                        <a:bodyPr/>
-                        <a:lstStyle/>
-                        <a:p>
-                          <a:pPr marL="0" marR="0" lvl="0" indent="0" algn="l" defTabSz="914400" rtl="0" eaLnBrk="1" fontAlgn="auto" latinLnBrk="0" hangingPunct="1">
-                            <a:lnSpc>
-                              <a:spcPct val="100000"/>
-                            </a:lnSpc>
-                            <a:spcBef>
-                              <a:spcPts val="0"/>
-                            </a:spcBef>
-                            <a:spcAft>
-                              <a:spcPts val="0"/>
-                            </a:spcAft>
-                            <a:buClr>
-                              <a:srgbClr val="000000"/>
-                            </a:buClr>
-                            <a:buSzTx/>
-                            <a:buFont typeface="Arial"/>
-                            <a:buNone/>
-                            <a:tabLst/>
-                            <a:defRPr/>
-                          </a:pPr>
-                          <a14:m>
-                            <m:oMathPara xmlns:m="http://schemas.openxmlformats.org/officeDocument/2006/math">
-                              <m:oMathParaPr>
-                                <m:jc m:val="centerGroup"/>
-                              </m:oMathParaPr>
-                              <m:oMath xmlns:m="http://schemas.openxmlformats.org/officeDocument/2006/math">
-                                <m:r>
-                                  <a:rPr lang="es-MX" sz="2200" b="1" i="1" smtClean="0">
-                                    <a:latin typeface="Cambria Math" panose="02040503050406030204" pitchFamily="18" charset="0"/>
-                                    <a:ea typeface="Roboto" panose="02000000000000000000" pitchFamily="2" charset="0"/>
-                                  </a:rPr>
-                                  <m:t>𝒑</m:t>
-                                </m:r>
-                              </m:oMath>
-                            </m:oMathPara>
-                          </a14:m>
-                          <a:endParaRPr lang="es-CO" sz="2200" b="1" dirty="0">
-                            <a:latin typeface="Roboto" panose="02000000000000000000" pitchFamily="2" charset="0"/>
-                            <a:ea typeface="Roboto" panose="02000000000000000000" pitchFamily="2" charset="0"/>
-                          </a:endParaRPr>
-                        </a:p>
-                      </a:txBody>
-                      <a:tcPr/>
-                    </a:tc>
-                    <a:tc>
-                      <a:txBody>
-                        <a:bodyPr/>
-                        <a:lstStyle/>
-                        <a:p>
-                          <a:pPr/>
-                          <a14:m>
-                            <m:oMathPara xmlns:m="http://schemas.openxmlformats.org/officeDocument/2006/math">
-                              <m:oMathParaPr>
-                                <m:jc m:val="centerGroup"/>
-                              </m:oMathParaPr>
-                              <m:oMath xmlns:m="http://schemas.openxmlformats.org/officeDocument/2006/math">
-                                <m:r>
-                                  <a:rPr lang="es-MX" sz="2200" b="1" i="1" smtClean="0">
-                                    <a:latin typeface="Cambria Math" panose="02040503050406030204" pitchFamily="18" charset="0"/>
-                                    <a:ea typeface="Roboto" panose="02000000000000000000" pitchFamily="2" charset="0"/>
-                                  </a:rPr>
-                                  <m:t>𝒒</m:t>
-                                </m:r>
-                              </m:oMath>
-                            </m:oMathPara>
-                          </a14:m>
-                          <a:endParaRPr lang="es-CO" sz="2200" b="1" dirty="0">
-                            <a:latin typeface="Roboto" panose="02000000000000000000" pitchFamily="2" charset="0"/>
-                            <a:ea typeface="Roboto" panose="02000000000000000000" pitchFamily="2" charset="0"/>
-                          </a:endParaRPr>
-                        </a:p>
-                      </a:txBody>
-                      <a:tcPr/>
-                    </a:tc>
-                    <a:tc>
-                      <a:txBody>
-                        <a:bodyPr/>
-                        <a:lstStyle/>
-                        <a:p>
-                          <a:pPr/>
-                          <a14:m>
-                            <m:oMathPara xmlns:m="http://schemas.openxmlformats.org/officeDocument/2006/math">
-                              <m:oMathParaPr>
-                                <m:jc m:val="centerGroup"/>
-                              </m:oMathParaPr>
-                              <m:oMath xmlns:m="http://schemas.openxmlformats.org/officeDocument/2006/math">
-                                <m:r>
-                                  <a:rPr lang="es-MX" sz="2200" b="1" i="1" smtClean="0">
-                                    <a:latin typeface="Cambria Math" panose="02040503050406030204" pitchFamily="18" charset="0"/>
-                                    <a:ea typeface="Roboto" panose="02000000000000000000" pitchFamily="2" charset="0"/>
-                                  </a:rPr>
-                                  <m:t>𝒑</m:t>
-                                </m:r>
-                                <m:r>
-                                  <a:rPr lang="es-MX" sz="2200" b="1" i="1" smtClean="0">
-                                    <a:latin typeface="Cambria Math" panose="02040503050406030204" pitchFamily="18" charset="0"/>
-                                    <a:ea typeface="Cambria Math" panose="02040503050406030204" pitchFamily="18" charset="0"/>
-                                  </a:rPr>
-                                  <m:t>∧</m:t>
-                                </m:r>
-                                <m:r>
-                                  <a:rPr lang="es-MX" sz="2200" b="1" i="1" smtClean="0">
-                                    <a:latin typeface="Cambria Math" panose="02040503050406030204" pitchFamily="18" charset="0"/>
-                                    <a:ea typeface="Cambria Math" panose="02040503050406030204" pitchFamily="18" charset="0"/>
-                                  </a:rPr>
-                                  <m:t>𝒒</m:t>
-                                </m:r>
-                              </m:oMath>
-                            </m:oMathPara>
-                          </a14:m>
-                          <a:endParaRPr lang="es-CO" sz="2200" b="1" dirty="0">
-                            <a:latin typeface="Roboto" panose="02000000000000000000" pitchFamily="2" charset="0"/>
-                            <a:ea typeface="Roboto" panose="02000000000000000000" pitchFamily="2" charset="0"/>
-                          </a:endParaRPr>
-                        </a:p>
-                      </a:txBody>
-                      <a:tcPr/>
-                    </a:tc>
-                    <a:tc>
-                      <a:txBody>
-                        <a:bodyPr/>
-                        <a:lstStyle/>
-                        <a:p>
-                          <a:pPr/>
-                          <a14:m>
-                            <m:oMathPara xmlns:m="http://schemas.openxmlformats.org/officeDocument/2006/math">
-                              <m:oMathParaPr>
-                                <m:jc m:val="centerGroup"/>
-                              </m:oMathParaPr>
-                              <m:oMath xmlns:m="http://schemas.openxmlformats.org/officeDocument/2006/math">
-                                <m:r>
-                                  <a:rPr lang="es-MX" sz="2200" b="1" i="1" smtClean="0">
-                                    <a:latin typeface="Cambria Math" panose="02040503050406030204" pitchFamily="18" charset="0"/>
-                                    <a:ea typeface="Roboto" panose="02000000000000000000" pitchFamily="2" charset="0"/>
-                                  </a:rPr>
-                                  <m:t>𝒑</m:t>
-                                </m:r>
-                                <m:r>
-                                  <a:rPr lang="es-MX" sz="2200" b="1" i="1" smtClean="0">
-                                    <a:latin typeface="Cambria Math" panose="02040503050406030204" pitchFamily="18" charset="0"/>
-                                    <a:ea typeface="Cambria Math" panose="02040503050406030204" pitchFamily="18" charset="0"/>
-                                  </a:rPr>
-                                  <m:t>∨</m:t>
-                                </m:r>
-                                <m:r>
-                                  <a:rPr lang="es-MX" sz="2200" b="1" i="1" smtClean="0">
-                                    <a:latin typeface="Cambria Math" panose="02040503050406030204" pitchFamily="18" charset="0"/>
-                                    <a:ea typeface="Cambria Math" panose="02040503050406030204" pitchFamily="18" charset="0"/>
-                                  </a:rPr>
-                                  <m:t>𝒒</m:t>
-                                </m:r>
-                              </m:oMath>
-                            </m:oMathPara>
-                          </a14:m>
-                          <a:endParaRPr lang="es-CO" sz="2200" b="1" dirty="0">
-                            <a:latin typeface="Roboto" panose="02000000000000000000" pitchFamily="2" charset="0"/>
-                            <a:ea typeface="Roboto" panose="02000000000000000000" pitchFamily="2" charset="0"/>
-                          </a:endParaRPr>
-                        </a:p>
-                      </a:txBody>
-                      <a:tcPr/>
-                    </a:tc>
-                    <a:tc>
-                      <a:txBody>
-                        <a:bodyPr/>
-                        <a:lstStyle/>
-                        <a:p>
-                          <a:pPr/>
-                          <a14:m>
-                            <m:oMathPara xmlns:m="http://schemas.openxmlformats.org/officeDocument/2006/math">
-                              <m:oMathParaPr>
-                                <m:jc m:val="centerGroup"/>
-                              </m:oMathParaPr>
-                              <m:oMath xmlns:m="http://schemas.openxmlformats.org/officeDocument/2006/math">
-                                <m:r>
-                                  <a:rPr lang="es-MX" sz="2200" b="1" i="1" smtClean="0">
-                                    <a:latin typeface="Cambria Math" panose="02040503050406030204" pitchFamily="18" charset="0"/>
-                                    <a:ea typeface="Roboto" panose="02000000000000000000" pitchFamily="2" charset="0"/>
-                                  </a:rPr>
-                                  <m:t>𝒑</m:t>
-                                </m:r>
-                                <m:r>
-                                  <a:rPr lang="es-MX" sz="2200" b="1" i="1" smtClean="0">
-                                    <a:latin typeface="Cambria Math" panose="02040503050406030204" pitchFamily="18" charset="0"/>
-                                    <a:ea typeface="Cambria Math" panose="02040503050406030204" pitchFamily="18" charset="0"/>
-                                  </a:rPr>
-                                  <m:t>⊕</m:t>
-                                </m:r>
-                                <m:r>
-                                  <a:rPr lang="es-MX" sz="2200" b="1" i="1" smtClean="0">
-                                    <a:latin typeface="Cambria Math" panose="02040503050406030204" pitchFamily="18" charset="0"/>
-                                    <a:ea typeface="Cambria Math" panose="02040503050406030204" pitchFamily="18" charset="0"/>
-                                  </a:rPr>
-                                  <m:t>𝒒</m:t>
-                                </m:r>
-                              </m:oMath>
-                            </m:oMathPara>
-                          </a14:m>
-                          <a:endParaRPr lang="es-CO" sz="2200" b="1" dirty="0">
-                            <a:latin typeface="Roboto" panose="02000000000000000000" pitchFamily="2" charset="0"/>
-                            <a:ea typeface="Roboto" panose="02000000000000000000" pitchFamily="2" charset="0"/>
-                          </a:endParaRPr>
-                        </a:p>
-                      </a:txBody>
-                      <a:tcPr/>
-                    </a:tc>
-                    <a:tc>
-                      <a:txBody>
-                        <a:bodyPr/>
-                        <a:lstStyle/>
-                        <a:p>
-                          <a:pPr/>
-                          <a14:m>
-                            <m:oMathPara xmlns:m="http://schemas.openxmlformats.org/officeDocument/2006/math">
-                              <m:oMathParaPr>
-                                <m:jc m:val="centerGroup"/>
-                              </m:oMathParaPr>
-                              <m:oMath xmlns:m="http://schemas.openxmlformats.org/officeDocument/2006/math">
-                                <m:r>
-                                  <a:rPr lang="es-MX" sz="2200" b="1" i="1" smtClean="0">
-                                    <a:latin typeface="Cambria Math" panose="02040503050406030204" pitchFamily="18" charset="0"/>
-                                    <a:ea typeface="Roboto" panose="02000000000000000000" pitchFamily="2" charset="0"/>
-                                  </a:rPr>
-                                  <m:t>𝒑</m:t>
-                                </m:r>
-                                <m:r>
-                                  <a:rPr lang="es-MX" sz="2200" b="1" i="1" smtClean="0">
-                                    <a:latin typeface="Cambria Math" panose="02040503050406030204" pitchFamily="18" charset="0"/>
-                                    <a:ea typeface="Cambria Math" panose="02040503050406030204" pitchFamily="18" charset="0"/>
-                                  </a:rPr>
-                                  <m:t>→</m:t>
-                                </m:r>
-                                <m:r>
-                                  <a:rPr lang="es-MX" sz="2200" b="1" i="1" smtClean="0">
-                                    <a:latin typeface="Cambria Math" panose="02040503050406030204" pitchFamily="18" charset="0"/>
-                                    <a:ea typeface="Cambria Math" panose="02040503050406030204" pitchFamily="18" charset="0"/>
-                                  </a:rPr>
-                                  <m:t>𝒒</m:t>
-                                </m:r>
-                              </m:oMath>
-                            </m:oMathPara>
-                          </a14:m>
-                          <a:endParaRPr lang="es-CO" sz="2200" b="1" dirty="0">
-                            <a:latin typeface="Roboto" panose="02000000000000000000" pitchFamily="2" charset="0"/>
-                            <a:ea typeface="Roboto" panose="02000000000000000000" pitchFamily="2" charset="0"/>
-                          </a:endParaRPr>
-                        </a:p>
-                      </a:txBody>
-                      <a:tcPr/>
-                    </a:tc>
-                    <a:tc>
-                      <a:txBody>
-                        <a:bodyPr/>
-                        <a:lstStyle/>
-                        <a:p>
-                          <a:pPr/>
-                          <a14:m>
-                            <m:oMathPara xmlns:m="http://schemas.openxmlformats.org/officeDocument/2006/math">
-                              <m:oMathParaPr>
-                                <m:jc m:val="centerGroup"/>
-                              </m:oMathParaPr>
-                              <m:oMath xmlns:m="http://schemas.openxmlformats.org/officeDocument/2006/math">
-                                <m:r>
-                                  <a:rPr lang="es-MX" sz="2200" b="1" i="1" smtClean="0">
-                                    <a:latin typeface="Cambria Math" panose="02040503050406030204" pitchFamily="18" charset="0"/>
-                                    <a:ea typeface="Roboto" panose="02000000000000000000" pitchFamily="2" charset="0"/>
-                                  </a:rPr>
-                                  <m:t>𝒑</m:t>
-                                </m:r>
-                                <m:r>
-                                  <a:rPr lang="es-MX" sz="2200" b="1" i="1" smtClean="0">
-                                    <a:latin typeface="Cambria Math" panose="02040503050406030204" pitchFamily="18" charset="0"/>
-                                    <a:ea typeface="Cambria Math" panose="02040503050406030204" pitchFamily="18" charset="0"/>
-                                  </a:rPr>
-                                  <m:t>↔</m:t>
-                                </m:r>
-                                <m:r>
-                                  <a:rPr lang="es-MX" sz="2200" b="1" i="1" smtClean="0">
-                                    <a:latin typeface="Cambria Math" panose="02040503050406030204" pitchFamily="18" charset="0"/>
-                                    <a:ea typeface="Cambria Math" panose="02040503050406030204" pitchFamily="18" charset="0"/>
-                                  </a:rPr>
-                                  <m:t>𝒒</m:t>
-                                </m:r>
-                              </m:oMath>
-                            </m:oMathPara>
-                          </a14:m>
-                          <a:endParaRPr lang="es-CO" sz="2200" b="1" dirty="0">
-                            <a:latin typeface="Roboto" panose="02000000000000000000" pitchFamily="2" charset="0"/>
-                            <a:ea typeface="Roboto" panose="02000000000000000000" pitchFamily="2" charset="0"/>
-                          </a:endParaRPr>
-                        </a:p>
-                      </a:txBody>
-                      <a:tcPr/>
-                    </a:tc>
-                    <a:extLst>
-                      <a:ext uri="{0D108BD9-81ED-4DB2-BD59-A6C34878D82A}">
-                        <a16:rowId xmlns:a16="http://schemas.microsoft.com/office/drawing/2014/main" val="113670299"/>
-                      </a:ext>
-                    </a:extLst>
-                  </a:tr>
-                  <a:tr h="334807">
-                    <a:tc>
-                      <a:txBody>
-                        <a:bodyPr/>
-                        <a:lstStyle/>
-                        <a:p>
-                          <a:pPr marL="0" marR="0" lvl="0" indent="0" algn="l" defTabSz="914400" rtl="0" eaLnBrk="1" fontAlgn="auto" latinLnBrk="0" hangingPunct="1">
-                            <a:lnSpc>
-                              <a:spcPct val="100000"/>
-                            </a:lnSpc>
-                            <a:spcBef>
-                              <a:spcPts val="0"/>
-                            </a:spcBef>
-                            <a:spcAft>
-                              <a:spcPts val="0"/>
-                            </a:spcAft>
-                            <a:buClr>
-                              <a:srgbClr val="000000"/>
-                            </a:buClr>
-                            <a:buSzTx/>
-                            <a:buFont typeface="Arial"/>
-                            <a:buNone/>
-                            <a:tabLst/>
-                            <a:defRPr/>
-                          </a:pPr>
-                          <a14:m>
-                            <m:oMathPara xmlns:m="http://schemas.openxmlformats.org/officeDocument/2006/math">
-                              <m:oMathParaPr>
-                                <m:jc m:val="centerGroup"/>
-                              </m:oMathParaPr>
-                              <m:oMath xmlns:m="http://schemas.openxmlformats.org/officeDocument/2006/math">
-                                <m:r>
-                                  <a:rPr lang="es-MX" sz="2200" b="0" i="1" smtClean="0">
-                                    <a:latin typeface="Cambria Math" panose="02040503050406030204" pitchFamily="18" charset="0"/>
-                                    <a:ea typeface="Roboto" panose="02000000000000000000" pitchFamily="2" charset="0"/>
-                                  </a:rPr>
-                                  <m:t>𝐹</m:t>
-                                </m:r>
-                              </m:oMath>
-                            </m:oMathPara>
-                          </a14:m>
-                          <a:endParaRPr lang="es-CO" sz="2200" dirty="0">
-                            <a:latin typeface="Roboto" panose="02000000000000000000" pitchFamily="2" charset="0"/>
-                            <a:ea typeface="Roboto" panose="02000000000000000000" pitchFamily="2" charset="0"/>
-                          </a:endParaRPr>
-                        </a:p>
-                      </a:txBody>
-                      <a:tcPr/>
-                    </a:tc>
-                    <a:tc>
-                      <a:txBody>
-                        <a:bodyPr/>
-                        <a:lstStyle/>
-                        <a:p>
-                          <a:pPr marL="0" marR="0" lvl="0" indent="0" algn="l" defTabSz="914400" rtl="0" eaLnBrk="1" fontAlgn="auto" latinLnBrk="0" hangingPunct="1">
-                            <a:lnSpc>
-                              <a:spcPct val="100000"/>
-                            </a:lnSpc>
-                            <a:spcBef>
-                              <a:spcPts val="0"/>
-                            </a:spcBef>
-                            <a:spcAft>
-                              <a:spcPts val="0"/>
-                            </a:spcAft>
-                            <a:buClr>
-                              <a:srgbClr val="000000"/>
-                            </a:buClr>
-                            <a:buSzTx/>
-                            <a:buFont typeface="Arial"/>
-                            <a:buNone/>
-                            <a:tabLst/>
-                            <a:defRPr/>
-                          </a:pPr>
-                          <a14:m>
-                            <m:oMathPara xmlns:m="http://schemas.openxmlformats.org/officeDocument/2006/math">
-                              <m:oMathParaPr>
-                                <m:jc m:val="centerGroup"/>
-                              </m:oMathParaPr>
-                              <m:oMath xmlns:m="http://schemas.openxmlformats.org/officeDocument/2006/math">
-                                <m:r>
-                                  <a:rPr lang="es-MX" sz="2200" b="0" i="1" smtClean="0">
-                                    <a:latin typeface="Cambria Math" panose="02040503050406030204" pitchFamily="18" charset="0"/>
-                                    <a:ea typeface="Roboto" panose="02000000000000000000" pitchFamily="2" charset="0"/>
-                                  </a:rPr>
-                                  <m:t>𝐹</m:t>
-                                </m:r>
-                              </m:oMath>
-                            </m:oMathPara>
-                          </a14:m>
-                          <a:endParaRPr lang="es-CO" sz="2200" dirty="0">
-                            <a:latin typeface="Roboto" panose="02000000000000000000" pitchFamily="2" charset="0"/>
-                            <a:ea typeface="Roboto" panose="02000000000000000000" pitchFamily="2" charset="0"/>
-                          </a:endParaRPr>
-                        </a:p>
-                      </a:txBody>
-                      <a:tcPr/>
-                    </a:tc>
-                    <a:tc>
-                      <a:txBody>
-                        <a:bodyPr/>
-                        <a:lstStyle/>
-                        <a:p>
-                          <a:pPr marL="0" marR="0" lvl="0" indent="0" algn="l" defTabSz="914400" rtl="0" eaLnBrk="1" fontAlgn="auto" latinLnBrk="0" hangingPunct="1">
-                            <a:lnSpc>
-                              <a:spcPct val="100000"/>
-                            </a:lnSpc>
-                            <a:spcBef>
-                              <a:spcPts val="0"/>
-                            </a:spcBef>
-                            <a:spcAft>
-                              <a:spcPts val="0"/>
-                            </a:spcAft>
-                            <a:buClr>
-                              <a:srgbClr val="000000"/>
-                            </a:buClr>
-                            <a:buSzTx/>
-                            <a:buFont typeface="Arial"/>
-                            <a:buNone/>
-                            <a:tabLst/>
-                            <a:defRPr/>
-                          </a:pPr>
-                          <a14:m>
-                            <m:oMathPara xmlns:m="http://schemas.openxmlformats.org/officeDocument/2006/math">
-                              <m:oMathParaPr>
-                                <m:jc m:val="centerGroup"/>
-                              </m:oMathParaPr>
-                              <m:oMath xmlns:m="http://schemas.openxmlformats.org/officeDocument/2006/math">
-                                <m:r>
-                                  <a:rPr lang="es-MX" sz="2200" b="0" i="1" smtClean="0">
-                                    <a:latin typeface="Cambria Math" panose="02040503050406030204" pitchFamily="18" charset="0"/>
-                                    <a:ea typeface="Cambria Math" panose="02040503050406030204" pitchFamily="18" charset="0"/>
-                                  </a:rPr>
-                                  <m:t>𝐹</m:t>
-                                </m:r>
-                              </m:oMath>
-                            </m:oMathPara>
-                          </a14:m>
-                          <a:endParaRPr lang="es-CO" sz="2200" dirty="0">
-                            <a:latin typeface="Roboto" panose="02000000000000000000" pitchFamily="2" charset="0"/>
-                            <a:ea typeface="Roboto" panose="02000000000000000000" pitchFamily="2" charset="0"/>
-                          </a:endParaRPr>
-                        </a:p>
-                      </a:txBody>
-                      <a:tcPr/>
-                    </a:tc>
-                    <a:tc>
-                      <a:txBody>
-                        <a:bodyPr/>
-                        <a:lstStyle/>
-                        <a:p>
-                          <a:pPr marL="0" marR="0" lvl="0" indent="0" algn="l" defTabSz="914400" rtl="0" eaLnBrk="1" fontAlgn="auto" latinLnBrk="0" hangingPunct="1">
-                            <a:lnSpc>
-                              <a:spcPct val="100000"/>
-                            </a:lnSpc>
-                            <a:spcBef>
-                              <a:spcPts val="0"/>
-                            </a:spcBef>
-                            <a:spcAft>
-                              <a:spcPts val="0"/>
-                            </a:spcAft>
-                            <a:buClr>
-                              <a:srgbClr val="000000"/>
-                            </a:buClr>
-                            <a:buSzTx/>
-                            <a:buFont typeface="Arial"/>
-                            <a:buNone/>
-                            <a:tabLst/>
-                            <a:defRPr/>
-                          </a:pPr>
-                          <a14:m>
-                            <m:oMathPara xmlns:m="http://schemas.openxmlformats.org/officeDocument/2006/math">
-                              <m:oMathParaPr>
-                                <m:jc m:val="centerGroup"/>
-                              </m:oMathParaPr>
-                              <m:oMath xmlns:m="http://schemas.openxmlformats.org/officeDocument/2006/math">
-                                <m:r>
-                                  <a:rPr lang="es-MX" sz="2200" b="0" i="1" smtClean="0">
-                                    <a:latin typeface="Cambria Math" panose="02040503050406030204" pitchFamily="18" charset="0"/>
-                                    <a:ea typeface="Cambria Math" panose="02040503050406030204" pitchFamily="18" charset="0"/>
-                                  </a:rPr>
-                                  <m:t>𝐹</m:t>
-                                </m:r>
-                              </m:oMath>
-                            </m:oMathPara>
-                          </a14:m>
-                          <a:endParaRPr lang="es-CO" sz="2200" dirty="0">
-                            <a:latin typeface="Roboto" panose="02000000000000000000" pitchFamily="2" charset="0"/>
-                            <a:ea typeface="Roboto" panose="02000000000000000000" pitchFamily="2" charset="0"/>
-                          </a:endParaRPr>
-                        </a:p>
-                      </a:txBody>
-                      <a:tcPr/>
-                    </a:tc>
-                    <a:tc>
-                      <a:txBody>
-                        <a:bodyPr/>
-                        <a:lstStyle/>
-                        <a:p>
-                          <a:pPr marL="0" marR="0" lvl="0" indent="0" algn="l" defTabSz="914400" rtl="0" eaLnBrk="1" fontAlgn="auto" latinLnBrk="0" hangingPunct="1">
-                            <a:lnSpc>
-                              <a:spcPct val="100000"/>
-                            </a:lnSpc>
-                            <a:spcBef>
-                              <a:spcPts val="0"/>
-                            </a:spcBef>
-                            <a:spcAft>
-                              <a:spcPts val="0"/>
-                            </a:spcAft>
-                            <a:buClr>
-                              <a:srgbClr val="000000"/>
-                            </a:buClr>
-                            <a:buSzTx/>
-                            <a:buFont typeface="Arial"/>
-                            <a:buNone/>
-                            <a:tabLst/>
-                            <a:defRPr/>
-                          </a:pPr>
-                          <a14:m>
-                            <m:oMathPara xmlns:m="http://schemas.openxmlformats.org/officeDocument/2006/math">
-                              <m:oMathParaPr>
-                                <m:jc m:val="centerGroup"/>
-                              </m:oMathParaPr>
-                              <m:oMath xmlns:m="http://schemas.openxmlformats.org/officeDocument/2006/math">
-                                <m:r>
-                                  <a:rPr lang="es-MX" sz="2200" b="0" i="1" smtClean="0">
-                                    <a:latin typeface="Cambria Math" panose="02040503050406030204" pitchFamily="18" charset="0"/>
-                                    <a:ea typeface="Cambria Math" panose="02040503050406030204" pitchFamily="18" charset="0"/>
-                                  </a:rPr>
-                                  <m:t>𝐹</m:t>
-                                </m:r>
-                              </m:oMath>
-                            </m:oMathPara>
-                          </a14:m>
-                          <a:endParaRPr lang="es-CO" sz="2200" dirty="0">
-                            <a:latin typeface="Roboto" panose="02000000000000000000" pitchFamily="2" charset="0"/>
-                            <a:ea typeface="Roboto" panose="02000000000000000000" pitchFamily="2" charset="0"/>
-                          </a:endParaRPr>
-                        </a:p>
-                      </a:txBody>
-                      <a:tcPr/>
-                    </a:tc>
-                    <a:tc>
-                      <a:txBody>
-                        <a:bodyPr/>
-                        <a:lstStyle/>
-                        <a:p>
-                          <a:pPr marL="0" marR="0" lvl="0" indent="0" algn="l" defTabSz="914400" rtl="0" eaLnBrk="1" fontAlgn="auto" latinLnBrk="0" hangingPunct="1">
-                            <a:lnSpc>
-                              <a:spcPct val="100000"/>
-                            </a:lnSpc>
-                            <a:spcBef>
-                              <a:spcPts val="0"/>
-                            </a:spcBef>
-                            <a:spcAft>
-                              <a:spcPts val="0"/>
-                            </a:spcAft>
-                            <a:buClr>
-                              <a:srgbClr val="000000"/>
-                            </a:buClr>
-                            <a:buSzTx/>
-                            <a:buFont typeface="Arial"/>
-                            <a:buNone/>
-                            <a:tabLst/>
-                            <a:defRPr/>
-                          </a:pPr>
-                          <a14:m>
-                            <m:oMathPara xmlns:m="http://schemas.openxmlformats.org/officeDocument/2006/math">
-                              <m:oMathParaPr>
-                                <m:jc m:val="centerGroup"/>
-                              </m:oMathParaPr>
-                              <m:oMath xmlns:m="http://schemas.openxmlformats.org/officeDocument/2006/math">
-                                <m:r>
-                                  <a:rPr lang="es-MX" sz="2200" b="0" i="1" smtClean="0">
-                                    <a:latin typeface="Cambria Math" panose="02040503050406030204" pitchFamily="18" charset="0"/>
-                                    <a:ea typeface="Roboto" panose="02000000000000000000" pitchFamily="2" charset="0"/>
-                                  </a:rPr>
-                                  <m:t>𝑉</m:t>
-                                </m:r>
-                              </m:oMath>
-                            </m:oMathPara>
-                          </a14:m>
-                          <a:endParaRPr lang="es-CO" sz="2200" dirty="0">
-                            <a:latin typeface="Roboto" panose="02000000000000000000" pitchFamily="2" charset="0"/>
-                            <a:ea typeface="Roboto" panose="02000000000000000000" pitchFamily="2" charset="0"/>
-                          </a:endParaRPr>
-                        </a:p>
-                      </a:txBody>
-                      <a:tcPr/>
-                    </a:tc>
-                    <a:tc>
-                      <a:txBody>
-                        <a:bodyPr/>
-                        <a:lstStyle/>
-                        <a:p>
-                          <a:pPr marL="0" marR="0" lvl="0" indent="0" algn="l" defTabSz="914400" rtl="0" eaLnBrk="1" fontAlgn="auto" latinLnBrk="0" hangingPunct="1">
-                            <a:lnSpc>
-                              <a:spcPct val="100000"/>
-                            </a:lnSpc>
-                            <a:spcBef>
-                              <a:spcPts val="0"/>
-                            </a:spcBef>
-                            <a:spcAft>
-                              <a:spcPts val="0"/>
-                            </a:spcAft>
-                            <a:buClr>
-                              <a:srgbClr val="000000"/>
-                            </a:buClr>
-                            <a:buSzTx/>
-                            <a:buFont typeface="Arial"/>
-                            <a:buNone/>
-                            <a:tabLst/>
-                            <a:defRPr/>
-                          </a:pPr>
-                          <a14:m>
-                            <m:oMathPara xmlns:m="http://schemas.openxmlformats.org/officeDocument/2006/math">
-                              <m:oMathParaPr>
-                                <m:jc m:val="centerGroup"/>
-                              </m:oMathParaPr>
-                              <m:oMath xmlns:m="http://schemas.openxmlformats.org/officeDocument/2006/math">
-                                <m:r>
-                                  <a:rPr lang="es-MX" sz="2200" b="0" i="1" smtClean="0">
-                                    <a:latin typeface="Cambria Math" panose="02040503050406030204" pitchFamily="18" charset="0"/>
-                                    <a:ea typeface="Roboto" panose="02000000000000000000" pitchFamily="2" charset="0"/>
-                                  </a:rPr>
-                                  <m:t>𝑉</m:t>
-                                </m:r>
-                              </m:oMath>
-                            </m:oMathPara>
-                          </a14:m>
-                          <a:endParaRPr lang="es-CO" sz="2200" dirty="0">
-                            <a:latin typeface="Roboto" panose="02000000000000000000" pitchFamily="2" charset="0"/>
-                            <a:ea typeface="Roboto" panose="02000000000000000000" pitchFamily="2" charset="0"/>
-                          </a:endParaRPr>
-                        </a:p>
-                      </a:txBody>
-                      <a:tcPr/>
-                    </a:tc>
-                    <a:extLst>
-                      <a:ext uri="{0D108BD9-81ED-4DB2-BD59-A6C34878D82A}">
-                        <a16:rowId xmlns:a16="http://schemas.microsoft.com/office/drawing/2014/main" val="1805549228"/>
-                      </a:ext>
-                    </a:extLst>
-                  </a:tr>
-                  <a:tr h="334807">
-                    <a:tc>
-                      <a:txBody>
-                        <a:bodyPr/>
-                        <a:lstStyle/>
-                        <a:p>
-                          <a:pPr/>
-                          <a14:m>
-                            <m:oMathPara xmlns:m="http://schemas.openxmlformats.org/officeDocument/2006/math">
-                              <m:oMathParaPr>
-                                <m:jc m:val="centerGroup"/>
-                              </m:oMathParaPr>
-                              <m:oMath xmlns:m="http://schemas.openxmlformats.org/officeDocument/2006/math">
-                                <m:r>
-                                  <a:rPr lang="es-MX" sz="2200" b="0" i="1" smtClean="0">
-                                    <a:latin typeface="Cambria Math" panose="02040503050406030204" pitchFamily="18" charset="0"/>
-                                    <a:ea typeface="Roboto" panose="02000000000000000000" pitchFamily="2" charset="0"/>
-                                  </a:rPr>
-                                  <m:t>𝐹</m:t>
-                                </m:r>
-                              </m:oMath>
-                            </m:oMathPara>
-                          </a14:m>
-                          <a:endParaRPr lang="es-CO" sz="2200" dirty="0">
-                            <a:latin typeface="Roboto" panose="02000000000000000000" pitchFamily="2" charset="0"/>
-                            <a:ea typeface="Roboto" panose="02000000000000000000" pitchFamily="2" charset="0"/>
-                          </a:endParaRPr>
-                        </a:p>
-                      </a:txBody>
-                      <a:tcPr/>
-                    </a:tc>
-                    <a:tc>
-                      <a:txBody>
-                        <a:bodyPr/>
-                        <a:lstStyle/>
-                        <a:p>
-                          <a:pPr/>
-                          <a14:m>
-                            <m:oMathPara xmlns:m="http://schemas.openxmlformats.org/officeDocument/2006/math">
-                              <m:oMathParaPr>
-                                <m:jc m:val="centerGroup"/>
-                              </m:oMathParaPr>
-                              <m:oMath xmlns:m="http://schemas.openxmlformats.org/officeDocument/2006/math">
-                                <m:r>
-                                  <a:rPr lang="es-MX" sz="2200" b="0" i="1" smtClean="0">
-                                    <a:latin typeface="Cambria Math" panose="02040503050406030204" pitchFamily="18" charset="0"/>
-                                    <a:ea typeface="Roboto" panose="02000000000000000000" pitchFamily="2" charset="0"/>
-                                  </a:rPr>
-                                  <m:t>𝑉</m:t>
-                                </m:r>
-                              </m:oMath>
-                            </m:oMathPara>
-                          </a14:m>
-                          <a:endParaRPr lang="es-CO" sz="2200" dirty="0">
-                            <a:latin typeface="Roboto" panose="02000000000000000000" pitchFamily="2" charset="0"/>
-                            <a:ea typeface="Roboto" panose="02000000000000000000" pitchFamily="2" charset="0"/>
-                          </a:endParaRPr>
-                        </a:p>
-                      </a:txBody>
-                      <a:tcPr/>
-                    </a:tc>
-                    <a:tc>
-                      <a:txBody>
-                        <a:bodyPr/>
-                        <a:lstStyle/>
-                        <a:p>
-                          <a:pPr marL="0" marR="0" lvl="0" indent="0" algn="l" defTabSz="914400" rtl="0" eaLnBrk="1" fontAlgn="auto" latinLnBrk="0" hangingPunct="1">
-                            <a:lnSpc>
-                              <a:spcPct val="100000"/>
-                            </a:lnSpc>
-                            <a:spcBef>
-                              <a:spcPts val="0"/>
-                            </a:spcBef>
-                            <a:spcAft>
-                              <a:spcPts val="0"/>
-                            </a:spcAft>
-                            <a:buClr>
-                              <a:srgbClr val="000000"/>
-                            </a:buClr>
-                            <a:buSzTx/>
-                            <a:buFont typeface="Arial"/>
-                            <a:buNone/>
-                            <a:tabLst/>
-                            <a:defRPr/>
-                          </a:pPr>
-                          <a14:m>
-                            <m:oMathPara xmlns:m="http://schemas.openxmlformats.org/officeDocument/2006/math">
-                              <m:oMathParaPr>
-                                <m:jc m:val="centerGroup"/>
-                              </m:oMathParaPr>
-                              <m:oMath xmlns:m="http://schemas.openxmlformats.org/officeDocument/2006/math">
-                                <m:r>
-                                  <a:rPr lang="es-MX" sz="2200" b="0" i="1" smtClean="0">
-                                    <a:latin typeface="Cambria Math" panose="02040503050406030204" pitchFamily="18" charset="0"/>
-                                    <a:ea typeface="Cambria Math" panose="02040503050406030204" pitchFamily="18" charset="0"/>
-                                  </a:rPr>
-                                  <m:t>𝐹</m:t>
-                                </m:r>
-                              </m:oMath>
-                            </m:oMathPara>
-                          </a14:m>
-                          <a:endParaRPr lang="es-CO" sz="2200" dirty="0">
-                            <a:latin typeface="Roboto" panose="02000000000000000000" pitchFamily="2" charset="0"/>
-                            <a:ea typeface="Roboto" panose="02000000000000000000" pitchFamily="2" charset="0"/>
-                          </a:endParaRPr>
-                        </a:p>
-                      </a:txBody>
-                      <a:tcPr/>
-                    </a:tc>
-                    <a:tc>
-                      <a:txBody>
-                        <a:bodyPr/>
-                        <a:lstStyle/>
-                        <a:p>
-                          <a:pPr marL="0" marR="0" lvl="0" indent="0" algn="l" defTabSz="914400" rtl="0" eaLnBrk="1" fontAlgn="auto" latinLnBrk="0" hangingPunct="1">
-                            <a:lnSpc>
-                              <a:spcPct val="100000"/>
-                            </a:lnSpc>
-                            <a:spcBef>
-                              <a:spcPts val="0"/>
-                            </a:spcBef>
-                            <a:spcAft>
-                              <a:spcPts val="0"/>
-                            </a:spcAft>
-                            <a:buClr>
-                              <a:srgbClr val="000000"/>
-                            </a:buClr>
-                            <a:buSzTx/>
-                            <a:buFont typeface="Arial"/>
-                            <a:buNone/>
-                            <a:tabLst/>
-                            <a:defRPr/>
-                          </a:pPr>
-                          <a14:m>
-                            <m:oMathPara xmlns:m="http://schemas.openxmlformats.org/officeDocument/2006/math">
-                              <m:oMathParaPr>
-                                <m:jc m:val="centerGroup"/>
-                              </m:oMathParaPr>
-                              <m:oMath xmlns:m="http://schemas.openxmlformats.org/officeDocument/2006/math">
-                                <m:r>
-                                  <a:rPr lang="es-MX" sz="2200" b="0" i="1" smtClean="0">
-                                    <a:latin typeface="Cambria Math" panose="02040503050406030204" pitchFamily="18" charset="0"/>
-                                    <a:ea typeface="Cambria Math" panose="02040503050406030204" pitchFamily="18" charset="0"/>
-                                  </a:rPr>
-                                  <m:t>𝑉</m:t>
-                                </m:r>
-                              </m:oMath>
-                            </m:oMathPara>
-                          </a14:m>
-                          <a:endParaRPr lang="es-CO" sz="2200" dirty="0">
-                            <a:latin typeface="Roboto" panose="02000000000000000000" pitchFamily="2" charset="0"/>
-                            <a:ea typeface="Roboto" panose="02000000000000000000" pitchFamily="2" charset="0"/>
-                          </a:endParaRPr>
-                        </a:p>
-                      </a:txBody>
-                      <a:tcPr/>
-                    </a:tc>
-                    <a:tc>
-                      <a:txBody>
-                        <a:bodyPr/>
-                        <a:lstStyle/>
-                        <a:p>
-                          <a:pPr marL="0" marR="0" lvl="0" indent="0" algn="l" defTabSz="914400" rtl="0" eaLnBrk="1" fontAlgn="auto" latinLnBrk="0" hangingPunct="1">
-                            <a:lnSpc>
-                              <a:spcPct val="100000"/>
-                            </a:lnSpc>
-                            <a:spcBef>
-                              <a:spcPts val="0"/>
-                            </a:spcBef>
-                            <a:spcAft>
-                              <a:spcPts val="0"/>
-                            </a:spcAft>
-                            <a:buClr>
-                              <a:srgbClr val="000000"/>
-                            </a:buClr>
-                            <a:buSzTx/>
-                            <a:buFont typeface="Arial"/>
-                            <a:buNone/>
-                            <a:tabLst/>
-                            <a:defRPr/>
-                          </a:pPr>
-                          <a14:m>
-                            <m:oMathPara xmlns:m="http://schemas.openxmlformats.org/officeDocument/2006/math">
-                              <m:oMathParaPr>
-                                <m:jc m:val="centerGroup"/>
-                              </m:oMathParaPr>
-                              <m:oMath xmlns:m="http://schemas.openxmlformats.org/officeDocument/2006/math">
-                                <m:r>
-                                  <a:rPr lang="es-MX" sz="2200" b="0" i="1" smtClean="0">
-                                    <a:latin typeface="Cambria Math" panose="02040503050406030204" pitchFamily="18" charset="0"/>
-                                    <a:ea typeface="Cambria Math" panose="02040503050406030204" pitchFamily="18" charset="0"/>
-                                  </a:rPr>
-                                  <m:t>𝑉</m:t>
-                                </m:r>
-                              </m:oMath>
-                            </m:oMathPara>
-                          </a14:m>
-                          <a:endParaRPr lang="es-CO" sz="2200" dirty="0">
-                            <a:latin typeface="Roboto" panose="02000000000000000000" pitchFamily="2" charset="0"/>
-                            <a:ea typeface="Roboto" panose="02000000000000000000" pitchFamily="2" charset="0"/>
-                          </a:endParaRPr>
-                        </a:p>
-                      </a:txBody>
-                      <a:tcPr/>
-                    </a:tc>
-                    <a:tc>
-                      <a:txBody>
-                        <a:bodyPr/>
-                        <a:lstStyle/>
-                        <a:p>
-                          <a:pPr marL="0" marR="0" lvl="0" indent="0" algn="l" defTabSz="914400" rtl="0" eaLnBrk="1" fontAlgn="auto" latinLnBrk="0" hangingPunct="1">
-                            <a:lnSpc>
-                              <a:spcPct val="100000"/>
-                            </a:lnSpc>
-                            <a:spcBef>
-                              <a:spcPts val="0"/>
-                            </a:spcBef>
-                            <a:spcAft>
-                              <a:spcPts val="0"/>
-                            </a:spcAft>
-                            <a:buClr>
-                              <a:srgbClr val="000000"/>
-                            </a:buClr>
-                            <a:buSzTx/>
-                            <a:buFont typeface="Arial"/>
-                            <a:buNone/>
-                            <a:tabLst/>
-                            <a:defRPr/>
-                          </a:pPr>
-                          <a14:m>
-                            <m:oMathPara xmlns:m="http://schemas.openxmlformats.org/officeDocument/2006/math">
-                              <m:oMathParaPr>
-                                <m:jc m:val="centerGroup"/>
-                              </m:oMathParaPr>
-                              <m:oMath xmlns:m="http://schemas.openxmlformats.org/officeDocument/2006/math">
-                                <m:r>
-                                  <a:rPr lang="es-MX" sz="2200" b="0" i="1" smtClean="0">
-                                    <a:latin typeface="Cambria Math" panose="02040503050406030204" pitchFamily="18" charset="0"/>
-                                    <a:ea typeface="Cambria Math" panose="02040503050406030204" pitchFamily="18" charset="0"/>
-                                  </a:rPr>
-                                  <m:t>𝑉</m:t>
-                                </m:r>
-                              </m:oMath>
-                            </m:oMathPara>
-                          </a14:m>
-                          <a:endParaRPr lang="es-CO" sz="2200" dirty="0">
-                            <a:latin typeface="Roboto" panose="02000000000000000000" pitchFamily="2" charset="0"/>
-                            <a:ea typeface="Roboto" panose="02000000000000000000" pitchFamily="2" charset="0"/>
-                          </a:endParaRPr>
-                        </a:p>
-                      </a:txBody>
-                      <a:tcPr/>
-                    </a:tc>
-                    <a:tc>
-                      <a:txBody>
-                        <a:bodyPr/>
-                        <a:lstStyle/>
-                        <a:p>
-                          <a:pPr marL="0" marR="0" lvl="0" indent="0" algn="l" defTabSz="914400" rtl="0" eaLnBrk="1" fontAlgn="auto" latinLnBrk="0" hangingPunct="1">
-                            <a:lnSpc>
-                              <a:spcPct val="100000"/>
-                            </a:lnSpc>
-                            <a:spcBef>
-                              <a:spcPts val="0"/>
-                            </a:spcBef>
-                            <a:spcAft>
-                              <a:spcPts val="0"/>
-                            </a:spcAft>
-                            <a:buClr>
-                              <a:srgbClr val="000000"/>
-                            </a:buClr>
-                            <a:buSzTx/>
-                            <a:buFont typeface="Arial"/>
-                            <a:buNone/>
-                            <a:tabLst/>
-                            <a:defRPr/>
-                          </a:pPr>
-                          <a14:m>
-                            <m:oMathPara xmlns:m="http://schemas.openxmlformats.org/officeDocument/2006/math">
-                              <m:oMathParaPr>
-                                <m:jc m:val="centerGroup"/>
-                              </m:oMathParaPr>
-                              <m:oMath xmlns:m="http://schemas.openxmlformats.org/officeDocument/2006/math">
-                                <m:r>
-                                  <a:rPr lang="es-MX" sz="2200" b="0" i="1" smtClean="0">
-                                    <a:latin typeface="Cambria Math" panose="02040503050406030204" pitchFamily="18" charset="0"/>
-                                    <a:ea typeface="Cambria Math" panose="02040503050406030204" pitchFamily="18" charset="0"/>
-                                  </a:rPr>
-                                  <m:t>𝐹</m:t>
-                                </m:r>
-                              </m:oMath>
-                            </m:oMathPara>
-                          </a14:m>
-                          <a:endParaRPr lang="es-CO" sz="2200" dirty="0">
-                            <a:latin typeface="Roboto" panose="02000000000000000000" pitchFamily="2" charset="0"/>
-                            <a:ea typeface="Roboto" panose="02000000000000000000" pitchFamily="2" charset="0"/>
-                          </a:endParaRPr>
-                        </a:p>
-                      </a:txBody>
-                      <a:tcPr/>
-                    </a:tc>
-                    <a:extLst>
-                      <a:ext uri="{0D108BD9-81ED-4DB2-BD59-A6C34878D82A}">
-                        <a16:rowId xmlns:a16="http://schemas.microsoft.com/office/drawing/2014/main" val="2353127006"/>
-                      </a:ext>
-                    </a:extLst>
-                  </a:tr>
-                  <a:tr h="334807">
-                    <a:tc>
-                      <a:txBody>
-                        <a:bodyPr/>
-                        <a:lstStyle/>
-                        <a:p>
-                          <a:pPr marL="0" marR="0" lvl="0" indent="0" algn="l" defTabSz="914400" rtl="0" eaLnBrk="1" fontAlgn="auto" latinLnBrk="0" hangingPunct="1">
-                            <a:lnSpc>
-                              <a:spcPct val="100000"/>
-                            </a:lnSpc>
-                            <a:spcBef>
-                              <a:spcPts val="0"/>
-                            </a:spcBef>
-                            <a:spcAft>
-                              <a:spcPts val="0"/>
-                            </a:spcAft>
-                            <a:buClr>
-                              <a:srgbClr val="000000"/>
-                            </a:buClr>
-                            <a:buSzTx/>
-                            <a:buFont typeface="Arial"/>
-                            <a:buNone/>
-                            <a:tabLst/>
-                            <a:defRPr/>
-                          </a:pPr>
-                          <a14:m>
-                            <m:oMathPara xmlns:m="http://schemas.openxmlformats.org/officeDocument/2006/math">
-                              <m:oMathParaPr>
-                                <m:jc m:val="centerGroup"/>
-                              </m:oMathParaPr>
-                              <m:oMath xmlns:m="http://schemas.openxmlformats.org/officeDocument/2006/math">
-                                <m:r>
-                                  <a:rPr lang="es-MX" sz="2200" b="0" i="1" smtClean="0">
-                                    <a:latin typeface="Cambria Math" panose="02040503050406030204" pitchFamily="18" charset="0"/>
-                                    <a:ea typeface="Roboto" panose="02000000000000000000" pitchFamily="2" charset="0"/>
-                                  </a:rPr>
-                                  <m:t>𝑉</m:t>
-                                </m:r>
-                              </m:oMath>
-                            </m:oMathPara>
-                          </a14:m>
-                          <a:endParaRPr lang="es-CO" sz="2200" dirty="0">
-                            <a:latin typeface="Roboto" panose="02000000000000000000" pitchFamily="2" charset="0"/>
-                            <a:ea typeface="Roboto" panose="02000000000000000000" pitchFamily="2" charset="0"/>
-                          </a:endParaRPr>
-                        </a:p>
-                      </a:txBody>
-                      <a:tcPr/>
-                    </a:tc>
-                    <a:tc>
-                      <a:txBody>
-                        <a:bodyPr/>
-                        <a:lstStyle/>
-                        <a:p>
-                          <a:pPr/>
-                          <a14:m>
-                            <m:oMathPara xmlns:m="http://schemas.openxmlformats.org/officeDocument/2006/math">
-                              <m:oMathParaPr>
-                                <m:jc m:val="centerGroup"/>
-                              </m:oMathParaPr>
-                              <m:oMath xmlns:m="http://schemas.openxmlformats.org/officeDocument/2006/math">
-                                <m:r>
-                                  <a:rPr lang="es-MX" sz="2200" b="0" i="1" smtClean="0">
-                                    <a:latin typeface="Cambria Math" panose="02040503050406030204" pitchFamily="18" charset="0"/>
-                                    <a:ea typeface="Roboto" panose="02000000000000000000" pitchFamily="2" charset="0"/>
-                                  </a:rPr>
-                                  <m:t>𝐹</m:t>
-                                </m:r>
-                              </m:oMath>
-                            </m:oMathPara>
-                          </a14:m>
-                          <a:endParaRPr lang="es-CO" sz="2200" dirty="0">
-                            <a:latin typeface="Roboto" panose="02000000000000000000" pitchFamily="2" charset="0"/>
-                            <a:ea typeface="Roboto" panose="02000000000000000000" pitchFamily="2" charset="0"/>
-                          </a:endParaRPr>
-                        </a:p>
-                      </a:txBody>
-                      <a:tcPr/>
-                    </a:tc>
-                    <a:tc>
-                      <a:txBody>
-                        <a:bodyPr/>
-                        <a:lstStyle/>
-                        <a:p>
-                          <a:pPr marL="0" marR="0" lvl="0" indent="0" algn="l" defTabSz="914400" rtl="0" eaLnBrk="1" fontAlgn="auto" latinLnBrk="0" hangingPunct="1">
-                            <a:lnSpc>
-                              <a:spcPct val="100000"/>
-                            </a:lnSpc>
-                            <a:spcBef>
-                              <a:spcPts val="0"/>
-                            </a:spcBef>
-                            <a:spcAft>
-                              <a:spcPts val="0"/>
-                            </a:spcAft>
-                            <a:buClr>
-                              <a:srgbClr val="000000"/>
-                            </a:buClr>
-                            <a:buSzTx/>
-                            <a:buFont typeface="Arial"/>
-                            <a:buNone/>
-                            <a:tabLst/>
-                            <a:defRPr/>
-                          </a:pPr>
-                          <a14:m>
-                            <m:oMathPara xmlns:m="http://schemas.openxmlformats.org/officeDocument/2006/math">
-                              <m:oMathParaPr>
-                                <m:jc m:val="centerGroup"/>
-                              </m:oMathParaPr>
-                              <m:oMath xmlns:m="http://schemas.openxmlformats.org/officeDocument/2006/math">
-                                <m:r>
-                                  <a:rPr lang="es-MX" sz="2200" b="0" i="1" smtClean="0">
-                                    <a:latin typeface="Cambria Math" panose="02040503050406030204" pitchFamily="18" charset="0"/>
-                                    <a:ea typeface="Cambria Math" panose="02040503050406030204" pitchFamily="18" charset="0"/>
-                                  </a:rPr>
-                                  <m:t>𝐹</m:t>
-                                </m:r>
-                              </m:oMath>
-                            </m:oMathPara>
-                          </a14:m>
-                          <a:endParaRPr lang="es-CO" sz="2200" dirty="0">
-                            <a:latin typeface="Roboto" panose="02000000000000000000" pitchFamily="2" charset="0"/>
-                            <a:ea typeface="Roboto" panose="02000000000000000000" pitchFamily="2" charset="0"/>
-                          </a:endParaRPr>
-                        </a:p>
-                      </a:txBody>
-                      <a:tcPr/>
-                    </a:tc>
-                    <a:tc>
-                      <a:txBody>
-                        <a:bodyPr/>
-                        <a:lstStyle/>
-                        <a:p>
-                          <a:pPr marL="0" marR="0" lvl="0" indent="0" algn="l" defTabSz="914400" rtl="0" eaLnBrk="1" fontAlgn="auto" latinLnBrk="0" hangingPunct="1">
-                            <a:lnSpc>
-                              <a:spcPct val="100000"/>
-                            </a:lnSpc>
-                            <a:spcBef>
-                              <a:spcPts val="0"/>
-                            </a:spcBef>
-                            <a:spcAft>
-                              <a:spcPts val="0"/>
-                            </a:spcAft>
-                            <a:buClr>
-                              <a:srgbClr val="000000"/>
-                            </a:buClr>
-                            <a:buSzTx/>
-                            <a:buFont typeface="Arial"/>
-                            <a:buNone/>
-                            <a:tabLst/>
-                            <a:defRPr/>
-                          </a:pPr>
-                          <a14:m>
-                            <m:oMathPara xmlns:m="http://schemas.openxmlformats.org/officeDocument/2006/math">
-                              <m:oMathParaPr>
-                                <m:jc m:val="centerGroup"/>
-                              </m:oMathParaPr>
-                              <m:oMath xmlns:m="http://schemas.openxmlformats.org/officeDocument/2006/math">
-                                <m:r>
-                                  <a:rPr lang="es-MX" sz="2200" b="0" i="1" smtClean="0">
-                                    <a:latin typeface="Cambria Math" panose="02040503050406030204" pitchFamily="18" charset="0"/>
-                                    <a:ea typeface="Cambria Math" panose="02040503050406030204" pitchFamily="18" charset="0"/>
-                                  </a:rPr>
-                                  <m:t>𝑉</m:t>
-                                </m:r>
-                              </m:oMath>
-                            </m:oMathPara>
-                          </a14:m>
-                          <a:endParaRPr lang="es-CO" sz="2200" dirty="0">
-                            <a:latin typeface="Roboto" panose="02000000000000000000" pitchFamily="2" charset="0"/>
-                            <a:ea typeface="Roboto" panose="02000000000000000000" pitchFamily="2" charset="0"/>
-                          </a:endParaRPr>
-                        </a:p>
-                      </a:txBody>
-                      <a:tcPr/>
-                    </a:tc>
-                    <a:tc>
-                      <a:txBody>
-                        <a:bodyPr/>
-                        <a:lstStyle/>
-                        <a:p>
-                          <a:pPr marL="0" marR="0" lvl="0" indent="0" algn="l" defTabSz="914400" rtl="0" eaLnBrk="1" fontAlgn="auto" latinLnBrk="0" hangingPunct="1">
-                            <a:lnSpc>
-                              <a:spcPct val="100000"/>
-                            </a:lnSpc>
-                            <a:spcBef>
-                              <a:spcPts val="0"/>
-                            </a:spcBef>
-                            <a:spcAft>
-                              <a:spcPts val="0"/>
-                            </a:spcAft>
-                            <a:buClr>
-                              <a:srgbClr val="000000"/>
-                            </a:buClr>
-                            <a:buSzTx/>
-                            <a:buFont typeface="Arial"/>
-                            <a:buNone/>
-                            <a:tabLst/>
-                            <a:defRPr/>
-                          </a:pPr>
-                          <a14:m>
-                            <m:oMathPara xmlns:m="http://schemas.openxmlformats.org/officeDocument/2006/math">
-                              <m:oMathParaPr>
-                                <m:jc m:val="centerGroup"/>
-                              </m:oMathParaPr>
-                              <m:oMath xmlns:m="http://schemas.openxmlformats.org/officeDocument/2006/math">
-                                <m:r>
-                                  <a:rPr lang="es-MX" sz="2200" b="0" i="1" smtClean="0">
-                                    <a:latin typeface="Cambria Math" panose="02040503050406030204" pitchFamily="18" charset="0"/>
-                                    <a:ea typeface="Cambria Math" panose="02040503050406030204" pitchFamily="18" charset="0"/>
-                                  </a:rPr>
-                                  <m:t>𝑉</m:t>
-                                </m:r>
-                              </m:oMath>
-                            </m:oMathPara>
-                          </a14:m>
-                          <a:endParaRPr lang="es-CO" sz="2200" dirty="0">
-                            <a:latin typeface="Roboto" panose="02000000000000000000" pitchFamily="2" charset="0"/>
-                            <a:ea typeface="Roboto" panose="02000000000000000000" pitchFamily="2" charset="0"/>
-                          </a:endParaRPr>
-                        </a:p>
-                      </a:txBody>
-                      <a:tcPr/>
-                    </a:tc>
-                    <a:tc>
-                      <a:txBody>
-                        <a:bodyPr/>
-                        <a:lstStyle/>
-                        <a:p>
-                          <a:pPr marL="0" marR="0" lvl="0" indent="0" algn="l" defTabSz="914400" rtl="0" eaLnBrk="1" fontAlgn="auto" latinLnBrk="0" hangingPunct="1">
-                            <a:lnSpc>
-                              <a:spcPct val="100000"/>
-                            </a:lnSpc>
-                            <a:spcBef>
-                              <a:spcPts val="0"/>
-                            </a:spcBef>
-                            <a:spcAft>
-                              <a:spcPts val="0"/>
-                            </a:spcAft>
-                            <a:buClr>
-                              <a:srgbClr val="000000"/>
-                            </a:buClr>
-                            <a:buSzTx/>
-                            <a:buFont typeface="Arial"/>
-                            <a:buNone/>
-                            <a:tabLst/>
-                            <a:defRPr/>
-                          </a:pPr>
-                          <a14:m>
-                            <m:oMathPara xmlns:m="http://schemas.openxmlformats.org/officeDocument/2006/math">
-                              <m:oMathParaPr>
-                                <m:jc m:val="centerGroup"/>
-                              </m:oMathParaPr>
-                              <m:oMath xmlns:m="http://schemas.openxmlformats.org/officeDocument/2006/math">
-                                <m:r>
-                                  <a:rPr lang="es-MX" sz="2200" b="0" i="1" smtClean="0">
-                                    <a:latin typeface="Cambria Math" panose="02040503050406030204" pitchFamily="18" charset="0"/>
-                                    <a:ea typeface="Roboto" panose="02000000000000000000" pitchFamily="2" charset="0"/>
-                                  </a:rPr>
-                                  <m:t>𝐹</m:t>
-                                </m:r>
-                              </m:oMath>
-                            </m:oMathPara>
-                          </a14:m>
-                          <a:endParaRPr lang="es-CO" sz="2200" dirty="0">
-                            <a:latin typeface="Roboto" panose="02000000000000000000" pitchFamily="2" charset="0"/>
-                            <a:ea typeface="Roboto" panose="02000000000000000000" pitchFamily="2" charset="0"/>
-                          </a:endParaRPr>
-                        </a:p>
-                      </a:txBody>
-                      <a:tcPr/>
-                    </a:tc>
-                    <a:tc>
-                      <a:txBody>
-                        <a:bodyPr/>
-                        <a:lstStyle/>
-                        <a:p>
-                          <a:pPr marL="0" marR="0" lvl="0" indent="0" algn="l" defTabSz="914400" rtl="0" eaLnBrk="1" fontAlgn="auto" latinLnBrk="0" hangingPunct="1">
-                            <a:lnSpc>
-                              <a:spcPct val="100000"/>
-                            </a:lnSpc>
-                            <a:spcBef>
-                              <a:spcPts val="0"/>
-                            </a:spcBef>
-                            <a:spcAft>
-                              <a:spcPts val="0"/>
-                            </a:spcAft>
-                            <a:buClr>
-                              <a:srgbClr val="000000"/>
-                            </a:buClr>
-                            <a:buSzTx/>
-                            <a:buFont typeface="Arial"/>
-                            <a:buNone/>
-                            <a:tabLst/>
-                            <a:defRPr/>
-                          </a:pPr>
-                          <a14:m>
-                            <m:oMathPara xmlns:m="http://schemas.openxmlformats.org/officeDocument/2006/math">
-                              <m:oMathParaPr>
-                                <m:jc m:val="centerGroup"/>
-                              </m:oMathParaPr>
-                              <m:oMath xmlns:m="http://schemas.openxmlformats.org/officeDocument/2006/math">
-                                <m:r>
-                                  <a:rPr lang="es-MX" sz="2200" b="0" i="1" smtClean="0">
-                                    <a:latin typeface="Cambria Math" panose="02040503050406030204" pitchFamily="18" charset="0"/>
-                                    <a:ea typeface="Roboto" panose="02000000000000000000" pitchFamily="2" charset="0"/>
-                                  </a:rPr>
-                                  <m:t>𝐹</m:t>
-                                </m:r>
-                              </m:oMath>
-                            </m:oMathPara>
-                          </a14:m>
-                          <a:endParaRPr lang="es-CO" sz="2200" dirty="0">
-                            <a:latin typeface="Roboto" panose="02000000000000000000" pitchFamily="2" charset="0"/>
-                            <a:ea typeface="Roboto" panose="02000000000000000000" pitchFamily="2" charset="0"/>
-                          </a:endParaRPr>
-                        </a:p>
-                      </a:txBody>
-                      <a:tcPr/>
-                    </a:tc>
-                    <a:extLst>
-                      <a:ext uri="{0D108BD9-81ED-4DB2-BD59-A6C34878D82A}">
-                        <a16:rowId xmlns:a16="http://schemas.microsoft.com/office/drawing/2014/main" val="4184868107"/>
-                      </a:ext>
-                    </a:extLst>
-                  </a:tr>
-                  <a:tr h="334807">
-                    <a:tc>
-                      <a:txBody>
-                        <a:bodyPr/>
-                        <a:lstStyle/>
-                        <a:p>
-                          <a:pPr marL="0" marR="0" lvl="0" indent="0" algn="l" defTabSz="914400" rtl="0" eaLnBrk="1" fontAlgn="auto" latinLnBrk="0" hangingPunct="1">
-                            <a:lnSpc>
-                              <a:spcPct val="100000"/>
-                            </a:lnSpc>
-                            <a:spcBef>
-                              <a:spcPts val="0"/>
-                            </a:spcBef>
-                            <a:spcAft>
-                              <a:spcPts val="0"/>
-                            </a:spcAft>
-                            <a:buClr>
-                              <a:srgbClr val="000000"/>
-                            </a:buClr>
-                            <a:buSzTx/>
-                            <a:buFont typeface="Arial"/>
-                            <a:buNone/>
-                            <a:tabLst/>
-                            <a:defRPr/>
-                          </a:pPr>
-                          <a14:m>
-                            <m:oMathPara xmlns:m="http://schemas.openxmlformats.org/officeDocument/2006/math">
-                              <m:oMathParaPr>
-                                <m:jc m:val="centerGroup"/>
-                              </m:oMathParaPr>
-                              <m:oMath xmlns:m="http://schemas.openxmlformats.org/officeDocument/2006/math">
-                                <m:r>
-                                  <a:rPr lang="es-MX" sz="2200" b="0" i="1" smtClean="0">
-                                    <a:latin typeface="Cambria Math" panose="02040503050406030204" pitchFamily="18" charset="0"/>
-                                    <a:ea typeface="Roboto" panose="02000000000000000000" pitchFamily="2" charset="0"/>
-                                  </a:rPr>
-                                  <m:t>𝑉</m:t>
-                                </m:r>
-                              </m:oMath>
-                            </m:oMathPara>
-                          </a14:m>
-                          <a:endParaRPr lang="es-CO" sz="2200" dirty="0">
-                            <a:latin typeface="Roboto" panose="02000000000000000000" pitchFamily="2" charset="0"/>
-                            <a:ea typeface="Roboto" panose="02000000000000000000" pitchFamily="2" charset="0"/>
-                          </a:endParaRPr>
-                        </a:p>
-                      </a:txBody>
-                      <a:tcPr/>
-                    </a:tc>
-                    <a:tc>
-                      <a:txBody>
-                        <a:bodyPr/>
-                        <a:lstStyle/>
-                        <a:p>
-                          <a:pPr marL="0" marR="0" lvl="0" indent="0" algn="l" defTabSz="914400" rtl="0" eaLnBrk="1" fontAlgn="auto" latinLnBrk="0" hangingPunct="1">
-                            <a:lnSpc>
-                              <a:spcPct val="100000"/>
-                            </a:lnSpc>
-                            <a:spcBef>
-                              <a:spcPts val="0"/>
-                            </a:spcBef>
-                            <a:spcAft>
-                              <a:spcPts val="0"/>
-                            </a:spcAft>
-                            <a:buClr>
-                              <a:srgbClr val="000000"/>
-                            </a:buClr>
-                            <a:buSzTx/>
-                            <a:buFont typeface="Arial"/>
-                            <a:buNone/>
-                            <a:tabLst/>
-                            <a:defRPr/>
-                          </a:pPr>
-                          <a14:m>
-                            <m:oMathPara xmlns:m="http://schemas.openxmlformats.org/officeDocument/2006/math">
-                              <m:oMathParaPr>
-                                <m:jc m:val="centerGroup"/>
-                              </m:oMathParaPr>
-                              <m:oMath xmlns:m="http://schemas.openxmlformats.org/officeDocument/2006/math">
-                                <m:r>
-                                  <a:rPr lang="es-MX" sz="2200" b="0" i="1" smtClean="0">
-                                    <a:latin typeface="Cambria Math" panose="02040503050406030204" pitchFamily="18" charset="0"/>
-                                    <a:ea typeface="Roboto" panose="02000000000000000000" pitchFamily="2" charset="0"/>
-                                  </a:rPr>
-                                  <m:t>𝑉</m:t>
-                                </m:r>
-                              </m:oMath>
-                            </m:oMathPara>
-                          </a14:m>
-                          <a:endParaRPr lang="es-CO" sz="2200" dirty="0">
-                            <a:latin typeface="Roboto" panose="02000000000000000000" pitchFamily="2" charset="0"/>
-                            <a:ea typeface="Roboto" panose="02000000000000000000" pitchFamily="2" charset="0"/>
-                          </a:endParaRPr>
-                        </a:p>
-                      </a:txBody>
-                      <a:tcPr/>
-                    </a:tc>
-                    <a:tc>
-                      <a:txBody>
-                        <a:bodyPr/>
-                        <a:lstStyle/>
-                        <a:p>
-                          <a:pPr marL="0" marR="0" lvl="0" indent="0" algn="l" defTabSz="914400" rtl="0" eaLnBrk="1" fontAlgn="auto" latinLnBrk="0" hangingPunct="1">
-                            <a:lnSpc>
-                              <a:spcPct val="100000"/>
-                            </a:lnSpc>
-                            <a:spcBef>
-                              <a:spcPts val="0"/>
-                            </a:spcBef>
-                            <a:spcAft>
-                              <a:spcPts val="0"/>
-                            </a:spcAft>
-                            <a:buClr>
-                              <a:srgbClr val="000000"/>
-                            </a:buClr>
-                            <a:buSzTx/>
-                            <a:buFont typeface="Arial"/>
-                            <a:buNone/>
-                            <a:tabLst/>
-                            <a:defRPr/>
-                          </a:pPr>
-                          <a14:m>
-                            <m:oMathPara xmlns:m="http://schemas.openxmlformats.org/officeDocument/2006/math">
-                              <m:oMathParaPr>
-                                <m:jc m:val="centerGroup"/>
-                              </m:oMathParaPr>
-                              <m:oMath xmlns:m="http://schemas.openxmlformats.org/officeDocument/2006/math">
-                                <m:r>
-                                  <a:rPr lang="es-MX" sz="2200" b="0" i="1" smtClean="0">
-                                    <a:latin typeface="Cambria Math" panose="02040503050406030204" pitchFamily="18" charset="0"/>
-                                    <a:ea typeface="Roboto" panose="02000000000000000000" pitchFamily="2" charset="0"/>
-                                  </a:rPr>
-                                  <m:t>𝑉</m:t>
-                                </m:r>
-                              </m:oMath>
-                            </m:oMathPara>
-                          </a14:m>
-                          <a:endParaRPr lang="es-CO" sz="2200" dirty="0">
-                            <a:latin typeface="Roboto" panose="02000000000000000000" pitchFamily="2" charset="0"/>
-                            <a:ea typeface="Roboto" panose="02000000000000000000" pitchFamily="2" charset="0"/>
-                          </a:endParaRPr>
-                        </a:p>
-                      </a:txBody>
-                      <a:tcPr/>
-                    </a:tc>
-                    <a:tc>
-                      <a:txBody>
-                        <a:bodyPr/>
-                        <a:lstStyle/>
-                        <a:p>
-                          <a:pPr marL="0" marR="0" lvl="0" indent="0" algn="l" defTabSz="914400" rtl="0" eaLnBrk="1" fontAlgn="auto" latinLnBrk="0" hangingPunct="1">
-                            <a:lnSpc>
-                              <a:spcPct val="100000"/>
-                            </a:lnSpc>
-                            <a:spcBef>
-                              <a:spcPts val="0"/>
-                            </a:spcBef>
-                            <a:spcAft>
-                              <a:spcPts val="0"/>
-                            </a:spcAft>
-                            <a:buClr>
-                              <a:srgbClr val="000000"/>
-                            </a:buClr>
-                            <a:buSzTx/>
-                            <a:buFont typeface="Arial"/>
-                            <a:buNone/>
-                            <a:tabLst/>
-                            <a:defRPr/>
-                          </a:pPr>
-                          <a14:m>
-                            <m:oMathPara xmlns:m="http://schemas.openxmlformats.org/officeDocument/2006/math">
-                              <m:oMathParaPr>
-                                <m:jc m:val="centerGroup"/>
-                              </m:oMathParaPr>
-                              <m:oMath xmlns:m="http://schemas.openxmlformats.org/officeDocument/2006/math">
-                                <m:r>
-                                  <a:rPr lang="es-MX" sz="2200" b="0" i="1" smtClean="0">
-                                    <a:latin typeface="Cambria Math" panose="02040503050406030204" pitchFamily="18" charset="0"/>
-                                    <a:ea typeface="Roboto" panose="02000000000000000000" pitchFamily="2" charset="0"/>
-                                  </a:rPr>
-                                  <m:t>𝑉</m:t>
-                                </m:r>
-                              </m:oMath>
-                            </m:oMathPara>
-                          </a14:m>
-                          <a:endParaRPr lang="es-CO" sz="2200" dirty="0">
-                            <a:latin typeface="Roboto" panose="02000000000000000000" pitchFamily="2" charset="0"/>
-                            <a:ea typeface="Roboto" panose="02000000000000000000" pitchFamily="2" charset="0"/>
-                          </a:endParaRPr>
-                        </a:p>
-                      </a:txBody>
-                      <a:tcPr/>
-                    </a:tc>
-                    <a:tc>
-                      <a:txBody>
-                        <a:bodyPr/>
-                        <a:lstStyle/>
-                        <a:p>
-                          <a:pPr marL="0" marR="0" lvl="0" indent="0" algn="l" defTabSz="914400" rtl="0" eaLnBrk="1" fontAlgn="auto" latinLnBrk="0" hangingPunct="1">
-                            <a:lnSpc>
-                              <a:spcPct val="100000"/>
-                            </a:lnSpc>
-                            <a:spcBef>
-                              <a:spcPts val="0"/>
-                            </a:spcBef>
-                            <a:spcAft>
-                              <a:spcPts val="0"/>
-                            </a:spcAft>
-                            <a:buClr>
-                              <a:srgbClr val="000000"/>
-                            </a:buClr>
-                            <a:buSzTx/>
-                            <a:buFont typeface="Arial"/>
-                            <a:buNone/>
-                            <a:tabLst/>
-                            <a:defRPr/>
-                          </a:pPr>
-                          <a14:m>
-                            <m:oMathPara xmlns:m="http://schemas.openxmlformats.org/officeDocument/2006/math">
-                              <m:oMathParaPr>
-                                <m:jc m:val="centerGroup"/>
-                              </m:oMathParaPr>
-                              <m:oMath xmlns:m="http://schemas.openxmlformats.org/officeDocument/2006/math">
-                                <m:r>
-                                  <a:rPr lang="es-MX" sz="2200" b="0" i="1" smtClean="0">
-                                    <a:latin typeface="Cambria Math" panose="02040503050406030204" pitchFamily="18" charset="0"/>
-                                    <a:ea typeface="Roboto" panose="02000000000000000000" pitchFamily="2" charset="0"/>
-                                  </a:rPr>
-                                  <m:t>𝐹</m:t>
-                                </m:r>
-                              </m:oMath>
-                            </m:oMathPara>
-                          </a14:m>
-                          <a:endParaRPr lang="es-CO" sz="2200" dirty="0">
-                            <a:latin typeface="Roboto" panose="02000000000000000000" pitchFamily="2" charset="0"/>
-                            <a:ea typeface="Roboto" panose="02000000000000000000" pitchFamily="2" charset="0"/>
-                          </a:endParaRPr>
-                        </a:p>
-                      </a:txBody>
-                      <a:tcPr/>
-                    </a:tc>
-                    <a:tc>
-                      <a:txBody>
-                        <a:bodyPr/>
-                        <a:lstStyle/>
-                        <a:p>
-                          <a:pPr marL="0" marR="0" lvl="0" indent="0" algn="l" defTabSz="914400" rtl="0" eaLnBrk="1" fontAlgn="auto" latinLnBrk="0" hangingPunct="1">
-                            <a:lnSpc>
-                              <a:spcPct val="100000"/>
-                            </a:lnSpc>
-                            <a:spcBef>
-                              <a:spcPts val="0"/>
-                            </a:spcBef>
-                            <a:spcAft>
-                              <a:spcPts val="0"/>
-                            </a:spcAft>
-                            <a:buClr>
-                              <a:srgbClr val="000000"/>
-                            </a:buClr>
-                            <a:buSzTx/>
-                            <a:buFont typeface="Arial"/>
-                            <a:buNone/>
-                            <a:tabLst/>
-                            <a:defRPr/>
-                          </a:pPr>
-                          <a14:m>
-                            <m:oMathPara xmlns:m="http://schemas.openxmlformats.org/officeDocument/2006/math">
-                              <m:oMathParaPr>
-                                <m:jc m:val="centerGroup"/>
-                              </m:oMathParaPr>
-                              <m:oMath xmlns:m="http://schemas.openxmlformats.org/officeDocument/2006/math">
-                                <m:r>
-                                  <a:rPr lang="es-MX" sz="2200" b="0" i="1" smtClean="0">
-                                    <a:latin typeface="Cambria Math" panose="02040503050406030204" pitchFamily="18" charset="0"/>
-                                    <a:ea typeface="Roboto" panose="02000000000000000000" pitchFamily="2" charset="0"/>
-                                  </a:rPr>
-                                  <m:t>𝑉</m:t>
-                                </m:r>
-                              </m:oMath>
-                            </m:oMathPara>
-                          </a14:m>
-                          <a:endParaRPr lang="es-CO" sz="2200" dirty="0">
-                            <a:latin typeface="Roboto" panose="02000000000000000000" pitchFamily="2" charset="0"/>
-                            <a:ea typeface="Roboto" panose="02000000000000000000" pitchFamily="2" charset="0"/>
-                          </a:endParaRPr>
-                        </a:p>
-                      </a:txBody>
-                      <a:tcPr/>
-                    </a:tc>
-                    <a:tc>
-                      <a:txBody>
-                        <a:bodyPr/>
-                        <a:lstStyle/>
-                        <a:p>
-                          <a:pPr marL="0" marR="0" lvl="0" indent="0" algn="l" defTabSz="914400" rtl="0" eaLnBrk="1" fontAlgn="auto" latinLnBrk="0" hangingPunct="1">
-                            <a:lnSpc>
-                              <a:spcPct val="100000"/>
-                            </a:lnSpc>
-                            <a:spcBef>
-                              <a:spcPts val="0"/>
-                            </a:spcBef>
-                            <a:spcAft>
-                              <a:spcPts val="0"/>
-                            </a:spcAft>
-                            <a:buClr>
-                              <a:srgbClr val="000000"/>
-                            </a:buClr>
-                            <a:buSzTx/>
-                            <a:buFont typeface="Arial"/>
-                            <a:buNone/>
-                            <a:tabLst/>
-                            <a:defRPr/>
-                          </a:pPr>
-                          <a14:m>
-                            <m:oMathPara xmlns:m="http://schemas.openxmlformats.org/officeDocument/2006/math">
-                              <m:oMathParaPr>
-                                <m:jc m:val="centerGroup"/>
-                              </m:oMathParaPr>
-                              <m:oMath xmlns:m="http://schemas.openxmlformats.org/officeDocument/2006/math">
-                                <m:r>
-                                  <a:rPr lang="es-MX" sz="2200" b="0" i="1" smtClean="0">
-                                    <a:latin typeface="Cambria Math" panose="02040503050406030204" pitchFamily="18" charset="0"/>
-                                    <a:ea typeface="Roboto" panose="02000000000000000000" pitchFamily="2" charset="0"/>
-                                  </a:rPr>
-                                  <m:t>𝑉</m:t>
-                                </m:r>
-                              </m:oMath>
-                            </m:oMathPara>
-                          </a14:m>
-                          <a:endParaRPr lang="es-CO" sz="2200" dirty="0">
-                            <a:latin typeface="Roboto" panose="02000000000000000000" pitchFamily="2" charset="0"/>
-                            <a:ea typeface="Roboto" panose="02000000000000000000" pitchFamily="2" charset="0"/>
-                          </a:endParaRPr>
-                        </a:p>
-                      </a:txBody>
-                      <a:tcPr/>
-                    </a:tc>
-                    <a:extLst>
-                      <a:ext uri="{0D108BD9-81ED-4DB2-BD59-A6C34878D82A}">
-                        <a16:rowId xmlns:a16="http://schemas.microsoft.com/office/drawing/2014/main" val="889136403"/>
-                      </a:ext>
-                    </a:extLst>
-                  </a:tr>
-                </a:tbl>
-              </a:graphicData>
-            </a:graphic>
-          </p:graphicFrame>
-        </mc:Choice>
-        <mc:Fallback>
-          <p:graphicFrame>
-            <p:nvGraphicFramePr>
-              <p:cNvPr id="5" name="Tabla 4">
-                <a:extLst>
-                  <a:ext uri="{FF2B5EF4-FFF2-40B4-BE49-F238E27FC236}">
-                    <a16:creationId xmlns:a16="http://schemas.microsoft.com/office/drawing/2014/main" id="{0FB34195-E2AA-4909-A49F-F91AAE1BF04D}"/>
-                  </a:ext>
-                </a:extLst>
-              </p:cNvPr>
-              <p:cNvGraphicFramePr>
-                <a:graphicFrameLocks noGrp="1"/>
-              </p:cNvGraphicFramePr>
-              <p:nvPr>
-                <p:extLst>
-                  <p:ext uri="{D42A27DB-BD31-4B8C-83A1-F6EECF244321}">
-                    <p14:modId xmlns:p14="http://schemas.microsoft.com/office/powerpoint/2010/main" val="1352911169"/>
-                  </p:ext>
-                </p:extLst>
-              </p:nvPr>
-            </p:nvGraphicFramePr>
-            <p:xfrm>
-              <a:off x="4055592" y="3510856"/>
-              <a:ext cx="6261577" cy="2133600"/>
-            </p:xfrm>
-            <a:graphic>
-              <a:graphicData uri="http://schemas.openxmlformats.org/drawingml/2006/table">
-                <a:tbl>
-                  <a:tblPr firstRow="1" bandRow="1"/>
-                  <a:tblGrid>
-                    <a:gridCol w="544786">
-                      <a:extLst>
-                        <a:ext uri="{9D8B030D-6E8A-4147-A177-3AD203B41FA5}">
-                          <a16:colId xmlns:a16="http://schemas.microsoft.com/office/drawing/2014/main" val="776375974"/>
-                        </a:ext>
-                      </a:extLst>
-                    </a:gridCol>
-                    <a:gridCol w="544786">
-                      <a:extLst>
-                        <a:ext uri="{9D8B030D-6E8A-4147-A177-3AD203B41FA5}">
-                          <a16:colId xmlns:a16="http://schemas.microsoft.com/office/drawing/2014/main" val="384604534"/>
-                        </a:ext>
-                      </a:extLst>
-                    </a:gridCol>
-                    <a:gridCol w="1034401">
-                      <a:extLst>
-                        <a:ext uri="{9D8B030D-6E8A-4147-A177-3AD203B41FA5}">
-                          <a16:colId xmlns:a16="http://schemas.microsoft.com/office/drawing/2014/main" val="79869298"/>
-                        </a:ext>
-                      </a:extLst>
-                    </a:gridCol>
-                    <a:gridCol w="1034401">
-                      <a:extLst>
-                        <a:ext uri="{9D8B030D-6E8A-4147-A177-3AD203B41FA5}">
-                          <a16:colId xmlns:a16="http://schemas.microsoft.com/office/drawing/2014/main" val="3347906918"/>
-                        </a:ext>
-                      </a:extLst>
-                    </a:gridCol>
-                    <a:gridCol w="1034401">
-                      <a:extLst>
-                        <a:ext uri="{9D8B030D-6E8A-4147-A177-3AD203B41FA5}">
-                          <a16:colId xmlns:a16="http://schemas.microsoft.com/office/drawing/2014/main" val="912474650"/>
-                        </a:ext>
-                      </a:extLst>
-                    </a:gridCol>
-                    <a:gridCol w="1034401">
-                      <a:extLst>
-                        <a:ext uri="{9D8B030D-6E8A-4147-A177-3AD203B41FA5}">
-                          <a16:colId xmlns:a16="http://schemas.microsoft.com/office/drawing/2014/main" val="4025530010"/>
-                        </a:ext>
-                      </a:extLst>
-                    </a:gridCol>
-                    <a:gridCol w="1034401">
-                      <a:extLst>
-                        <a:ext uri="{9D8B030D-6E8A-4147-A177-3AD203B41FA5}">
-                          <a16:colId xmlns:a16="http://schemas.microsoft.com/office/drawing/2014/main" val="2172254775"/>
-                        </a:ext>
-                      </a:extLst>
-                    </a:gridCol>
-                  </a:tblGrid>
-                  <a:tr h="0">
-                    <a:tc>
-                      <a:txBody>
-                        <a:bodyPr/>
-                        <a:lstStyle/>
-                        <a:p>
-                          <a:pPr marL="0" marR="0" lvl="0" indent="0" algn="l" defTabSz="914400" rtl="0" eaLnBrk="1" fontAlgn="auto" latinLnBrk="0" hangingPunct="1">
-                            <a:lnSpc>
-                              <a:spcPct val="100000"/>
-                            </a:lnSpc>
-                            <a:spcBef>
-                              <a:spcPts val="0"/>
-                            </a:spcBef>
-                            <a:spcAft>
-                              <a:spcPts val="0"/>
-                            </a:spcAft>
-                            <a:buClr>
-                              <a:srgbClr val="000000"/>
-                            </a:buClr>
-                            <a:buSzTx/>
-                            <a:buFont typeface="Arial"/>
-                            <a:buNone/>
-                            <a:tabLst/>
-                            <a:defRPr/>
-                          </a:pPr>
-                          <a14:m xmlns:a14="http://schemas.microsoft.com/office/drawing/2010/main">
-                            <m:oMathPara xmlns:m="http://schemas.openxmlformats.org/officeDocument/2006/math">
-                              <m:oMathParaPr>
-                                <m:jc m:val="centerGroup"/>
-                              </m:oMathParaPr>
-                              <m:oMath xmlns:m="http://schemas.openxmlformats.org/officeDocument/2006/math">
-                                <m:r>
-                                  <a:rPr lang="es-MX" sz="2200" b="1" i="1" smtClean="0">
-                                    <a:latin typeface="Cambria Math" panose="02040503050406030204" pitchFamily="18" charset="0"/>
-                                    <a:ea typeface="Roboto" panose="02000000000000000000" pitchFamily="2" charset="0"/>
-                                  </a:rPr>
-                                  <m:t>𝒑</m:t>
-                                </m:r>
-                              </m:oMath>
-                            </m:oMathPara>
-                          </a14:m>
-                          <a:endParaRPr lang="es-CO" sz="2200" b="1" dirty="0">
-                            <a:latin typeface="Roboto" panose="02000000000000000000" pitchFamily="2" charset="0"/>
-                            <a:ea typeface="Roboto" panose="02000000000000000000" pitchFamily="2" charset="0"/>
-                          </a:endParaRPr>
-                        </a:p>
-                      </a:txBody>
-                      <a:tcPr/>
-                    </a:tc>
-                    <a:tc>
-                      <a:txBody>
-                        <a:bodyPr/>
-                        <a:lstStyle/>
-                        <a:p>
-                          <a:pPr/>
-                          <a14:m xmlns:a14="http://schemas.microsoft.com/office/drawing/2010/main">
-                            <m:oMathPara xmlns:m="http://schemas.openxmlformats.org/officeDocument/2006/math">
-                              <m:oMathParaPr>
-                                <m:jc m:val="centerGroup"/>
-                              </m:oMathParaPr>
-                              <m:oMath xmlns:m="http://schemas.openxmlformats.org/officeDocument/2006/math">
-                                <m:r>
-                                  <a:rPr lang="es-MX" sz="2200" b="1" i="1" smtClean="0">
-                                    <a:latin typeface="Cambria Math" panose="02040503050406030204" pitchFamily="18" charset="0"/>
-                                    <a:ea typeface="Roboto" panose="02000000000000000000" pitchFamily="2" charset="0"/>
-                                  </a:rPr>
-                                  <m:t>𝒒</m:t>
-                                </m:r>
-                              </m:oMath>
-                            </m:oMathPara>
-                          </a14:m>
-                          <a:endParaRPr lang="es-CO" sz="2200" b="1" dirty="0">
-                            <a:latin typeface="Roboto" panose="02000000000000000000" pitchFamily="2" charset="0"/>
-                            <a:ea typeface="Roboto" panose="02000000000000000000" pitchFamily="2" charset="0"/>
-                          </a:endParaRPr>
-                        </a:p>
-                      </a:txBody>
-                      <a:tcPr/>
-                    </a:tc>
-                    <a:tc>
-                      <a:txBody>
-                        <a:bodyPr/>
-                        <a:lstStyle/>
-                        <a:p>
-                          <a:pPr/>
-                          <a14:m xmlns:a14="http://schemas.microsoft.com/office/drawing/2010/main">
-                            <m:oMathPara xmlns:m="http://schemas.openxmlformats.org/officeDocument/2006/math">
-                              <m:oMathParaPr>
-                                <m:jc m:val="centerGroup"/>
-                              </m:oMathParaPr>
-                              <m:oMath xmlns:m="http://schemas.openxmlformats.org/officeDocument/2006/math">
-                                <m:r>
-                                  <a:rPr lang="es-MX" sz="2200" b="1" i="1" smtClean="0">
-                                    <a:latin typeface="Cambria Math" panose="02040503050406030204" pitchFamily="18" charset="0"/>
-                                    <a:ea typeface="Roboto" panose="02000000000000000000" pitchFamily="2" charset="0"/>
-                                  </a:rPr>
-                                  <m:t>𝒑</m:t>
-                                </m:r>
-                                <m:r>
-                                  <a:rPr lang="es-MX" sz="2200" b="1" i="1" smtClean="0">
-                                    <a:latin typeface="Cambria Math" panose="02040503050406030204" pitchFamily="18" charset="0"/>
-                                    <a:ea typeface="Cambria Math" panose="02040503050406030204" pitchFamily="18" charset="0"/>
-                                  </a:rPr>
-                                  <m:t>∧</m:t>
-                                </m:r>
-                                <m:r>
-                                  <a:rPr lang="es-MX" sz="2200" b="1" i="1" smtClean="0">
-                                    <a:latin typeface="Cambria Math" panose="02040503050406030204" pitchFamily="18" charset="0"/>
-                                    <a:ea typeface="Cambria Math" panose="02040503050406030204" pitchFamily="18" charset="0"/>
-                                  </a:rPr>
-                                  <m:t>𝒒</m:t>
-                                </m:r>
-                              </m:oMath>
-                            </m:oMathPara>
-                          </a14:m>
-                          <a:endParaRPr lang="es-CO" sz="2200" b="1" dirty="0">
-                            <a:latin typeface="Roboto" panose="02000000000000000000" pitchFamily="2" charset="0"/>
-                            <a:ea typeface="Roboto" panose="02000000000000000000" pitchFamily="2" charset="0"/>
-                          </a:endParaRPr>
-                        </a:p>
-                      </a:txBody>
-                      <a:tcPr/>
-                    </a:tc>
-                    <a:tc>
-                      <a:txBody>
-                        <a:bodyPr/>
-                        <a:lstStyle/>
-                        <a:p>
-                          <a:pPr/>
-                          <a14:m xmlns:a14="http://schemas.microsoft.com/office/drawing/2010/main">
-                            <m:oMathPara xmlns:m="http://schemas.openxmlformats.org/officeDocument/2006/math">
-                              <m:oMathParaPr>
-                                <m:jc m:val="centerGroup"/>
-                              </m:oMathParaPr>
-                              <m:oMath xmlns:m="http://schemas.openxmlformats.org/officeDocument/2006/math">
-                                <m:r>
-                                  <a:rPr lang="es-MX" sz="2200" b="1" i="1" smtClean="0">
-                                    <a:latin typeface="Cambria Math" panose="02040503050406030204" pitchFamily="18" charset="0"/>
-                                    <a:ea typeface="Roboto" panose="02000000000000000000" pitchFamily="2" charset="0"/>
-                                  </a:rPr>
-                                  <m:t>𝒑</m:t>
-                                </m:r>
-                                <m:r>
-                                  <a:rPr lang="es-MX" sz="2200" b="1" i="1" smtClean="0">
-                                    <a:latin typeface="Cambria Math" panose="02040503050406030204" pitchFamily="18" charset="0"/>
-                                    <a:ea typeface="Cambria Math" panose="02040503050406030204" pitchFamily="18" charset="0"/>
-                                  </a:rPr>
-                                  <m:t>∨</m:t>
-                                </m:r>
-                                <m:r>
-                                  <a:rPr lang="es-MX" sz="2200" b="1" i="1" smtClean="0">
-                                    <a:latin typeface="Cambria Math" panose="02040503050406030204" pitchFamily="18" charset="0"/>
-                                    <a:ea typeface="Cambria Math" panose="02040503050406030204" pitchFamily="18" charset="0"/>
-                                  </a:rPr>
-                                  <m:t>𝒒</m:t>
-                                </m:r>
-                              </m:oMath>
-                            </m:oMathPara>
-                          </a14:m>
-                          <a:endParaRPr lang="es-CO" sz="2200" b="1" dirty="0">
-                            <a:latin typeface="Roboto" panose="02000000000000000000" pitchFamily="2" charset="0"/>
-                            <a:ea typeface="Roboto" panose="02000000000000000000" pitchFamily="2" charset="0"/>
-                          </a:endParaRPr>
-                        </a:p>
-                      </a:txBody>
-                      <a:tcPr/>
-                    </a:tc>
-                    <a:tc>
-                      <a:txBody>
-                        <a:bodyPr/>
-                        <a:lstStyle/>
-                        <a:p>
-                          <a:pPr/>
-                          <a14:m xmlns:a14="http://schemas.microsoft.com/office/drawing/2010/main">
-                            <m:oMathPara xmlns:m="http://schemas.openxmlformats.org/officeDocument/2006/math">
-                              <m:oMathParaPr>
-                                <m:jc m:val="centerGroup"/>
-                              </m:oMathParaPr>
-                              <m:oMath xmlns:m="http://schemas.openxmlformats.org/officeDocument/2006/math">
-                                <m:r>
-                                  <a:rPr lang="es-MX" sz="2200" b="1" i="1" smtClean="0">
-                                    <a:latin typeface="Cambria Math" panose="02040503050406030204" pitchFamily="18" charset="0"/>
-                                    <a:ea typeface="Roboto" panose="02000000000000000000" pitchFamily="2" charset="0"/>
-                                  </a:rPr>
-                                  <m:t>𝒑</m:t>
-                                </m:r>
-                                <m:r>
-                                  <a:rPr lang="es-MX" sz="2200" b="1" i="1" smtClean="0">
-                                    <a:latin typeface="Cambria Math" panose="02040503050406030204" pitchFamily="18" charset="0"/>
-                                    <a:ea typeface="Cambria Math" panose="02040503050406030204" pitchFamily="18" charset="0"/>
-                                  </a:rPr>
-                                  <m:t>⊕</m:t>
-                                </m:r>
-                                <m:r>
-                                  <a:rPr lang="es-MX" sz="2200" b="1" i="1" smtClean="0">
-                                    <a:latin typeface="Cambria Math" panose="02040503050406030204" pitchFamily="18" charset="0"/>
-                                    <a:ea typeface="Cambria Math" panose="02040503050406030204" pitchFamily="18" charset="0"/>
-                                  </a:rPr>
-                                  <m:t>𝒒</m:t>
-                                </m:r>
-                              </m:oMath>
-                            </m:oMathPara>
-                          </a14:m>
-                          <a:endParaRPr lang="es-CO" sz="2200" b="1" dirty="0">
-                            <a:latin typeface="Roboto" panose="02000000000000000000" pitchFamily="2" charset="0"/>
-                            <a:ea typeface="Roboto" panose="02000000000000000000" pitchFamily="2" charset="0"/>
-                          </a:endParaRPr>
-                        </a:p>
-                      </a:txBody>
-                      <a:tcPr/>
-                    </a:tc>
-                    <a:tc>
-                      <a:txBody>
-                        <a:bodyPr/>
-                        <a:lstStyle/>
-                        <a:p>
-                          <a:pPr/>
-                          <a14:m xmlns:a14="http://schemas.microsoft.com/office/drawing/2010/main">
-                            <m:oMathPara xmlns:m="http://schemas.openxmlformats.org/officeDocument/2006/math">
-                              <m:oMathParaPr>
-                                <m:jc m:val="centerGroup"/>
-                              </m:oMathParaPr>
-                              <m:oMath xmlns:m="http://schemas.openxmlformats.org/officeDocument/2006/math">
-                                <m:r>
-                                  <a:rPr lang="es-MX" sz="2200" b="1" i="1" smtClean="0">
-                                    <a:latin typeface="Cambria Math" panose="02040503050406030204" pitchFamily="18" charset="0"/>
-                                    <a:ea typeface="Roboto" panose="02000000000000000000" pitchFamily="2" charset="0"/>
-                                  </a:rPr>
-                                  <m:t>𝒑</m:t>
-                                </m:r>
-                                <m:r>
-                                  <a:rPr lang="es-MX" sz="2200" b="1" i="1" smtClean="0">
-                                    <a:latin typeface="Cambria Math" panose="02040503050406030204" pitchFamily="18" charset="0"/>
-                                    <a:ea typeface="Cambria Math" panose="02040503050406030204" pitchFamily="18" charset="0"/>
-                                  </a:rPr>
-                                  <m:t>→</m:t>
-                                </m:r>
-                                <m:r>
-                                  <a:rPr lang="es-MX" sz="2200" b="1" i="1" smtClean="0">
-                                    <a:latin typeface="Cambria Math" panose="02040503050406030204" pitchFamily="18" charset="0"/>
-                                    <a:ea typeface="Cambria Math" panose="02040503050406030204" pitchFamily="18" charset="0"/>
-                                  </a:rPr>
-                                  <m:t>𝒒</m:t>
-                                </m:r>
-                              </m:oMath>
-                            </m:oMathPara>
-                          </a14:m>
-                          <a:endParaRPr lang="es-CO" sz="2200" b="1" dirty="0">
-                            <a:latin typeface="Roboto" panose="02000000000000000000" pitchFamily="2" charset="0"/>
-                            <a:ea typeface="Roboto" panose="02000000000000000000" pitchFamily="2" charset="0"/>
-                          </a:endParaRPr>
-                        </a:p>
-                      </a:txBody>
-                      <a:tcPr/>
-                    </a:tc>
-                    <a:tc>
-                      <a:txBody>
-                        <a:bodyPr/>
-                        <a:lstStyle/>
-                        <a:p>
-                          <a:pPr/>
-                          <a14:m xmlns:a14="http://schemas.microsoft.com/office/drawing/2010/main">
-                            <m:oMathPara xmlns:m="http://schemas.openxmlformats.org/officeDocument/2006/math">
-                              <m:oMathParaPr>
-                                <m:jc m:val="centerGroup"/>
-                              </m:oMathParaPr>
-                              <m:oMath xmlns:m="http://schemas.openxmlformats.org/officeDocument/2006/math">
-                                <m:r>
-                                  <a:rPr lang="es-MX" sz="2200" b="1" i="1" smtClean="0">
-                                    <a:latin typeface="Cambria Math" panose="02040503050406030204" pitchFamily="18" charset="0"/>
-                                    <a:ea typeface="Roboto" panose="02000000000000000000" pitchFamily="2" charset="0"/>
-                                  </a:rPr>
-                                  <m:t>𝒑</m:t>
-                                </m:r>
-                                <m:r>
-                                  <a:rPr lang="es-MX" sz="2200" b="1" i="1" smtClean="0">
-                                    <a:latin typeface="Cambria Math" panose="02040503050406030204" pitchFamily="18" charset="0"/>
-                                    <a:ea typeface="Cambria Math" panose="02040503050406030204" pitchFamily="18" charset="0"/>
-                                  </a:rPr>
-                                  <m:t>↔</m:t>
-                                </m:r>
-                                <m:r>
-                                  <a:rPr lang="es-MX" sz="2200" b="1" i="1" smtClean="0">
-                                    <a:latin typeface="Cambria Math" panose="02040503050406030204" pitchFamily="18" charset="0"/>
-                                    <a:ea typeface="Cambria Math" panose="02040503050406030204" pitchFamily="18" charset="0"/>
-                                  </a:rPr>
-                                  <m:t>𝒒</m:t>
-                                </m:r>
-                              </m:oMath>
-                            </m:oMathPara>
-                          </a14:m>
-                          <a:endParaRPr lang="es-CO" sz="2200" b="1" dirty="0">
-                            <a:latin typeface="Roboto" panose="02000000000000000000" pitchFamily="2" charset="0"/>
-                            <a:ea typeface="Roboto" panose="02000000000000000000" pitchFamily="2" charset="0"/>
-                          </a:endParaRPr>
-                        </a:p>
-                      </a:txBody>
-                      <a:tcPr/>
-                    </a:tc>
-                    <a:extLst>
-                      <a:ext uri="{0D108BD9-81ED-4DB2-BD59-A6C34878D82A}">
-                        <a16:rowId xmlns:a16="http://schemas.microsoft.com/office/drawing/2014/main" val="113670299"/>
-                      </a:ext>
-                    </a:extLst>
-                  </a:tr>
-                  <a:tr h="334807">
-                    <a:tc>
-                      <a:txBody>
-                        <a:bodyPr/>
-                        <a:lstStyle/>
-                        <a:p>
-                          <a:pPr marL="0" marR="0" lvl="0" indent="0" algn="l" defTabSz="914400" rtl="0" eaLnBrk="1" fontAlgn="auto" latinLnBrk="0" hangingPunct="1">
-                            <a:lnSpc>
-                              <a:spcPct val="100000"/>
-                            </a:lnSpc>
-                            <a:spcBef>
-                              <a:spcPts val="0"/>
-                            </a:spcBef>
-                            <a:spcAft>
-                              <a:spcPts val="0"/>
-                            </a:spcAft>
-                            <a:buClr>
-                              <a:srgbClr val="000000"/>
-                            </a:buClr>
-                            <a:buSzTx/>
-                            <a:buFont typeface="Arial"/>
-                            <a:buNone/>
-                            <a:tabLst/>
-                            <a:defRPr/>
-                          </a:pPr>
-                          <a14:m xmlns:a14="http://schemas.microsoft.com/office/drawing/2010/main">
-                            <m:oMathPara xmlns:m="http://schemas.openxmlformats.org/officeDocument/2006/math">
-                              <m:oMathParaPr>
-                                <m:jc m:val="centerGroup"/>
-                              </m:oMathParaPr>
-                              <m:oMath xmlns:m="http://schemas.openxmlformats.org/officeDocument/2006/math">
-                                <m:r>
-                                  <a:rPr lang="es-MX" sz="2200" b="0" i="1" smtClean="0">
-                                    <a:latin typeface="Cambria Math" panose="02040503050406030204" pitchFamily="18" charset="0"/>
-                                    <a:ea typeface="Roboto" panose="02000000000000000000" pitchFamily="2" charset="0"/>
-                                  </a:rPr>
-                                  <m:t>𝐹</m:t>
-                                </m:r>
-                              </m:oMath>
-                            </m:oMathPara>
-                          </a14:m>
-                          <a:endParaRPr lang="es-CO" sz="2200" dirty="0">
-                            <a:latin typeface="Roboto" panose="02000000000000000000" pitchFamily="2" charset="0"/>
-                            <a:ea typeface="Roboto" panose="02000000000000000000" pitchFamily="2" charset="0"/>
-                          </a:endParaRPr>
-                        </a:p>
-                      </a:txBody>
-                      <a:tcPr/>
-                    </a:tc>
-                    <a:tc>
-                      <a:txBody>
-                        <a:bodyPr/>
-                        <a:lstStyle/>
-                        <a:p>
-                          <a:pPr marL="0" marR="0" lvl="0" indent="0" algn="l" defTabSz="914400" rtl="0" eaLnBrk="1" fontAlgn="auto" latinLnBrk="0" hangingPunct="1">
-                            <a:lnSpc>
-                              <a:spcPct val="100000"/>
-                            </a:lnSpc>
-                            <a:spcBef>
-                              <a:spcPts val="0"/>
-                            </a:spcBef>
-                            <a:spcAft>
-                              <a:spcPts val="0"/>
-                            </a:spcAft>
-                            <a:buClr>
-                              <a:srgbClr val="000000"/>
-                            </a:buClr>
-                            <a:buSzTx/>
-                            <a:buFont typeface="Arial"/>
-                            <a:buNone/>
-                            <a:tabLst/>
-                            <a:defRPr/>
-                          </a:pPr>
-                          <a14:m xmlns:a14="http://schemas.microsoft.com/office/drawing/2010/main">
-                            <m:oMathPara xmlns:m="http://schemas.openxmlformats.org/officeDocument/2006/math">
-                              <m:oMathParaPr>
-                                <m:jc m:val="centerGroup"/>
-                              </m:oMathParaPr>
-                              <m:oMath xmlns:m="http://schemas.openxmlformats.org/officeDocument/2006/math">
-                                <m:r>
-                                  <a:rPr lang="es-MX" sz="2200" b="0" i="1" smtClean="0">
-                                    <a:latin typeface="Cambria Math" panose="02040503050406030204" pitchFamily="18" charset="0"/>
-                                    <a:ea typeface="Roboto" panose="02000000000000000000" pitchFamily="2" charset="0"/>
-                                  </a:rPr>
-                                  <m:t>𝐹</m:t>
-                                </m:r>
-                              </m:oMath>
-                            </m:oMathPara>
-                          </a14:m>
-                          <a:endParaRPr lang="es-CO" sz="2200" dirty="0">
-                            <a:latin typeface="Roboto" panose="02000000000000000000" pitchFamily="2" charset="0"/>
-                            <a:ea typeface="Roboto" panose="02000000000000000000" pitchFamily="2" charset="0"/>
-                          </a:endParaRPr>
-                        </a:p>
-                      </a:txBody>
-                      <a:tcPr/>
-                    </a:tc>
-                    <a:tc>
-                      <a:txBody>
-                        <a:bodyPr/>
-                        <a:lstStyle/>
-                        <a:p>
-                          <a:pPr marL="0" marR="0" lvl="0" indent="0" algn="l" defTabSz="914400" rtl="0" eaLnBrk="1" fontAlgn="auto" latinLnBrk="0" hangingPunct="1">
-                            <a:lnSpc>
-                              <a:spcPct val="100000"/>
-                            </a:lnSpc>
-                            <a:spcBef>
-                              <a:spcPts val="0"/>
-                            </a:spcBef>
-                            <a:spcAft>
-                              <a:spcPts val="0"/>
-                            </a:spcAft>
-                            <a:buClr>
-                              <a:srgbClr val="000000"/>
-                            </a:buClr>
-                            <a:buSzTx/>
-                            <a:buFont typeface="Arial"/>
-                            <a:buNone/>
-                            <a:tabLst/>
-                            <a:defRPr/>
-                          </a:pPr>
-                          <a14:m xmlns:a14="http://schemas.microsoft.com/office/drawing/2010/main">
-                            <m:oMathPara xmlns:m="http://schemas.openxmlformats.org/officeDocument/2006/math">
-                              <m:oMathParaPr>
-                                <m:jc m:val="centerGroup"/>
-                              </m:oMathParaPr>
-                              <m:oMath xmlns:m="http://schemas.openxmlformats.org/officeDocument/2006/math">
-                                <m:r>
-                                  <a:rPr lang="es-MX" sz="2200" b="0" i="1" smtClean="0">
-                                    <a:latin typeface="Cambria Math" panose="02040503050406030204" pitchFamily="18" charset="0"/>
-                                    <a:ea typeface="Cambria Math" panose="02040503050406030204" pitchFamily="18" charset="0"/>
-                                  </a:rPr>
-                                  <m:t>𝐹</m:t>
-                                </m:r>
-                              </m:oMath>
-                            </m:oMathPara>
-                          </a14:m>
-                          <a:endParaRPr lang="es-CO" sz="2200" dirty="0">
-                            <a:latin typeface="Roboto" panose="02000000000000000000" pitchFamily="2" charset="0"/>
-                            <a:ea typeface="Roboto" panose="02000000000000000000" pitchFamily="2" charset="0"/>
-                          </a:endParaRPr>
-                        </a:p>
-                      </a:txBody>
-                      <a:tcPr/>
-                    </a:tc>
-                    <a:tc>
-                      <a:txBody>
-                        <a:bodyPr/>
-                        <a:lstStyle/>
-                        <a:p>
-                          <a:pPr marL="0" marR="0" lvl="0" indent="0" algn="l" defTabSz="914400" rtl="0" eaLnBrk="1" fontAlgn="auto" latinLnBrk="0" hangingPunct="1">
-                            <a:lnSpc>
-                              <a:spcPct val="100000"/>
-                            </a:lnSpc>
-                            <a:spcBef>
-                              <a:spcPts val="0"/>
-                            </a:spcBef>
-                            <a:spcAft>
-                              <a:spcPts val="0"/>
-                            </a:spcAft>
-                            <a:buClr>
-                              <a:srgbClr val="000000"/>
-                            </a:buClr>
-                            <a:buSzTx/>
-                            <a:buFont typeface="Arial"/>
-                            <a:buNone/>
-                            <a:tabLst/>
-                            <a:defRPr/>
-                          </a:pPr>
-                          <a14:m xmlns:a14="http://schemas.microsoft.com/office/drawing/2010/main">
-                            <m:oMathPara xmlns:m="http://schemas.openxmlformats.org/officeDocument/2006/math">
-                              <m:oMathParaPr>
-                                <m:jc m:val="centerGroup"/>
-                              </m:oMathParaPr>
-                              <m:oMath xmlns:m="http://schemas.openxmlformats.org/officeDocument/2006/math">
-                                <m:r>
-                                  <a:rPr lang="es-MX" sz="2200" b="0" i="1" smtClean="0">
-                                    <a:latin typeface="Cambria Math" panose="02040503050406030204" pitchFamily="18" charset="0"/>
-                                    <a:ea typeface="Cambria Math" panose="02040503050406030204" pitchFamily="18" charset="0"/>
-                                  </a:rPr>
-                                  <m:t>𝐹</m:t>
-                                </m:r>
-                              </m:oMath>
-                            </m:oMathPara>
-                          </a14:m>
-                          <a:endParaRPr lang="es-CO" sz="2200" dirty="0">
-                            <a:latin typeface="Roboto" panose="02000000000000000000" pitchFamily="2" charset="0"/>
-                            <a:ea typeface="Roboto" panose="02000000000000000000" pitchFamily="2" charset="0"/>
-                          </a:endParaRPr>
-                        </a:p>
-                      </a:txBody>
-                      <a:tcPr/>
-                    </a:tc>
-                    <a:tc>
-                      <a:txBody>
-                        <a:bodyPr/>
-                        <a:lstStyle/>
-                        <a:p>
-                          <a:pPr marL="0" marR="0" lvl="0" indent="0" algn="l" defTabSz="914400" rtl="0" eaLnBrk="1" fontAlgn="auto" latinLnBrk="0" hangingPunct="1">
-                            <a:lnSpc>
-                              <a:spcPct val="100000"/>
-                            </a:lnSpc>
-                            <a:spcBef>
-                              <a:spcPts val="0"/>
-                            </a:spcBef>
-                            <a:spcAft>
-                              <a:spcPts val="0"/>
-                            </a:spcAft>
-                            <a:buClr>
-                              <a:srgbClr val="000000"/>
-                            </a:buClr>
-                            <a:buSzTx/>
-                            <a:buFont typeface="Arial"/>
-                            <a:buNone/>
-                            <a:tabLst/>
-                            <a:defRPr/>
-                          </a:pPr>
-                          <a14:m xmlns:a14="http://schemas.microsoft.com/office/drawing/2010/main">
-                            <m:oMathPara xmlns:m="http://schemas.openxmlformats.org/officeDocument/2006/math">
-                              <m:oMathParaPr>
-                                <m:jc m:val="centerGroup"/>
-                              </m:oMathParaPr>
-                              <m:oMath xmlns:m="http://schemas.openxmlformats.org/officeDocument/2006/math">
-                                <m:r>
-                                  <a:rPr lang="es-MX" sz="2200" b="0" i="1" smtClean="0">
-                                    <a:latin typeface="Cambria Math" panose="02040503050406030204" pitchFamily="18" charset="0"/>
-                                    <a:ea typeface="Cambria Math" panose="02040503050406030204" pitchFamily="18" charset="0"/>
-                                  </a:rPr>
-                                  <m:t>𝐹</m:t>
-                                </m:r>
-                              </m:oMath>
-                            </m:oMathPara>
-                          </a14:m>
-                          <a:endParaRPr lang="es-CO" sz="2200" dirty="0">
-                            <a:latin typeface="Roboto" panose="02000000000000000000" pitchFamily="2" charset="0"/>
-                            <a:ea typeface="Roboto" panose="02000000000000000000" pitchFamily="2" charset="0"/>
-                          </a:endParaRPr>
-                        </a:p>
-                      </a:txBody>
-                      <a:tcPr/>
-                    </a:tc>
-                    <a:tc>
-                      <a:txBody>
-                        <a:bodyPr/>
-                        <a:lstStyle/>
-                        <a:p>
-                          <a:pPr marL="0" marR="0" lvl="0" indent="0" algn="l" defTabSz="914400" rtl="0" eaLnBrk="1" fontAlgn="auto" latinLnBrk="0" hangingPunct="1">
-                            <a:lnSpc>
-                              <a:spcPct val="100000"/>
-                            </a:lnSpc>
-                            <a:spcBef>
-                              <a:spcPts val="0"/>
-                            </a:spcBef>
-                            <a:spcAft>
-                              <a:spcPts val="0"/>
-                            </a:spcAft>
-                            <a:buClr>
-                              <a:srgbClr val="000000"/>
-                            </a:buClr>
-                            <a:buSzTx/>
-                            <a:buFont typeface="Arial"/>
-                            <a:buNone/>
-                            <a:tabLst/>
-                            <a:defRPr/>
-                          </a:pPr>
-                          <a14:m xmlns:a14="http://schemas.microsoft.com/office/drawing/2010/main">
-                            <m:oMathPara xmlns:m="http://schemas.openxmlformats.org/officeDocument/2006/math">
-                              <m:oMathParaPr>
-                                <m:jc m:val="centerGroup"/>
-                              </m:oMathParaPr>
-                              <m:oMath xmlns:m="http://schemas.openxmlformats.org/officeDocument/2006/math">
-                                <m:r>
-                                  <a:rPr lang="es-MX" sz="2200" b="0" i="1" smtClean="0">
-                                    <a:latin typeface="Cambria Math" panose="02040503050406030204" pitchFamily="18" charset="0"/>
-                                    <a:ea typeface="Roboto" panose="02000000000000000000" pitchFamily="2" charset="0"/>
-                                  </a:rPr>
-                                  <m:t>𝑉</m:t>
-                                </m:r>
-                              </m:oMath>
-                            </m:oMathPara>
-                          </a14:m>
-                          <a:endParaRPr lang="es-CO" sz="2200" dirty="0">
-                            <a:latin typeface="Roboto" panose="02000000000000000000" pitchFamily="2" charset="0"/>
-                            <a:ea typeface="Roboto" panose="02000000000000000000" pitchFamily="2" charset="0"/>
-                          </a:endParaRPr>
-                        </a:p>
-                      </a:txBody>
-                      <a:tcPr/>
-                    </a:tc>
-                    <a:tc>
-                      <a:txBody>
-                        <a:bodyPr/>
-                        <a:lstStyle/>
-                        <a:p>
-                          <a:pPr marL="0" marR="0" lvl="0" indent="0" algn="l" defTabSz="914400" rtl="0" eaLnBrk="1" fontAlgn="auto" latinLnBrk="0" hangingPunct="1">
-                            <a:lnSpc>
-                              <a:spcPct val="100000"/>
-                            </a:lnSpc>
-                            <a:spcBef>
-                              <a:spcPts val="0"/>
-                            </a:spcBef>
-                            <a:spcAft>
-                              <a:spcPts val="0"/>
-                            </a:spcAft>
-                            <a:buClr>
-                              <a:srgbClr val="000000"/>
-                            </a:buClr>
-                            <a:buSzTx/>
-                            <a:buFont typeface="Arial"/>
-                            <a:buNone/>
-                            <a:tabLst/>
-                            <a:defRPr/>
-                          </a:pPr>
-                          <a14:m xmlns:a14="http://schemas.microsoft.com/office/drawing/2010/main">
-                            <m:oMathPara xmlns:m="http://schemas.openxmlformats.org/officeDocument/2006/math">
-                              <m:oMathParaPr>
-                                <m:jc m:val="centerGroup"/>
-                              </m:oMathParaPr>
-                              <m:oMath xmlns:m="http://schemas.openxmlformats.org/officeDocument/2006/math">
-                                <m:r>
-                                  <a:rPr lang="es-MX" sz="2200" b="0" i="1" smtClean="0">
-                                    <a:latin typeface="Cambria Math" panose="02040503050406030204" pitchFamily="18" charset="0"/>
-                                    <a:ea typeface="Roboto" panose="02000000000000000000" pitchFamily="2" charset="0"/>
-                                  </a:rPr>
-                                  <m:t>𝑉</m:t>
-                                </m:r>
-                              </m:oMath>
-                            </m:oMathPara>
-                          </a14:m>
-                          <a:endParaRPr lang="es-CO" sz="2200" dirty="0">
-                            <a:latin typeface="Roboto" panose="02000000000000000000" pitchFamily="2" charset="0"/>
-                            <a:ea typeface="Roboto" panose="02000000000000000000" pitchFamily="2" charset="0"/>
-                          </a:endParaRPr>
-                        </a:p>
-                      </a:txBody>
-                      <a:tcPr/>
-                    </a:tc>
-                    <a:extLst>
-                      <a:ext uri="{0D108BD9-81ED-4DB2-BD59-A6C34878D82A}">
-                        <a16:rowId xmlns:a16="http://schemas.microsoft.com/office/drawing/2014/main" val="1805549228"/>
-                      </a:ext>
-                    </a:extLst>
-                  </a:tr>
-                  <a:tr h="334807">
-                    <a:tc>
-                      <a:txBody>
-                        <a:bodyPr/>
-                        <a:lstStyle/>
-                        <a:p>
-                          <a:pPr/>
-                          <a14:m xmlns:a14="http://schemas.microsoft.com/office/drawing/2010/main">
-                            <m:oMathPara xmlns:m="http://schemas.openxmlformats.org/officeDocument/2006/math">
-                              <m:oMathParaPr>
-                                <m:jc m:val="centerGroup"/>
-                              </m:oMathParaPr>
-                              <m:oMath xmlns:m="http://schemas.openxmlformats.org/officeDocument/2006/math">
-                                <m:r>
-                                  <a:rPr lang="es-MX" sz="2200" b="0" i="1" smtClean="0">
-                                    <a:latin typeface="Cambria Math" panose="02040503050406030204" pitchFamily="18" charset="0"/>
-                                    <a:ea typeface="Roboto" panose="02000000000000000000" pitchFamily="2" charset="0"/>
-                                  </a:rPr>
-                                  <m:t>𝐹</m:t>
-                                </m:r>
-                              </m:oMath>
-                            </m:oMathPara>
-                          </a14:m>
-                          <a:endParaRPr lang="es-CO" sz="2200" dirty="0">
-                            <a:latin typeface="Roboto" panose="02000000000000000000" pitchFamily="2" charset="0"/>
-                            <a:ea typeface="Roboto" panose="02000000000000000000" pitchFamily="2" charset="0"/>
-                          </a:endParaRPr>
-                        </a:p>
-                      </a:txBody>
-                      <a:tcPr/>
-                    </a:tc>
-                    <a:tc>
-                      <a:txBody>
-                        <a:bodyPr/>
-                        <a:lstStyle/>
-                        <a:p>
-                          <a:pPr/>
-                          <a14:m xmlns:a14="http://schemas.microsoft.com/office/drawing/2010/main">
-                            <m:oMathPara xmlns:m="http://schemas.openxmlformats.org/officeDocument/2006/math">
-                              <m:oMathParaPr>
-                                <m:jc m:val="centerGroup"/>
-                              </m:oMathParaPr>
-                              <m:oMath xmlns:m="http://schemas.openxmlformats.org/officeDocument/2006/math">
-                                <m:r>
-                                  <a:rPr lang="es-MX" sz="2200" b="0" i="1" smtClean="0">
-                                    <a:latin typeface="Cambria Math" panose="02040503050406030204" pitchFamily="18" charset="0"/>
-                                    <a:ea typeface="Roboto" panose="02000000000000000000" pitchFamily="2" charset="0"/>
-                                  </a:rPr>
-                                  <m:t>𝑉</m:t>
-                                </m:r>
-                              </m:oMath>
-                            </m:oMathPara>
-                          </a14:m>
-                          <a:endParaRPr lang="es-CO" sz="2200" dirty="0">
-                            <a:latin typeface="Roboto" panose="02000000000000000000" pitchFamily="2" charset="0"/>
-                            <a:ea typeface="Roboto" panose="02000000000000000000" pitchFamily="2" charset="0"/>
-                          </a:endParaRPr>
-                        </a:p>
-                      </a:txBody>
-                      <a:tcPr/>
-                    </a:tc>
-                    <a:tc>
-                      <a:txBody>
-                        <a:bodyPr/>
-                        <a:lstStyle/>
-                        <a:p>
-                          <a:pPr marL="0" marR="0" lvl="0" indent="0" algn="l" defTabSz="914400" rtl="0" eaLnBrk="1" fontAlgn="auto" latinLnBrk="0" hangingPunct="1">
-                            <a:lnSpc>
-                              <a:spcPct val="100000"/>
-                            </a:lnSpc>
-                            <a:spcBef>
-                              <a:spcPts val="0"/>
-                            </a:spcBef>
-                            <a:spcAft>
-                              <a:spcPts val="0"/>
-                            </a:spcAft>
-                            <a:buClr>
-                              <a:srgbClr val="000000"/>
-                            </a:buClr>
-                            <a:buSzTx/>
-                            <a:buFont typeface="Arial"/>
-                            <a:buNone/>
-                            <a:tabLst/>
-                            <a:defRPr/>
-                          </a:pPr>
-                          <a14:m xmlns:a14="http://schemas.microsoft.com/office/drawing/2010/main">
-                            <m:oMathPara xmlns:m="http://schemas.openxmlformats.org/officeDocument/2006/math">
-                              <m:oMathParaPr>
-                                <m:jc m:val="centerGroup"/>
-                              </m:oMathParaPr>
-                              <m:oMath xmlns:m="http://schemas.openxmlformats.org/officeDocument/2006/math">
-                                <m:r>
-                                  <a:rPr lang="es-MX" sz="2200" b="0" i="1" smtClean="0">
-                                    <a:latin typeface="Cambria Math" panose="02040503050406030204" pitchFamily="18" charset="0"/>
-                                    <a:ea typeface="Cambria Math" panose="02040503050406030204" pitchFamily="18" charset="0"/>
-                                  </a:rPr>
-                                  <m:t>𝐹</m:t>
-                                </m:r>
-                              </m:oMath>
-                            </m:oMathPara>
-                          </a14:m>
-                          <a:endParaRPr lang="es-CO" sz="2200" dirty="0">
-                            <a:latin typeface="Roboto" panose="02000000000000000000" pitchFamily="2" charset="0"/>
-                            <a:ea typeface="Roboto" panose="02000000000000000000" pitchFamily="2" charset="0"/>
-                          </a:endParaRPr>
-                        </a:p>
-                      </a:txBody>
-                      <a:tcPr/>
-                    </a:tc>
-                    <a:tc>
-                      <a:txBody>
-                        <a:bodyPr/>
-                        <a:lstStyle/>
-                        <a:p>
-                          <a:pPr marL="0" marR="0" lvl="0" indent="0" algn="l" defTabSz="914400" rtl="0" eaLnBrk="1" fontAlgn="auto" latinLnBrk="0" hangingPunct="1">
-                            <a:lnSpc>
-                              <a:spcPct val="100000"/>
-                            </a:lnSpc>
-                            <a:spcBef>
-                              <a:spcPts val="0"/>
-                            </a:spcBef>
-                            <a:spcAft>
-                              <a:spcPts val="0"/>
-                            </a:spcAft>
-                            <a:buClr>
-                              <a:srgbClr val="000000"/>
-                            </a:buClr>
-                            <a:buSzTx/>
-                            <a:buFont typeface="Arial"/>
-                            <a:buNone/>
-                            <a:tabLst/>
-                            <a:defRPr/>
-                          </a:pPr>
-                          <a14:m xmlns:a14="http://schemas.microsoft.com/office/drawing/2010/main">
-                            <m:oMathPara xmlns:m="http://schemas.openxmlformats.org/officeDocument/2006/math">
-                              <m:oMathParaPr>
-                                <m:jc m:val="centerGroup"/>
-                              </m:oMathParaPr>
-                              <m:oMath xmlns:m="http://schemas.openxmlformats.org/officeDocument/2006/math">
-                                <m:r>
-                                  <a:rPr lang="es-MX" sz="2200" b="0" i="1" smtClean="0">
-                                    <a:latin typeface="Cambria Math" panose="02040503050406030204" pitchFamily="18" charset="0"/>
-                                    <a:ea typeface="Cambria Math" panose="02040503050406030204" pitchFamily="18" charset="0"/>
-                                  </a:rPr>
-                                  <m:t>𝑉</m:t>
-                                </m:r>
-                              </m:oMath>
-                            </m:oMathPara>
-                          </a14:m>
-                          <a:endParaRPr lang="es-CO" sz="2200" dirty="0">
-                            <a:latin typeface="Roboto" panose="02000000000000000000" pitchFamily="2" charset="0"/>
-                            <a:ea typeface="Roboto" panose="02000000000000000000" pitchFamily="2" charset="0"/>
-                          </a:endParaRPr>
-                        </a:p>
-                      </a:txBody>
-                      <a:tcPr/>
-                    </a:tc>
-                    <a:tc>
-                      <a:txBody>
-                        <a:bodyPr/>
-                        <a:lstStyle/>
-                        <a:p>
-                          <a:pPr marL="0" marR="0" lvl="0" indent="0" algn="l" defTabSz="914400" rtl="0" eaLnBrk="1" fontAlgn="auto" latinLnBrk="0" hangingPunct="1">
-                            <a:lnSpc>
-                              <a:spcPct val="100000"/>
-                            </a:lnSpc>
-                            <a:spcBef>
-                              <a:spcPts val="0"/>
-                            </a:spcBef>
-                            <a:spcAft>
-                              <a:spcPts val="0"/>
-                            </a:spcAft>
-                            <a:buClr>
-                              <a:srgbClr val="000000"/>
-                            </a:buClr>
-                            <a:buSzTx/>
-                            <a:buFont typeface="Arial"/>
-                            <a:buNone/>
-                            <a:tabLst/>
-                            <a:defRPr/>
-                          </a:pPr>
-                          <a14:m xmlns:a14="http://schemas.microsoft.com/office/drawing/2010/main">
-                            <m:oMathPara xmlns:m="http://schemas.openxmlformats.org/officeDocument/2006/math">
-                              <m:oMathParaPr>
-                                <m:jc m:val="centerGroup"/>
-                              </m:oMathParaPr>
-                              <m:oMath xmlns:m="http://schemas.openxmlformats.org/officeDocument/2006/math">
-                                <m:r>
-                                  <a:rPr lang="es-MX" sz="2200" b="0" i="1" smtClean="0">
-                                    <a:latin typeface="Cambria Math" panose="02040503050406030204" pitchFamily="18" charset="0"/>
-                                    <a:ea typeface="Cambria Math" panose="02040503050406030204" pitchFamily="18" charset="0"/>
-                                  </a:rPr>
-                                  <m:t>𝑉</m:t>
-                                </m:r>
-                              </m:oMath>
-                            </m:oMathPara>
-                          </a14:m>
-                          <a:endParaRPr lang="es-CO" sz="2200" dirty="0">
-                            <a:latin typeface="Roboto" panose="02000000000000000000" pitchFamily="2" charset="0"/>
-                            <a:ea typeface="Roboto" panose="02000000000000000000" pitchFamily="2" charset="0"/>
-                          </a:endParaRPr>
-                        </a:p>
-                      </a:txBody>
-                      <a:tcPr/>
-                    </a:tc>
-                    <a:tc>
-                      <a:txBody>
-                        <a:bodyPr/>
-                        <a:lstStyle/>
-                        <a:p>
-                          <a:pPr marL="0" marR="0" lvl="0" indent="0" algn="l" defTabSz="914400" rtl="0" eaLnBrk="1" fontAlgn="auto" latinLnBrk="0" hangingPunct="1">
-                            <a:lnSpc>
-                              <a:spcPct val="100000"/>
-                            </a:lnSpc>
-                            <a:spcBef>
-                              <a:spcPts val="0"/>
-                            </a:spcBef>
-                            <a:spcAft>
-                              <a:spcPts val="0"/>
-                            </a:spcAft>
-                            <a:buClr>
-                              <a:srgbClr val="000000"/>
-                            </a:buClr>
-                            <a:buSzTx/>
-                            <a:buFont typeface="Arial"/>
-                            <a:buNone/>
-                            <a:tabLst/>
-                            <a:defRPr/>
-                          </a:pPr>
-                          <a14:m xmlns:a14="http://schemas.microsoft.com/office/drawing/2010/main">
-                            <m:oMathPara xmlns:m="http://schemas.openxmlformats.org/officeDocument/2006/math">
-                              <m:oMathParaPr>
-                                <m:jc m:val="centerGroup"/>
-                              </m:oMathParaPr>
-                              <m:oMath xmlns:m="http://schemas.openxmlformats.org/officeDocument/2006/math">
-                                <m:r>
-                                  <a:rPr lang="es-MX" sz="2200" b="0" i="1" smtClean="0">
-                                    <a:latin typeface="Cambria Math" panose="02040503050406030204" pitchFamily="18" charset="0"/>
-                                    <a:ea typeface="Cambria Math" panose="02040503050406030204" pitchFamily="18" charset="0"/>
-                                  </a:rPr>
-                                  <m:t>𝑉</m:t>
-                                </m:r>
-                              </m:oMath>
-                            </m:oMathPara>
-                          </a14:m>
-                          <a:endParaRPr lang="es-CO" sz="2200" dirty="0">
-                            <a:latin typeface="Roboto" panose="02000000000000000000" pitchFamily="2" charset="0"/>
-                            <a:ea typeface="Roboto" panose="02000000000000000000" pitchFamily="2" charset="0"/>
-                          </a:endParaRPr>
-                        </a:p>
-                      </a:txBody>
-                      <a:tcPr/>
-                    </a:tc>
-                    <a:tc>
-                      <a:txBody>
-                        <a:bodyPr/>
-                        <a:lstStyle/>
-                        <a:p>
-                          <a:pPr marL="0" marR="0" lvl="0" indent="0" algn="l" defTabSz="914400" rtl="0" eaLnBrk="1" fontAlgn="auto" latinLnBrk="0" hangingPunct="1">
-                            <a:lnSpc>
-                              <a:spcPct val="100000"/>
-                            </a:lnSpc>
-                            <a:spcBef>
-                              <a:spcPts val="0"/>
-                            </a:spcBef>
-                            <a:spcAft>
-                              <a:spcPts val="0"/>
-                            </a:spcAft>
-                            <a:buClr>
-                              <a:srgbClr val="000000"/>
-                            </a:buClr>
-                            <a:buSzTx/>
-                            <a:buFont typeface="Arial"/>
-                            <a:buNone/>
-                            <a:tabLst/>
-                            <a:defRPr/>
-                          </a:pPr>
-                          <a14:m xmlns:a14="http://schemas.microsoft.com/office/drawing/2010/main">
-                            <m:oMathPara xmlns:m="http://schemas.openxmlformats.org/officeDocument/2006/math">
-                              <m:oMathParaPr>
-                                <m:jc m:val="centerGroup"/>
-                              </m:oMathParaPr>
-                              <m:oMath xmlns:m="http://schemas.openxmlformats.org/officeDocument/2006/math">
-                                <m:r>
-                                  <a:rPr lang="es-MX" sz="2200" b="0" i="1" smtClean="0">
-                                    <a:latin typeface="Cambria Math" panose="02040503050406030204" pitchFamily="18" charset="0"/>
-                                    <a:ea typeface="Cambria Math" panose="02040503050406030204" pitchFamily="18" charset="0"/>
-                                  </a:rPr>
-                                  <m:t>𝐹</m:t>
-                                </m:r>
-                              </m:oMath>
-                            </m:oMathPara>
-                          </a14:m>
-                          <a:endParaRPr lang="es-CO" sz="2200" dirty="0">
-                            <a:latin typeface="Roboto" panose="02000000000000000000" pitchFamily="2" charset="0"/>
-                            <a:ea typeface="Roboto" panose="02000000000000000000" pitchFamily="2" charset="0"/>
-                          </a:endParaRPr>
-                        </a:p>
-                      </a:txBody>
-                      <a:tcPr/>
-                    </a:tc>
-                    <a:extLst>
-                      <a:ext uri="{0D108BD9-81ED-4DB2-BD59-A6C34878D82A}">
-                        <a16:rowId xmlns:a16="http://schemas.microsoft.com/office/drawing/2014/main" val="2353127006"/>
-                      </a:ext>
-                    </a:extLst>
-                  </a:tr>
-                  <a:tr h="334807">
-                    <a:tc>
-                      <a:txBody>
-                        <a:bodyPr/>
-                        <a:lstStyle/>
-                        <a:p>
-                          <a:pPr marL="0" marR="0" lvl="0" indent="0" algn="l" defTabSz="914400" rtl="0" eaLnBrk="1" fontAlgn="auto" latinLnBrk="0" hangingPunct="1">
-                            <a:lnSpc>
-                              <a:spcPct val="100000"/>
-                            </a:lnSpc>
-                            <a:spcBef>
-                              <a:spcPts val="0"/>
-                            </a:spcBef>
-                            <a:spcAft>
-                              <a:spcPts val="0"/>
-                            </a:spcAft>
-                            <a:buClr>
-                              <a:srgbClr val="000000"/>
-                            </a:buClr>
-                            <a:buSzTx/>
-                            <a:buFont typeface="Arial"/>
-                            <a:buNone/>
-                            <a:tabLst/>
-                            <a:defRPr/>
-                          </a:pPr>
-                          <a14:m xmlns:a14="http://schemas.microsoft.com/office/drawing/2010/main">
-                            <m:oMathPara xmlns:m="http://schemas.openxmlformats.org/officeDocument/2006/math">
-                              <m:oMathParaPr>
-                                <m:jc m:val="centerGroup"/>
-                              </m:oMathParaPr>
-                              <m:oMath xmlns:m="http://schemas.openxmlformats.org/officeDocument/2006/math">
-                                <m:r>
-                                  <a:rPr lang="es-MX" sz="2200" b="0" i="1" smtClean="0">
-                                    <a:latin typeface="Cambria Math" panose="02040503050406030204" pitchFamily="18" charset="0"/>
-                                    <a:ea typeface="Roboto" panose="02000000000000000000" pitchFamily="2" charset="0"/>
-                                  </a:rPr>
-                                  <m:t>𝑉</m:t>
-                                </m:r>
-                              </m:oMath>
-                            </m:oMathPara>
-                          </a14:m>
-                          <a:endParaRPr lang="es-CO" sz="2200" dirty="0">
-                            <a:latin typeface="Roboto" panose="02000000000000000000" pitchFamily="2" charset="0"/>
-                            <a:ea typeface="Roboto" panose="02000000000000000000" pitchFamily="2" charset="0"/>
-                          </a:endParaRPr>
-                        </a:p>
-                      </a:txBody>
-                      <a:tcPr/>
-                    </a:tc>
-                    <a:tc>
-                      <a:txBody>
-                        <a:bodyPr/>
-                        <a:lstStyle/>
-                        <a:p>
-                          <a:pPr/>
-                          <a14:m xmlns:a14="http://schemas.microsoft.com/office/drawing/2010/main">
-                            <m:oMathPara xmlns:m="http://schemas.openxmlformats.org/officeDocument/2006/math">
-                              <m:oMathParaPr>
-                                <m:jc m:val="centerGroup"/>
-                              </m:oMathParaPr>
-                              <m:oMath xmlns:m="http://schemas.openxmlformats.org/officeDocument/2006/math">
-                                <m:r>
-                                  <a:rPr lang="es-MX" sz="2200" b="0" i="1" smtClean="0">
-                                    <a:latin typeface="Cambria Math" panose="02040503050406030204" pitchFamily="18" charset="0"/>
-                                    <a:ea typeface="Roboto" panose="02000000000000000000" pitchFamily="2" charset="0"/>
-                                  </a:rPr>
-                                  <m:t>𝐹</m:t>
-                                </m:r>
-                              </m:oMath>
-                            </m:oMathPara>
-                          </a14:m>
-                          <a:endParaRPr lang="es-CO" sz="2200" dirty="0">
-                            <a:latin typeface="Roboto" panose="02000000000000000000" pitchFamily="2" charset="0"/>
-                            <a:ea typeface="Roboto" panose="02000000000000000000" pitchFamily="2" charset="0"/>
-                          </a:endParaRPr>
-                        </a:p>
-                      </a:txBody>
-                      <a:tcPr/>
-                    </a:tc>
-                    <a:tc>
-                      <a:txBody>
-                        <a:bodyPr/>
-                        <a:lstStyle/>
-                        <a:p>
-                          <a:pPr marL="0" marR="0" lvl="0" indent="0" algn="l" defTabSz="914400" rtl="0" eaLnBrk="1" fontAlgn="auto" latinLnBrk="0" hangingPunct="1">
-                            <a:lnSpc>
-                              <a:spcPct val="100000"/>
-                            </a:lnSpc>
-                            <a:spcBef>
-                              <a:spcPts val="0"/>
-                            </a:spcBef>
-                            <a:spcAft>
-                              <a:spcPts val="0"/>
-                            </a:spcAft>
-                            <a:buClr>
-                              <a:srgbClr val="000000"/>
-                            </a:buClr>
-                            <a:buSzTx/>
-                            <a:buFont typeface="Arial"/>
-                            <a:buNone/>
-                            <a:tabLst/>
-                            <a:defRPr/>
-                          </a:pPr>
-                          <a14:m xmlns:a14="http://schemas.microsoft.com/office/drawing/2010/main">
-                            <m:oMathPara xmlns:m="http://schemas.openxmlformats.org/officeDocument/2006/math">
-                              <m:oMathParaPr>
-                                <m:jc m:val="centerGroup"/>
-                              </m:oMathParaPr>
-                              <m:oMath xmlns:m="http://schemas.openxmlformats.org/officeDocument/2006/math">
-                                <m:r>
-                                  <a:rPr lang="es-MX" sz="2200" b="0" i="1" smtClean="0">
-                                    <a:latin typeface="Cambria Math" panose="02040503050406030204" pitchFamily="18" charset="0"/>
-                                    <a:ea typeface="Cambria Math" panose="02040503050406030204" pitchFamily="18" charset="0"/>
-                                  </a:rPr>
-                                  <m:t>𝐹</m:t>
-                                </m:r>
-                              </m:oMath>
-                            </m:oMathPara>
-                          </a14:m>
-                          <a:endParaRPr lang="es-CO" sz="2200" dirty="0">
-                            <a:latin typeface="Roboto" panose="02000000000000000000" pitchFamily="2" charset="0"/>
-                            <a:ea typeface="Roboto" panose="02000000000000000000" pitchFamily="2" charset="0"/>
-                          </a:endParaRPr>
-                        </a:p>
-                      </a:txBody>
-                      <a:tcPr/>
-                    </a:tc>
-                    <a:tc>
-                      <a:txBody>
-                        <a:bodyPr/>
-                        <a:lstStyle/>
-                        <a:p>
-                          <a:pPr marL="0" marR="0" lvl="0" indent="0" algn="l" defTabSz="914400" rtl="0" eaLnBrk="1" fontAlgn="auto" latinLnBrk="0" hangingPunct="1">
-                            <a:lnSpc>
-                              <a:spcPct val="100000"/>
-                            </a:lnSpc>
-                            <a:spcBef>
-                              <a:spcPts val="0"/>
-                            </a:spcBef>
-                            <a:spcAft>
-                              <a:spcPts val="0"/>
-                            </a:spcAft>
-                            <a:buClr>
-                              <a:srgbClr val="000000"/>
-                            </a:buClr>
-                            <a:buSzTx/>
-                            <a:buFont typeface="Arial"/>
-                            <a:buNone/>
-                            <a:tabLst/>
-                            <a:defRPr/>
-                          </a:pPr>
-                          <a14:m xmlns:a14="http://schemas.microsoft.com/office/drawing/2010/main">
-                            <m:oMathPara xmlns:m="http://schemas.openxmlformats.org/officeDocument/2006/math">
-                              <m:oMathParaPr>
-                                <m:jc m:val="centerGroup"/>
-                              </m:oMathParaPr>
-                              <m:oMath xmlns:m="http://schemas.openxmlformats.org/officeDocument/2006/math">
-                                <m:r>
-                                  <a:rPr lang="es-MX" sz="2200" b="0" i="1" smtClean="0">
-                                    <a:latin typeface="Cambria Math" panose="02040503050406030204" pitchFamily="18" charset="0"/>
-                                    <a:ea typeface="Cambria Math" panose="02040503050406030204" pitchFamily="18" charset="0"/>
-                                  </a:rPr>
-                                  <m:t>𝑉</m:t>
-                                </m:r>
-                              </m:oMath>
-                            </m:oMathPara>
-                          </a14:m>
-                          <a:endParaRPr lang="es-CO" sz="2200" dirty="0">
-                            <a:latin typeface="Roboto" panose="02000000000000000000" pitchFamily="2" charset="0"/>
-                            <a:ea typeface="Roboto" panose="02000000000000000000" pitchFamily="2" charset="0"/>
-                          </a:endParaRPr>
-                        </a:p>
-                      </a:txBody>
-                      <a:tcPr/>
-                    </a:tc>
-                    <a:tc>
-                      <a:txBody>
-                        <a:bodyPr/>
-                        <a:lstStyle/>
-                        <a:p>
-                          <a:pPr marL="0" marR="0" lvl="0" indent="0" algn="l" defTabSz="914400" rtl="0" eaLnBrk="1" fontAlgn="auto" latinLnBrk="0" hangingPunct="1">
-                            <a:lnSpc>
-                              <a:spcPct val="100000"/>
-                            </a:lnSpc>
-                            <a:spcBef>
-                              <a:spcPts val="0"/>
-                            </a:spcBef>
-                            <a:spcAft>
-                              <a:spcPts val="0"/>
-                            </a:spcAft>
-                            <a:buClr>
-                              <a:srgbClr val="000000"/>
-                            </a:buClr>
-                            <a:buSzTx/>
-                            <a:buFont typeface="Arial"/>
-                            <a:buNone/>
-                            <a:tabLst/>
-                            <a:defRPr/>
-                          </a:pPr>
-                          <a14:m xmlns:a14="http://schemas.microsoft.com/office/drawing/2010/main">
-                            <m:oMathPara xmlns:m="http://schemas.openxmlformats.org/officeDocument/2006/math">
-                              <m:oMathParaPr>
-                                <m:jc m:val="centerGroup"/>
-                              </m:oMathParaPr>
-                              <m:oMath xmlns:m="http://schemas.openxmlformats.org/officeDocument/2006/math">
-                                <m:r>
-                                  <a:rPr lang="es-MX" sz="2200" b="0" i="1" smtClean="0">
-                                    <a:latin typeface="Cambria Math" panose="02040503050406030204" pitchFamily="18" charset="0"/>
-                                    <a:ea typeface="Cambria Math" panose="02040503050406030204" pitchFamily="18" charset="0"/>
-                                  </a:rPr>
-                                  <m:t>𝑉</m:t>
-                                </m:r>
-                              </m:oMath>
-                            </m:oMathPara>
-                          </a14:m>
-                          <a:endParaRPr lang="es-CO" sz="2200" dirty="0">
-                            <a:latin typeface="Roboto" panose="02000000000000000000" pitchFamily="2" charset="0"/>
-                            <a:ea typeface="Roboto" panose="02000000000000000000" pitchFamily="2" charset="0"/>
-                          </a:endParaRPr>
-                        </a:p>
-                      </a:txBody>
-                      <a:tcPr/>
-                    </a:tc>
-                    <a:tc>
-                      <a:txBody>
-                        <a:bodyPr/>
-                        <a:lstStyle/>
-                        <a:p>
-                          <a:pPr marL="0" marR="0" lvl="0" indent="0" algn="l" defTabSz="914400" rtl="0" eaLnBrk="1" fontAlgn="auto" latinLnBrk="0" hangingPunct="1">
-                            <a:lnSpc>
-                              <a:spcPct val="100000"/>
-                            </a:lnSpc>
-                            <a:spcBef>
-                              <a:spcPts val="0"/>
-                            </a:spcBef>
-                            <a:spcAft>
-                              <a:spcPts val="0"/>
-                            </a:spcAft>
-                            <a:buClr>
-                              <a:srgbClr val="000000"/>
-                            </a:buClr>
-                            <a:buSzTx/>
-                            <a:buFont typeface="Arial"/>
-                            <a:buNone/>
-                            <a:tabLst/>
-                            <a:defRPr/>
-                          </a:pPr>
-                          <a14:m xmlns:a14="http://schemas.microsoft.com/office/drawing/2010/main">
-                            <m:oMathPara xmlns:m="http://schemas.openxmlformats.org/officeDocument/2006/math">
-                              <m:oMathParaPr>
-                                <m:jc m:val="centerGroup"/>
-                              </m:oMathParaPr>
-                              <m:oMath xmlns:m="http://schemas.openxmlformats.org/officeDocument/2006/math">
-                                <m:r>
-                                  <a:rPr lang="es-MX" sz="2200" b="0" i="1" smtClean="0">
-                                    <a:latin typeface="Cambria Math" panose="02040503050406030204" pitchFamily="18" charset="0"/>
-                                    <a:ea typeface="Roboto" panose="02000000000000000000" pitchFamily="2" charset="0"/>
-                                  </a:rPr>
-                                  <m:t>𝐹</m:t>
-                                </m:r>
-                              </m:oMath>
-                            </m:oMathPara>
-                          </a14:m>
-                          <a:endParaRPr lang="es-CO" sz="2200" dirty="0">
-                            <a:latin typeface="Roboto" panose="02000000000000000000" pitchFamily="2" charset="0"/>
-                            <a:ea typeface="Roboto" panose="02000000000000000000" pitchFamily="2" charset="0"/>
-                          </a:endParaRPr>
-                        </a:p>
-                      </a:txBody>
-                      <a:tcPr/>
-                    </a:tc>
-                    <a:tc>
-                      <a:txBody>
-                        <a:bodyPr/>
-                        <a:lstStyle/>
-                        <a:p>
-                          <a:pPr marL="0" marR="0" lvl="0" indent="0" algn="l" defTabSz="914400" rtl="0" eaLnBrk="1" fontAlgn="auto" latinLnBrk="0" hangingPunct="1">
-                            <a:lnSpc>
-                              <a:spcPct val="100000"/>
-                            </a:lnSpc>
-                            <a:spcBef>
-                              <a:spcPts val="0"/>
-                            </a:spcBef>
-                            <a:spcAft>
-                              <a:spcPts val="0"/>
-                            </a:spcAft>
-                            <a:buClr>
-                              <a:srgbClr val="000000"/>
-                            </a:buClr>
-                            <a:buSzTx/>
-                            <a:buFont typeface="Arial"/>
-                            <a:buNone/>
-                            <a:tabLst/>
-                            <a:defRPr/>
-                          </a:pPr>
-                          <a14:m xmlns:a14="http://schemas.microsoft.com/office/drawing/2010/main">
-                            <m:oMathPara xmlns:m="http://schemas.openxmlformats.org/officeDocument/2006/math">
-                              <m:oMathParaPr>
-                                <m:jc m:val="centerGroup"/>
-                              </m:oMathParaPr>
-                              <m:oMath xmlns:m="http://schemas.openxmlformats.org/officeDocument/2006/math">
-                                <m:r>
-                                  <a:rPr lang="es-MX" sz="2200" b="0" i="1" smtClean="0">
-                                    <a:latin typeface="Cambria Math" panose="02040503050406030204" pitchFamily="18" charset="0"/>
-                                    <a:ea typeface="Roboto" panose="02000000000000000000" pitchFamily="2" charset="0"/>
-                                  </a:rPr>
-                                  <m:t>𝐹</m:t>
-                                </m:r>
-                              </m:oMath>
-                            </m:oMathPara>
-                          </a14:m>
-                          <a:endParaRPr lang="es-CO" sz="2200" dirty="0">
-                            <a:latin typeface="Roboto" panose="02000000000000000000" pitchFamily="2" charset="0"/>
-                            <a:ea typeface="Roboto" panose="02000000000000000000" pitchFamily="2" charset="0"/>
-                          </a:endParaRPr>
-                        </a:p>
-                      </a:txBody>
-                      <a:tcPr/>
-                    </a:tc>
-                    <a:extLst>
-                      <a:ext uri="{0D108BD9-81ED-4DB2-BD59-A6C34878D82A}">
-                        <a16:rowId xmlns:a16="http://schemas.microsoft.com/office/drawing/2014/main" val="4184868107"/>
-                      </a:ext>
-                    </a:extLst>
-                  </a:tr>
-                  <a:tr h="334807">
-                    <a:tc>
-                      <a:txBody>
-                        <a:bodyPr/>
-                        <a:lstStyle/>
-                        <a:p>
-                          <a:pPr marL="0" marR="0" lvl="0" indent="0" algn="l" defTabSz="914400" rtl="0" eaLnBrk="1" fontAlgn="auto" latinLnBrk="0" hangingPunct="1">
-                            <a:lnSpc>
-                              <a:spcPct val="100000"/>
-                            </a:lnSpc>
-                            <a:spcBef>
-                              <a:spcPts val="0"/>
-                            </a:spcBef>
-                            <a:spcAft>
-                              <a:spcPts val="0"/>
-                            </a:spcAft>
-                            <a:buClr>
-                              <a:srgbClr val="000000"/>
-                            </a:buClr>
-                            <a:buSzTx/>
-                            <a:buFont typeface="Arial"/>
-                            <a:buNone/>
-                            <a:tabLst/>
-                            <a:defRPr/>
-                          </a:pPr>
-                          <a14:m xmlns:a14="http://schemas.microsoft.com/office/drawing/2010/main">
-                            <m:oMathPara xmlns:m="http://schemas.openxmlformats.org/officeDocument/2006/math">
-                              <m:oMathParaPr>
-                                <m:jc m:val="centerGroup"/>
-                              </m:oMathParaPr>
-                              <m:oMath xmlns:m="http://schemas.openxmlformats.org/officeDocument/2006/math">
-                                <m:r>
-                                  <a:rPr lang="es-MX" sz="2200" b="0" i="1" smtClean="0">
-                                    <a:latin typeface="Cambria Math" panose="02040503050406030204" pitchFamily="18" charset="0"/>
-                                    <a:ea typeface="Roboto" panose="02000000000000000000" pitchFamily="2" charset="0"/>
-                                  </a:rPr>
-                                  <m:t>𝑉</m:t>
-                                </m:r>
-                              </m:oMath>
-                            </m:oMathPara>
-                          </a14:m>
-                          <a:endParaRPr lang="es-CO" sz="2200" dirty="0">
-                            <a:latin typeface="Roboto" panose="02000000000000000000" pitchFamily="2" charset="0"/>
-                            <a:ea typeface="Roboto" panose="02000000000000000000" pitchFamily="2" charset="0"/>
-                          </a:endParaRPr>
-                        </a:p>
-                      </a:txBody>
-                      <a:tcPr/>
-                    </a:tc>
-                    <a:tc>
-                      <a:txBody>
-                        <a:bodyPr/>
-                        <a:lstStyle/>
-                        <a:p>
-                          <a:pPr marL="0" marR="0" lvl="0" indent="0" algn="l" defTabSz="914400" rtl="0" eaLnBrk="1" fontAlgn="auto" latinLnBrk="0" hangingPunct="1">
-                            <a:lnSpc>
-                              <a:spcPct val="100000"/>
-                            </a:lnSpc>
-                            <a:spcBef>
-                              <a:spcPts val="0"/>
-                            </a:spcBef>
-                            <a:spcAft>
-                              <a:spcPts val="0"/>
-                            </a:spcAft>
-                            <a:buClr>
-                              <a:srgbClr val="000000"/>
-                            </a:buClr>
-                            <a:buSzTx/>
-                            <a:buFont typeface="Arial"/>
-                            <a:buNone/>
-                            <a:tabLst/>
-                            <a:defRPr/>
-                          </a:pPr>
-                          <a14:m xmlns:a14="http://schemas.microsoft.com/office/drawing/2010/main">
-                            <m:oMathPara xmlns:m="http://schemas.openxmlformats.org/officeDocument/2006/math">
-                              <m:oMathParaPr>
-                                <m:jc m:val="centerGroup"/>
-                              </m:oMathParaPr>
-                              <m:oMath xmlns:m="http://schemas.openxmlformats.org/officeDocument/2006/math">
-                                <m:r>
-                                  <a:rPr lang="es-MX" sz="2200" b="0" i="1" smtClean="0">
-                                    <a:latin typeface="Cambria Math" panose="02040503050406030204" pitchFamily="18" charset="0"/>
-                                    <a:ea typeface="Roboto" panose="02000000000000000000" pitchFamily="2" charset="0"/>
-                                  </a:rPr>
-                                  <m:t>𝑉</m:t>
-                                </m:r>
-                              </m:oMath>
-                            </m:oMathPara>
-                          </a14:m>
-                          <a:endParaRPr lang="es-CO" sz="2200" dirty="0">
-                            <a:latin typeface="Roboto" panose="02000000000000000000" pitchFamily="2" charset="0"/>
-                            <a:ea typeface="Roboto" panose="02000000000000000000" pitchFamily="2" charset="0"/>
-                          </a:endParaRPr>
-                        </a:p>
-                      </a:txBody>
-                      <a:tcPr/>
-                    </a:tc>
-                    <a:tc>
-                      <a:txBody>
-                        <a:bodyPr/>
-                        <a:lstStyle/>
-                        <a:p>
-                          <a:pPr marL="0" marR="0" lvl="0" indent="0" algn="l" defTabSz="914400" rtl="0" eaLnBrk="1" fontAlgn="auto" latinLnBrk="0" hangingPunct="1">
-                            <a:lnSpc>
-                              <a:spcPct val="100000"/>
-                            </a:lnSpc>
-                            <a:spcBef>
-                              <a:spcPts val="0"/>
-                            </a:spcBef>
-                            <a:spcAft>
-                              <a:spcPts val="0"/>
-                            </a:spcAft>
-                            <a:buClr>
-                              <a:srgbClr val="000000"/>
-                            </a:buClr>
-                            <a:buSzTx/>
-                            <a:buFont typeface="Arial"/>
-                            <a:buNone/>
-                            <a:tabLst/>
-                            <a:defRPr/>
-                          </a:pPr>
-                          <a14:m xmlns:a14="http://schemas.microsoft.com/office/drawing/2010/main">
-                            <m:oMathPara xmlns:m="http://schemas.openxmlformats.org/officeDocument/2006/math">
-                              <m:oMathParaPr>
-                                <m:jc m:val="centerGroup"/>
-                              </m:oMathParaPr>
-                              <m:oMath xmlns:m="http://schemas.openxmlformats.org/officeDocument/2006/math">
-                                <m:r>
-                                  <a:rPr lang="es-MX" sz="2200" b="0" i="1" smtClean="0">
-                                    <a:latin typeface="Cambria Math" panose="02040503050406030204" pitchFamily="18" charset="0"/>
-                                    <a:ea typeface="Roboto" panose="02000000000000000000" pitchFamily="2" charset="0"/>
-                                  </a:rPr>
-                                  <m:t>𝑉</m:t>
-                                </m:r>
-                              </m:oMath>
-                            </m:oMathPara>
-                          </a14:m>
-                          <a:endParaRPr lang="es-CO" sz="2200" dirty="0">
-                            <a:latin typeface="Roboto" panose="02000000000000000000" pitchFamily="2" charset="0"/>
-                            <a:ea typeface="Roboto" panose="02000000000000000000" pitchFamily="2" charset="0"/>
-                          </a:endParaRPr>
-                        </a:p>
-                      </a:txBody>
-                      <a:tcPr/>
-                    </a:tc>
-                    <a:tc>
-                      <a:txBody>
-                        <a:bodyPr/>
-                        <a:lstStyle/>
-                        <a:p>
-                          <a:pPr marL="0" marR="0" lvl="0" indent="0" algn="l" defTabSz="914400" rtl="0" eaLnBrk="1" fontAlgn="auto" latinLnBrk="0" hangingPunct="1">
-                            <a:lnSpc>
-                              <a:spcPct val="100000"/>
-                            </a:lnSpc>
-                            <a:spcBef>
-                              <a:spcPts val="0"/>
-                            </a:spcBef>
-                            <a:spcAft>
-                              <a:spcPts val="0"/>
-                            </a:spcAft>
-                            <a:buClr>
-                              <a:srgbClr val="000000"/>
-                            </a:buClr>
-                            <a:buSzTx/>
-                            <a:buFont typeface="Arial"/>
-                            <a:buNone/>
-                            <a:tabLst/>
-                            <a:defRPr/>
-                          </a:pPr>
-                          <a14:m xmlns:a14="http://schemas.microsoft.com/office/drawing/2010/main">
-                            <m:oMathPara xmlns:m="http://schemas.openxmlformats.org/officeDocument/2006/math">
-                              <m:oMathParaPr>
-                                <m:jc m:val="centerGroup"/>
-                              </m:oMathParaPr>
-                              <m:oMath xmlns:m="http://schemas.openxmlformats.org/officeDocument/2006/math">
-                                <m:r>
-                                  <a:rPr lang="es-MX" sz="2200" b="0" i="1" smtClean="0">
-                                    <a:latin typeface="Cambria Math" panose="02040503050406030204" pitchFamily="18" charset="0"/>
-                                    <a:ea typeface="Roboto" panose="02000000000000000000" pitchFamily="2" charset="0"/>
-                                  </a:rPr>
-                                  <m:t>𝑉</m:t>
-                                </m:r>
-                              </m:oMath>
-                            </m:oMathPara>
-                          </a14:m>
-                          <a:endParaRPr lang="es-CO" sz="2200" dirty="0">
-                            <a:latin typeface="Roboto" panose="02000000000000000000" pitchFamily="2" charset="0"/>
-                            <a:ea typeface="Roboto" panose="02000000000000000000" pitchFamily="2" charset="0"/>
-                          </a:endParaRPr>
-                        </a:p>
-                      </a:txBody>
-                      <a:tcPr/>
-                    </a:tc>
-                    <a:tc>
-                      <a:txBody>
-                        <a:bodyPr/>
-                        <a:lstStyle/>
-                        <a:p>
-                          <a:pPr marL="0" marR="0" lvl="0" indent="0" algn="l" defTabSz="914400" rtl="0" eaLnBrk="1" fontAlgn="auto" latinLnBrk="0" hangingPunct="1">
-                            <a:lnSpc>
-                              <a:spcPct val="100000"/>
-                            </a:lnSpc>
-                            <a:spcBef>
-                              <a:spcPts val="0"/>
-                            </a:spcBef>
-                            <a:spcAft>
-                              <a:spcPts val="0"/>
-                            </a:spcAft>
-                            <a:buClr>
-                              <a:srgbClr val="000000"/>
-                            </a:buClr>
-                            <a:buSzTx/>
-                            <a:buFont typeface="Arial"/>
-                            <a:buNone/>
-                            <a:tabLst/>
-                            <a:defRPr/>
-                          </a:pPr>
-                          <a14:m xmlns:a14="http://schemas.microsoft.com/office/drawing/2010/main">
-                            <m:oMathPara xmlns:m="http://schemas.openxmlformats.org/officeDocument/2006/math">
-                              <m:oMathParaPr>
-                                <m:jc m:val="centerGroup"/>
-                              </m:oMathParaPr>
-                              <m:oMath xmlns:m="http://schemas.openxmlformats.org/officeDocument/2006/math">
-                                <m:r>
-                                  <a:rPr lang="es-MX" sz="2200" b="0" i="1" smtClean="0">
-                                    <a:latin typeface="Cambria Math" panose="02040503050406030204" pitchFamily="18" charset="0"/>
-                                    <a:ea typeface="Roboto" panose="02000000000000000000" pitchFamily="2" charset="0"/>
-                                  </a:rPr>
-                                  <m:t>𝐹</m:t>
-                                </m:r>
-                              </m:oMath>
-                            </m:oMathPara>
-                          </a14:m>
-                          <a:endParaRPr lang="es-CO" sz="2200" dirty="0">
-                            <a:latin typeface="Roboto" panose="02000000000000000000" pitchFamily="2" charset="0"/>
-                            <a:ea typeface="Roboto" panose="02000000000000000000" pitchFamily="2" charset="0"/>
-                          </a:endParaRPr>
-                        </a:p>
-                      </a:txBody>
-                      <a:tcPr/>
-                    </a:tc>
-                    <a:tc>
-                      <a:txBody>
-                        <a:bodyPr/>
-                        <a:lstStyle/>
-                        <a:p>
-                          <a:pPr marL="0" marR="0" lvl="0" indent="0" algn="l" defTabSz="914400" rtl="0" eaLnBrk="1" fontAlgn="auto" latinLnBrk="0" hangingPunct="1">
-                            <a:lnSpc>
-                              <a:spcPct val="100000"/>
-                            </a:lnSpc>
-                            <a:spcBef>
-                              <a:spcPts val="0"/>
-                            </a:spcBef>
-                            <a:spcAft>
-                              <a:spcPts val="0"/>
-                            </a:spcAft>
-                            <a:buClr>
-                              <a:srgbClr val="000000"/>
-                            </a:buClr>
-                            <a:buSzTx/>
-                            <a:buFont typeface="Arial"/>
-                            <a:buNone/>
-                            <a:tabLst/>
-                            <a:defRPr/>
-                          </a:pPr>
-                          <a14:m xmlns:a14="http://schemas.microsoft.com/office/drawing/2010/main">
-                            <m:oMathPara xmlns:m="http://schemas.openxmlformats.org/officeDocument/2006/math">
-                              <m:oMathParaPr>
-                                <m:jc m:val="centerGroup"/>
-                              </m:oMathParaPr>
-                              <m:oMath xmlns:m="http://schemas.openxmlformats.org/officeDocument/2006/math">
-                                <m:r>
-                                  <a:rPr lang="es-MX" sz="2200" b="0" i="1" smtClean="0">
-                                    <a:latin typeface="Cambria Math" panose="02040503050406030204" pitchFamily="18" charset="0"/>
-                                    <a:ea typeface="Roboto" panose="02000000000000000000" pitchFamily="2" charset="0"/>
-                                  </a:rPr>
-                                  <m:t>𝑉</m:t>
-                                </m:r>
-                              </m:oMath>
-                            </m:oMathPara>
-                          </a14:m>
-                          <a:endParaRPr lang="es-CO" sz="2200" dirty="0">
-                            <a:latin typeface="Roboto" panose="02000000000000000000" pitchFamily="2" charset="0"/>
-                            <a:ea typeface="Roboto" panose="02000000000000000000" pitchFamily="2" charset="0"/>
-                          </a:endParaRPr>
-                        </a:p>
-                      </a:txBody>
-                      <a:tcPr/>
-                    </a:tc>
-                    <a:tc>
-                      <a:txBody>
-                        <a:bodyPr/>
-                        <a:lstStyle/>
-                        <a:p>
-                          <a:pPr marL="0" marR="0" lvl="0" indent="0" algn="l" defTabSz="914400" rtl="0" eaLnBrk="1" fontAlgn="auto" latinLnBrk="0" hangingPunct="1">
-                            <a:lnSpc>
-                              <a:spcPct val="100000"/>
-                            </a:lnSpc>
-                            <a:spcBef>
-                              <a:spcPts val="0"/>
-                            </a:spcBef>
-                            <a:spcAft>
-                              <a:spcPts val="0"/>
-                            </a:spcAft>
-                            <a:buClr>
-                              <a:srgbClr val="000000"/>
-                            </a:buClr>
-                            <a:buSzTx/>
-                            <a:buFont typeface="Arial"/>
-                            <a:buNone/>
-                            <a:tabLst/>
-                            <a:defRPr/>
-                          </a:pPr>
-                          <a14:m xmlns:a14="http://schemas.microsoft.com/office/drawing/2010/main">
-                            <m:oMathPara xmlns:m="http://schemas.openxmlformats.org/officeDocument/2006/math">
-                              <m:oMathParaPr>
-                                <m:jc m:val="centerGroup"/>
-                              </m:oMathParaPr>
-                              <m:oMath xmlns:m="http://schemas.openxmlformats.org/officeDocument/2006/math">
-                                <m:r>
-                                  <a:rPr lang="es-MX" sz="2200" b="0" i="1" smtClean="0">
-                                    <a:latin typeface="Cambria Math" panose="02040503050406030204" pitchFamily="18" charset="0"/>
-                                    <a:ea typeface="Roboto" panose="02000000000000000000" pitchFamily="2" charset="0"/>
-                                  </a:rPr>
-                                  <m:t>𝑉</m:t>
-                                </m:r>
-                              </m:oMath>
-                            </m:oMathPara>
-                          </a14:m>
-                          <a:endParaRPr lang="es-CO" sz="2200" dirty="0">
-                            <a:latin typeface="Roboto" panose="02000000000000000000" pitchFamily="2" charset="0"/>
-                            <a:ea typeface="Roboto" panose="02000000000000000000" pitchFamily="2" charset="0"/>
-                          </a:endParaRPr>
-                        </a:p>
-                      </a:txBody>
-                      <a:tcPr/>
-                    </a:tc>
-                    <a:extLst>
-                      <a:ext uri="{0D108BD9-81ED-4DB2-BD59-A6C34878D82A}">
-                        <a16:rowId xmlns:a16="http://schemas.microsoft.com/office/drawing/2014/main" val="889136403"/>
-                      </a:ext>
-                    </a:extLst>
-                  </a:tr>
-                </a:tbl>
-              </a:graphicData>
-            </a:graphic>
-          </p:graphicFrame>
-        </mc:Fallback>
-      </mc:AlternateContent>
-    </p:spTree>
-    <p:extLst>
-      <p:ext uri="{BB962C8B-B14F-4D97-AF65-F5344CB8AC3E}">
-        <p14:creationId xmlns:p14="http://schemas.microsoft.com/office/powerpoint/2010/main" val="3681733011"/>
-      </p:ext>
-    </p:extLst>
-  </p:cSld>
-  <p:clrMapOvr>
-    <a:masterClrMapping/>
-  </p:clrMapOvr>
-</p:sld>
-</file>
-
-<file path=ppt/slides/slide33.xml><?xml version="1.0" encoding="utf-8"?>
-<p:sld xmlns:a="http://schemas.openxmlformats.org/drawingml/2006/main" xmlns:r="http://schemas.openxmlformats.org/officeDocument/2006/relationships" xmlns:p="http://schemas.openxmlformats.org/presentationml/2006/main">
-  <p:cSld>
-    <p:spTree>
-      <p:nvGrpSpPr>
-        <p:cNvPr id="1" name=""/>
-        <p:cNvGrpSpPr/>
-        <p:nvPr/>
-      </p:nvGrpSpPr>
-      <p:grpSpPr>
-        <a:xfrm>
-          <a:off x="0" y="0"/>
-          <a:ext cx="0" cy="0"/>
-          <a:chOff x="0" y="0"/>
-          <a:chExt cx="0" cy="0"/>
-        </a:xfrm>
-      </p:grpSpPr>
-      <p:sp>
-        <p:nvSpPr>
-          <p:cNvPr id="2" name="Título 1">
-            <a:extLst>
-              <a:ext uri="{FF2B5EF4-FFF2-40B4-BE49-F238E27FC236}">
-                <a16:creationId xmlns:a16="http://schemas.microsoft.com/office/drawing/2014/main" id="{363AF66F-7D38-4DEC-A157-5A496140F1BF}"/>
-              </a:ext>
-            </a:extLst>
-          </p:cNvPr>
-          <p:cNvSpPr>
-            <a:spLocks noGrp="1"/>
-          </p:cNvSpPr>
-          <p:nvPr>
-            <p:ph type="title"/>
-          </p:nvPr>
-        </p:nvSpPr>
-        <p:spPr>
-          <a:xfrm>
-            <a:off x="838199" y="226580"/>
-            <a:ext cx="10515600" cy="1325563"/>
-          </a:xfrm>
-        </p:spPr>
-        <p:txBody>
-          <a:bodyPr/>
-          <a:lstStyle/>
-          <a:p>
-            <a:r>
-              <a:rPr lang="es-CO" dirty="0"/>
-              <a:t>Tablas de verdad</a:t>
-            </a:r>
-          </a:p>
-        </p:txBody>
-      </p:sp>
-      <p:sp>
-        <p:nvSpPr>
-          <p:cNvPr id="3" name="Marcador de contenido 2">
-            <a:extLst>
-              <a:ext uri="{FF2B5EF4-FFF2-40B4-BE49-F238E27FC236}">
-                <a16:creationId xmlns:a16="http://schemas.microsoft.com/office/drawing/2014/main" id="{8C611C1C-AB20-4127-87E3-88401D8503D0}"/>
-              </a:ext>
-            </a:extLst>
-          </p:cNvPr>
-          <p:cNvSpPr>
-            <a:spLocks noGrp="1"/>
-          </p:cNvSpPr>
-          <p:nvPr>
-            <p:ph idx="1"/>
-          </p:nvPr>
-        </p:nvSpPr>
-        <p:spPr>
-          <a:xfrm>
-            <a:off x="360218" y="1375235"/>
-            <a:ext cx="11471563" cy="3072074"/>
-          </a:xfrm>
-        </p:spPr>
-        <p:txBody>
-          <a:bodyPr>
-            <a:normAutofit/>
-          </a:bodyPr>
-          <a:lstStyle/>
-          <a:p>
-            <a:pPr marL="0" indent="0">
-              <a:buNone/>
-            </a:pPr>
-            <a:r>
-              <a:rPr lang="es-MX" b="1" dirty="0">
-                <a:solidFill>
-                  <a:schemeClr val="accent2"/>
-                </a:solidFill>
-              </a:rPr>
-              <a:t>Pasos</a:t>
-            </a:r>
-            <a:r>
-              <a:rPr lang="es-MX" dirty="0">
-                <a:solidFill>
-                  <a:schemeClr val="accent2"/>
-                </a:solidFill>
-              </a:rPr>
-              <a:t> </a:t>
-            </a:r>
-          </a:p>
-          <a:p>
-            <a:pPr marL="457200" indent="-457200">
-              <a:buFont typeface="+mj-lt"/>
-              <a:buAutoNum type="arabicPeriod"/>
-            </a:pPr>
-            <a:r>
-              <a:rPr lang="es-MX" sz="2000" dirty="0">
-                <a:solidFill>
-                  <a:srgbClr val="131314"/>
-                </a:solidFill>
-              </a:rPr>
-              <a:t>Identificar las variables proposicionales.</a:t>
-            </a:r>
-          </a:p>
-          <a:p>
-            <a:pPr marL="457200" indent="-457200">
-              <a:buFont typeface="+mj-lt"/>
-              <a:buAutoNum type="arabicPeriod"/>
-            </a:pPr>
-            <a:r>
-              <a:rPr lang="es-MX" sz="2000" dirty="0">
-                <a:solidFill>
-                  <a:srgbClr val="131314"/>
-                </a:solidFill>
-              </a:rPr>
-              <a:t>Determinar el número de filas necesarias </a:t>
-            </a:r>
-          </a:p>
-          <a:p>
-            <a:pPr marL="457200" indent="-457200">
-              <a:buFont typeface="+mj-lt"/>
-              <a:buAutoNum type="arabicPeriod"/>
-            </a:pPr>
-            <a:r>
-              <a:rPr lang="es-MX" sz="2000" b="0" i="0" dirty="0">
-                <a:solidFill>
-                  <a:srgbClr val="131314"/>
-                </a:solidFill>
-                <a:effectLst/>
-              </a:rPr>
-              <a:t>Construir las columnas de las variables </a:t>
-            </a:r>
-          </a:p>
-          <a:p>
-            <a:pPr marL="457200" indent="-457200">
-              <a:buFont typeface="+mj-lt"/>
-              <a:buAutoNum type="arabicPeriod"/>
-            </a:pPr>
-            <a:r>
-              <a:rPr lang="es-MX" sz="2000" b="0" i="0" dirty="0">
-                <a:solidFill>
-                  <a:srgbClr val="131314"/>
-                </a:solidFill>
-                <a:effectLst/>
-              </a:rPr>
-              <a:t>Agregar columnas auxiliares</a:t>
-            </a:r>
-          </a:p>
-          <a:p>
-            <a:pPr marL="457200" indent="-457200">
-              <a:buFont typeface="+mj-lt"/>
-              <a:buAutoNum type="arabicPeriod"/>
-            </a:pPr>
-            <a:r>
-              <a:rPr lang="es-MX" sz="2000" b="0" i="0" dirty="0">
-                <a:solidFill>
-                  <a:srgbClr val="131314"/>
-                </a:solidFill>
-                <a:effectLst/>
-              </a:rPr>
-              <a:t>Evaluar la expresión lógica paso a paso</a:t>
-            </a:r>
-          </a:p>
-          <a:p>
-            <a:pPr marL="457200" indent="-457200">
-              <a:buFont typeface="+mj-lt"/>
-              <a:buAutoNum type="arabicPeriod"/>
-            </a:pPr>
-            <a:r>
-              <a:rPr lang="es-MX" sz="2000" b="0" i="0" dirty="0">
-                <a:solidFill>
-                  <a:srgbClr val="131314"/>
-                </a:solidFill>
-                <a:effectLst/>
-              </a:rPr>
-              <a:t>Revisar y validar la tabla</a:t>
-            </a:r>
-          </a:p>
-          <a:p>
-            <a:pPr marL="0" indent="0">
-              <a:buNone/>
-            </a:pPr>
-            <a:endParaRPr lang="es-MX" dirty="0"/>
-          </a:p>
-        </p:txBody>
-      </p:sp>
-      <p:sp>
-        <p:nvSpPr>
-          <p:cNvPr id="6" name="CuadroTexto 5">
-            <a:extLst>
-              <a:ext uri="{FF2B5EF4-FFF2-40B4-BE49-F238E27FC236}">
-                <a16:creationId xmlns:a16="http://schemas.microsoft.com/office/drawing/2014/main" id="{B30BA250-E803-4847-BACF-C2EA1E6FD9D4}"/>
-              </a:ext>
-            </a:extLst>
-          </p:cNvPr>
-          <p:cNvSpPr txBox="1"/>
-          <p:nvPr/>
-        </p:nvSpPr>
-        <p:spPr>
-          <a:xfrm>
-            <a:off x="692726" y="4987636"/>
-            <a:ext cx="10661073" cy="646331"/>
-          </a:xfrm>
-          <a:prstGeom prst="rect">
-            <a:avLst/>
-          </a:prstGeom>
-          <a:solidFill>
-            <a:schemeClr val="bg2"/>
-          </a:solidFill>
-        </p:spPr>
-        <p:txBody>
-          <a:bodyPr wrap="square" rtlCol="0">
-            <a:spAutoFit/>
-          </a:bodyPr>
-          <a:lstStyle/>
-          <a:p>
-            <a:r>
-              <a:rPr lang="es-CO" b="1" dirty="0"/>
-              <a:t>Convención</a:t>
-            </a:r>
-            <a:r>
-              <a:rPr lang="es-CO" dirty="0"/>
-              <a:t>: Para este curso, en las tablas de verdad, vamos a utilizar la notación binaria en ingeniería, es decir 1 para Verdadero y 0 para falso.</a:t>
-            </a:r>
-          </a:p>
-        </p:txBody>
-      </p:sp>
-    </p:spTree>
-    <p:extLst>
-      <p:ext uri="{BB962C8B-B14F-4D97-AF65-F5344CB8AC3E}">
-        <p14:creationId xmlns:p14="http://schemas.microsoft.com/office/powerpoint/2010/main" val="738706118"/>
-      </p:ext>
-    </p:extLst>
-  </p:cSld>
-  <p:clrMapOvr>
-    <a:masterClrMapping/>
-  </p:clrMapOvr>
-</p:sld>
-</file>
-
-<file path=ppt/slides/slide34.xml><?xml version="1.0" encoding="utf-8"?>
-<p:sld xmlns:a="http://schemas.openxmlformats.org/drawingml/2006/main" xmlns:r="http://schemas.openxmlformats.org/officeDocument/2006/relationships" xmlns:p="http://schemas.openxmlformats.org/presentationml/2006/main">
-  <p:cSld>
-    <p:spTree>
-      <p:nvGrpSpPr>
-        <p:cNvPr id="1" name=""/>
-        <p:cNvGrpSpPr/>
-        <p:nvPr/>
-      </p:nvGrpSpPr>
-      <p:grpSpPr>
-        <a:xfrm>
-          <a:off x="0" y="0"/>
-          <a:ext cx="0" cy="0"/>
-          <a:chOff x="0" y="0"/>
-          <a:chExt cx="0" cy="0"/>
-        </a:xfrm>
-      </p:grpSpPr>
-      <p:sp>
-        <p:nvSpPr>
-          <p:cNvPr id="2" name="Título 1">
-            <a:extLst>
-              <a:ext uri="{FF2B5EF4-FFF2-40B4-BE49-F238E27FC236}">
-                <a16:creationId xmlns:a16="http://schemas.microsoft.com/office/drawing/2014/main" id="{363AF66F-7D38-4DEC-A157-5A496140F1BF}"/>
-              </a:ext>
-            </a:extLst>
-          </p:cNvPr>
-          <p:cNvSpPr>
-            <a:spLocks noGrp="1"/>
-          </p:cNvSpPr>
-          <p:nvPr>
-            <p:ph type="title"/>
-          </p:nvPr>
-        </p:nvSpPr>
-        <p:spPr>
-          <a:xfrm>
-            <a:off x="838199" y="226580"/>
-            <a:ext cx="10515600" cy="1325563"/>
-          </a:xfrm>
-        </p:spPr>
-        <p:txBody>
-          <a:bodyPr/>
-          <a:lstStyle/>
-          <a:p>
-            <a:r>
-              <a:rPr lang="es-CO" dirty="0"/>
-              <a:t>Tablas de verdad</a:t>
-            </a:r>
-          </a:p>
-        </p:txBody>
-      </p:sp>
-      <mc:AlternateContent xmlns:mc="http://schemas.openxmlformats.org/markup-compatibility/2006">
-        <mc:Choice xmlns:a14="http://schemas.microsoft.com/office/drawing/2010/main" Requires="a14">
-          <p:sp>
-            <p:nvSpPr>
-              <p:cNvPr id="3" name="Marcador de contenido 2">
-                <a:extLst>
-                  <a:ext uri="{FF2B5EF4-FFF2-40B4-BE49-F238E27FC236}">
-                    <a16:creationId xmlns:a16="http://schemas.microsoft.com/office/drawing/2014/main" id="{8C611C1C-AB20-4127-87E3-88401D8503D0}"/>
-                  </a:ext>
-                </a:extLst>
-              </p:cNvPr>
-              <p:cNvSpPr>
-                <a:spLocks noGrp="1"/>
-              </p:cNvSpPr>
-              <p:nvPr>
-                <p:ph idx="1"/>
-              </p:nvPr>
-            </p:nvSpPr>
-            <p:spPr>
-              <a:xfrm>
-                <a:off x="360218" y="1375234"/>
-                <a:ext cx="11471563" cy="2448621"/>
-              </a:xfrm>
-            </p:spPr>
-            <p:txBody>
-              <a:bodyPr>
-                <a:normAutofit fontScale="92500" lnSpcReduction="10000"/>
-              </a:bodyPr>
-              <a:lstStyle/>
-              <a:p>
-                <a:pPr marL="0" indent="0">
-                  <a:buNone/>
-                </a:pPr>
-                <a:r>
-                  <a:rPr lang="es-MX" b="1" i="0" dirty="0">
-                    <a:solidFill>
-                      <a:schemeClr val="accent2"/>
-                    </a:solidFill>
-                    <a:effectLst/>
-                    <a:latin typeface="system-ui"/>
-                  </a:rPr>
-                  <a:t>Ejemplos</a:t>
-                </a:r>
-                <a:endParaRPr lang="es-MX" sz="2000" b="1" i="0" dirty="0">
-                  <a:solidFill>
-                    <a:schemeClr val="accent2"/>
-                  </a:solidFill>
-                  <a:effectLst/>
-                  <a:latin typeface="system-ui"/>
-                </a:endParaRPr>
-              </a:p>
-              <a:p>
-                <a:pPr marL="0" indent="0">
-                  <a:buNone/>
-                </a:pPr>
-                <a:r>
-                  <a:rPr lang="es-MX" sz="2200" b="0" i="0" dirty="0">
-                    <a:solidFill>
-                      <a:srgbClr val="5C5962"/>
-                    </a:solidFill>
-                    <a:effectLst/>
-                    <a:latin typeface="system-ui"/>
-                  </a:rPr>
-                  <a:t>Obtenga la tabla de verdad asociada a cada una de las siguientes expresiones compuestas</a:t>
-                </a:r>
-              </a:p>
-              <a:p>
-                <a:pPr marL="457200" indent="-457200">
-                  <a:buFont typeface="+mj-lt"/>
-                  <a:buAutoNum type="arabicPeriod"/>
-                </a:pPr>
-                <a14:m>
-                  <m:oMath xmlns:m="http://schemas.openxmlformats.org/officeDocument/2006/math">
-                    <m:r>
-                      <a:rPr lang="es-MX" sz="2200" b="0" i="1" smtClean="0">
-                        <a:solidFill>
-                          <a:srgbClr val="5C5962"/>
-                        </a:solidFill>
-                        <a:effectLst/>
-                        <a:latin typeface="Cambria Math" panose="02040503050406030204" pitchFamily="18" charset="0"/>
-                        <a:ea typeface="Cambria Math" panose="02040503050406030204" pitchFamily="18" charset="0"/>
-                      </a:rPr>
-                      <m:t>𝑃</m:t>
-                    </m:r>
-                  </m:oMath>
-                </a14:m>
-                <a:r>
-                  <a:rPr lang="es-MX" sz="2200" b="0" dirty="0">
-                    <a:solidFill>
-                      <a:srgbClr val="5C5962"/>
-                    </a:solidFill>
-                    <a:effectLst/>
-                    <a:ea typeface="Cambria Math" panose="02040503050406030204" pitchFamily="18" charset="0"/>
-                  </a:rPr>
-                  <a:t> </a:t>
-                </a:r>
-                <a14:m>
-                  <m:oMath xmlns:m="http://schemas.openxmlformats.org/officeDocument/2006/math">
-                    <m:r>
-                      <a:rPr lang="es-MX" sz="2200" b="0" i="1" smtClean="0">
-                        <a:solidFill>
-                          <a:srgbClr val="5C5962"/>
-                        </a:solidFill>
-                        <a:effectLst/>
-                        <a:latin typeface="Cambria Math" panose="02040503050406030204" pitchFamily="18" charset="0"/>
-                        <a:ea typeface="Cambria Math" panose="02040503050406030204" pitchFamily="18" charset="0"/>
-                      </a:rPr>
-                      <m:t>∧</m:t>
-                    </m:r>
-                  </m:oMath>
-                </a14:m>
-                <a:r>
-                  <a:rPr lang="es-MX" sz="2200" b="0" dirty="0">
-                    <a:solidFill>
-                      <a:srgbClr val="5C5962"/>
-                    </a:solidFill>
-                    <a:effectLst/>
-                    <a:ea typeface="Cambria Math" panose="02040503050406030204" pitchFamily="18" charset="0"/>
-                  </a:rPr>
-                  <a:t> </a:t>
-                </a:r>
-                <a14:m>
-                  <m:oMath xmlns:m="http://schemas.openxmlformats.org/officeDocument/2006/math">
-                    <m:r>
-                      <a:rPr lang="es-MX" sz="2200" b="0" i="1" smtClean="0">
-                        <a:solidFill>
-                          <a:srgbClr val="5C5962"/>
-                        </a:solidFill>
-                        <a:effectLst/>
-                        <a:latin typeface="Cambria Math" panose="02040503050406030204" pitchFamily="18" charset="0"/>
-                        <a:ea typeface="Cambria Math" panose="02040503050406030204" pitchFamily="18" charset="0"/>
-                      </a:rPr>
-                      <m:t>¬</m:t>
-                    </m:r>
-                    <m:r>
-                      <a:rPr lang="es-MX" sz="2200" b="0" i="1" smtClean="0">
-                        <a:solidFill>
-                          <a:srgbClr val="5C5962"/>
-                        </a:solidFill>
-                        <a:effectLst/>
-                        <a:latin typeface="Cambria Math" panose="02040503050406030204" pitchFamily="18" charset="0"/>
-                        <a:ea typeface="Cambria Math" panose="02040503050406030204" pitchFamily="18" charset="0"/>
-                      </a:rPr>
-                      <m:t>𝑃</m:t>
-                    </m:r>
-                  </m:oMath>
-                </a14:m>
-                <a:endParaRPr lang="es-MX" sz="2200" b="0" i="1" dirty="0">
-                  <a:solidFill>
-                    <a:srgbClr val="5C5962"/>
-                  </a:solidFill>
-                  <a:effectLst/>
-                  <a:latin typeface="Cambria Math" panose="02040503050406030204" pitchFamily="18" charset="0"/>
-                  <a:ea typeface="Cambria Math" panose="02040503050406030204" pitchFamily="18" charset="0"/>
-                </a:endParaRPr>
-              </a:p>
-              <a:p>
-                <a:pPr marL="457200" indent="-457200">
-                  <a:buFont typeface="+mj-lt"/>
-                  <a:buAutoNum type="arabicPeriod"/>
-                </a:pPr>
-                <a14:m>
-                  <m:oMath xmlns:m="http://schemas.openxmlformats.org/officeDocument/2006/math">
-                    <m:d>
-                      <m:dPr>
-                        <m:ctrlPr>
-                          <a:rPr lang="es-MX" sz="2200" b="0" i="1" smtClean="0">
-                            <a:solidFill>
-                              <a:srgbClr val="5C5962"/>
-                            </a:solidFill>
-                            <a:effectLst/>
-                            <a:latin typeface="Cambria Math" panose="02040503050406030204" pitchFamily="18" charset="0"/>
-                            <a:ea typeface="Cambria Math" panose="02040503050406030204" pitchFamily="18" charset="0"/>
-                          </a:rPr>
-                        </m:ctrlPr>
-                      </m:dPr>
-                      <m:e>
-                        <m:r>
-                          <a:rPr lang="es-MX" sz="2200" b="0" i="1" smtClean="0">
-                            <a:solidFill>
-                              <a:srgbClr val="5C5962"/>
-                            </a:solidFill>
-                            <a:effectLst/>
-                            <a:latin typeface="Cambria Math" panose="02040503050406030204" pitchFamily="18" charset="0"/>
-                            <a:ea typeface="Cambria Math" panose="02040503050406030204" pitchFamily="18" charset="0"/>
-                          </a:rPr>
-                          <m:t>𝑃</m:t>
-                        </m:r>
-                        <m:r>
-                          <a:rPr lang="es-MX" sz="2200" b="0" i="1" smtClean="0">
-                            <a:solidFill>
-                              <a:srgbClr val="5C5962"/>
-                            </a:solidFill>
-                            <a:effectLst/>
-                            <a:latin typeface="Cambria Math" panose="02040503050406030204" pitchFamily="18" charset="0"/>
-                            <a:ea typeface="Cambria Math" panose="02040503050406030204" pitchFamily="18" charset="0"/>
-                          </a:rPr>
-                          <m:t>→</m:t>
-                        </m:r>
-                        <m:r>
-                          <a:rPr lang="es-MX" sz="2200" b="0" i="1" smtClean="0">
-                            <a:solidFill>
-                              <a:srgbClr val="5C5962"/>
-                            </a:solidFill>
-                            <a:effectLst/>
-                            <a:latin typeface="Cambria Math" panose="02040503050406030204" pitchFamily="18" charset="0"/>
-                            <a:ea typeface="Cambria Math" panose="02040503050406030204" pitchFamily="18" charset="0"/>
-                          </a:rPr>
-                          <m:t>𝑄</m:t>
-                        </m:r>
-                      </m:e>
-                    </m:d>
-                    <m:r>
-                      <a:rPr lang="es-MX" sz="2200" b="0" i="1" smtClean="0">
-                        <a:solidFill>
-                          <a:srgbClr val="5C5962"/>
-                        </a:solidFill>
-                        <a:effectLst/>
-                        <a:latin typeface="Cambria Math" panose="02040503050406030204" pitchFamily="18" charset="0"/>
-                        <a:ea typeface="Cambria Math" panose="02040503050406030204" pitchFamily="18" charset="0"/>
-                      </a:rPr>
-                      <m:t>→</m:t>
-                    </m:r>
-                    <m:d>
-                      <m:dPr>
-                        <m:ctrlPr>
-                          <a:rPr lang="es-MX" sz="2200" b="0" i="1" smtClean="0">
-                            <a:solidFill>
-                              <a:srgbClr val="5C5962"/>
-                            </a:solidFill>
-                            <a:effectLst/>
-                            <a:latin typeface="Cambria Math" panose="02040503050406030204" pitchFamily="18" charset="0"/>
-                            <a:ea typeface="Cambria Math" panose="02040503050406030204" pitchFamily="18" charset="0"/>
-                          </a:rPr>
-                        </m:ctrlPr>
-                      </m:dPr>
-                      <m:e>
-                        <m:r>
-                          <a:rPr lang="es-MX" sz="2200" b="0" i="1" smtClean="0">
-                            <a:solidFill>
-                              <a:srgbClr val="5C5962"/>
-                            </a:solidFill>
-                            <a:effectLst/>
-                            <a:latin typeface="Cambria Math" panose="02040503050406030204" pitchFamily="18" charset="0"/>
-                            <a:ea typeface="Cambria Math" panose="02040503050406030204" pitchFamily="18" charset="0"/>
-                          </a:rPr>
-                          <m:t>¬</m:t>
-                        </m:r>
-                        <m:r>
-                          <a:rPr lang="es-MX" sz="2200" b="0" i="1" smtClean="0">
-                            <a:solidFill>
-                              <a:srgbClr val="5C5962"/>
-                            </a:solidFill>
-                            <a:effectLst/>
-                            <a:latin typeface="Cambria Math" panose="02040503050406030204" pitchFamily="18" charset="0"/>
-                            <a:ea typeface="Cambria Math" panose="02040503050406030204" pitchFamily="18" charset="0"/>
-                          </a:rPr>
-                          <m:t>𝑃</m:t>
-                        </m:r>
-                        <m:r>
-                          <a:rPr lang="es-MX" sz="2200" b="0" i="1" smtClean="0">
-                            <a:solidFill>
-                              <a:srgbClr val="5C5962"/>
-                            </a:solidFill>
-                            <a:effectLst/>
-                            <a:latin typeface="Cambria Math" panose="02040503050406030204" pitchFamily="18" charset="0"/>
-                            <a:ea typeface="Cambria Math" panose="02040503050406030204" pitchFamily="18" charset="0"/>
-                          </a:rPr>
-                          <m:t> ∨</m:t>
-                        </m:r>
-                        <m:r>
-                          <a:rPr lang="es-MX" sz="2200" b="0" i="1" smtClean="0">
-                            <a:solidFill>
-                              <a:srgbClr val="5C5962"/>
-                            </a:solidFill>
-                            <a:effectLst/>
-                            <a:latin typeface="Cambria Math" panose="02040503050406030204" pitchFamily="18" charset="0"/>
-                            <a:ea typeface="Cambria Math" panose="02040503050406030204" pitchFamily="18" charset="0"/>
-                          </a:rPr>
-                          <m:t>𝑄</m:t>
-                        </m:r>
-                      </m:e>
-                    </m:d>
-                  </m:oMath>
-                </a14:m>
-                <a:endParaRPr lang="es-MX" sz="2200" b="0" i="0" dirty="0">
-                  <a:solidFill>
-                    <a:srgbClr val="5C5962"/>
-                  </a:solidFill>
-                  <a:effectLst/>
-                  <a:latin typeface="Google Sans Text"/>
-                  <a:ea typeface="Cambria Math" panose="02040503050406030204" pitchFamily="18" charset="0"/>
-                </a:endParaRPr>
-              </a:p>
-              <a:p>
-                <a:pPr marL="457200" indent="-457200">
-                  <a:buFont typeface="+mj-lt"/>
-                  <a:buAutoNum type="arabicPeriod"/>
-                </a:pPr>
-                <a14:m>
-                  <m:oMath xmlns:m="http://schemas.openxmlformats.org/officeDocument/2006/math">
-                    <m:d>
-                      <m:dPr>
-                        <m:begChr m:val="["/>
-                        <m:endChr m:val="]"/>
-                        <m:ctrlPr>
-                          <a:rPr lang="es-MX" sz="2200" b="0" i="1" smtClean="0">
-                            <a:solidFill>
-                              <a:srgbClr val="5C5962"/>
-                            </a:solidFill>
-                            <a:effectLst/>
-                            <a:latin typeface="Cambria Math" panose="02040503050406030204" pitchFamily="18" charset="0"/>
-                            <a:ea typeface="Cambria Math" panose="02040503050406030204" pitchFamily="18" charset="0"/>
-                          </a:rPr>
-                        </m:ctrlPr>
-                      </m:dPr>
-                      <m:e>
-                        <m:d>
-                          <m:dPr>
-                            <m:ctrlPr>
-                              <a:rPr lang="es-MX" sz="2200" b="0" i="1" smtClean="0">
-                                <a:solidFill>
-                                  <a:srgbClr val="5C5962"/>
-                                </a:solidFill>
-                                <a:effectLst/>
-                                <a:latin typeface="Cambria Math" panose="02040503050406030204" pitchFamily="18" charset="0"/>
-                                <a:ea typeface="Cambria Math" panose="02040503050406030204" pitchFamily="18" charset="0"/>
-                              </a:rPr>
-                            </m:ctrlPr>
-                          </m:dPr>
-                          <m:e>
-                            <m:r>
-                              <a:rPr lang="es-MX" sz="2200" b="0" i="1" smtClean="0">
-                                <a:solidFill>
-                                  <a:srgbClr val="5C5962"/>
-                                </a:solidFill>
-                                <a:effectLst/>
-                                <a:latin typeface="Cambria Math" panose="02040503050406030204" pitchFamily="18" charset="0"/>
-                                <a:ea typeface="Cambria Math" panose="02040503050406030204" pitchFamily="18" charset="0"/>
-                              </a:rPr>
-                              <m:t>𝑃</m:t>
-                            </m:r>
-                            <m:r>
-                              <a:rPr lang="es-MX" sz="2200" b="0" i="1" smtClean="0">
-                                <a:solidFill>
-                                  <a:srgbClr val="5C5962"/>
-                                </a:solidFill>
-                                <a:effectLst/>
-                                <a:latin typeface="Cambria Math" panose="02040503050406030204" pitchFamily="18" charset="0"/>
-                                <a:ea typeface="Cambria Math" panose="02040503050406030204" pitchFamily="18" charset="0"/>
-                              </a:rPr>
-                              <m:t>→</m:t>
-                            </m:r>
-                            <m:r>
-                              <a:rPr lang="es-MX" sz="2200" b="0" i="1" smtClean="0">
-                                <a:solidFill>
-                                  <a:srgbClr val="5C5962"/>
-                                </a:solidFill>
-                                <a:effectLst/>
-                                <a:latin typeface="Cambria Math" panose="02040503050406030204" pitchFamily="18" charset="0"/>
-                                <a:ea typeface="Cambria Math" panose="02040503050406030204" pitchFamily="18" charset="0"/>
-                              </a:rPr>
-                              <m:t>𝑄</m:t>
-                            </m:r>
-                          </m:e>
-                        </m:d>
-                        <m:r>
-                          <a:rPr lang="es-MX" sz="2200" b="0" i="1" smtClean="0">
-                            <a:solidFill>
-                              <a:srgbClr val="5C5962"/>
-                            </a:solidFill>
-                            <a:effectLst/>
-                            <a:latin typeface="Cambria Math" panose="02040503050406030204" pitchFamily="18" charset="0"/>
-                            <a:ea typeface="Cambria Math" panose="02040503050406030204" pitchFamily="18" charset="0"/>
-                          </a:rPr>
-                          <m:t>∧¬</m:t>
-                        </m:r>
-                        <m:r>
-                          <a:rPr lang="es-MX" sz="2200" b="0" i="1" smtClean="0">
-                            <a:solidFill>
-                              <a:srgbClr val="5C5962"/>
-                            </a:solidFill>
-                            <a:effectLst/>
-                            <a:latin typeface="Cambria Math" panose="02040503050406030204" pitchFamily="18" charset="0"/>
-                            <a:ea typeface="Cambria Math" panose="02040503050406030204" pitchFamily="18" charset="0"/>
-                          </a:rPr>
-                          <m:t>𝑄</m:t>
-                        </m:r>
-                      </m:e>
-                    </m:d>
-                    <m:r>
-                      <a:rPr lang="es-MX" sz="2200" b="0" i="1" smtClean="0">
-                        <a:solidFill>
-                          <a:srgbClr val="5C5962"/>
-                        </a:solidFill>
-                        <a:effectLst/>
-                        <a:latin typeface="Cambria Math" panose="02040503050406030204" pitchFamily="18" charset="0"/>
-                        <a:ea typeface="Cambria Math" panose="02040503050406030204" pitchFamily="18" charset="0"/>
-                      </a:rPr>
-                      <m:t>→</m:t>
-                    </m:r>
-                    <m:r>
-                      <a:rPr lang="es-MX" sz="2200" b="0" i="1" smtClean="0">
-                        <a:solidFill>
-                          <a:srgbClr val="5C5962"/>
-                        </a:solidFill>
-                        <a:effectLst/>
-                        <a:latin typeface="Cambria Math" panose="02040503050406030204" pitchFamily="18" charset="0"/>
-                        <a:ea typeface="Cambria Math" panose="02040503050406030204" pitchFamily="18" charset="0"/>
-                      </a:rPr>
-                      <m:t>¬</m:t>
-                    </m:r>
-                    <m:r>
-                      <a:rPr lang="es-MX" sz="2200" b="0" i="1" smtClean="0">
-                        <a:solidFill>
-                          <a:srgbClr val="5C5962"/>
-                        </a:solidFill>
-                        <a:effectLst/>
-                        <a:latin typeface="Cambria Math" panose="02040503050406030204" pitchFamily="18" charset="0"/>
-                        <a:ea typeface="Cambria Math" panose="02040503050406030204" pitchFamily="18" charset="0"/>
-                      </a:rPr>
-                      <m:t>𝑃</m:t>
-                    </m:r>
-                  </m:oMath>
-                </a14:m>
-                <a:endParaRPr lang="es-MX" sz="2200" b="0" i="0" dirty="0">
-                  <a:solidFill>
-                    <a:srgbClr val="5C5962"/>
-                  </a:solidFill>
-                  <a:effectLst/>
-                  <a:latin typeface="Google Sans Text"/>
-                  <a:ea typeface="Cambria Math" panose="02040503050406030204" pitchFamily="18" charset="0"/>
-                </a:endParaRPr>
-              </a:p>
-              <a:p>
-                <a:pPr marL="457200" indent="-457200">
-                  <a:buFont typeface="+mj-lt"/>
-                  <a:buAutoNum type="arabicPeriod"/>
-                </a:pPr>
-                <a14:m>
-                  <m:oMath xmlns:m="http://schemas.openxmlformats.org/officeDocument/2006/math">
-                    <m:r>
-                      <a:rPr lang="es-MX" sz="2200" b="0" i="1" smtClean="0">
-                        <a:solidFill>
-                          <a:srgbClr val="5C5962"/>
-                        </a:solidFill>
-                        <a:effectLst/>
-                        <a:latin typeface="Cambria Math" panose="02040503050406030204" pitchFamily="18" charset="0"/>
-                        <a:ea typeface="Cambria Math" panose="02040503050406030204" pitchFamily="18" charset="0"/>
-                      </a:rPr>
-                      <m:t>𝑅</m:t>
-                    </m:r>
-                    <m:r>
-                      <a:rPr lang="es-MX" sz="2200" b="0" i="1" smtClean="0">
-                        <a:solidFill>
-                          <a:srgbClr val="5C5962"/>
-                        </a:solidFill>
-                        <a:effectLst/>
-                        <a:latin typeface="Cambria Math" panose="02040503050406030204" pitchFamily="18" charset="0"/>
-                        <a:ea typeface="Cambria Math" panose="02040503050406030204" pitchFamily="18" charset="0"/>
-                      </a:rPr>
-                      <m:t>∧</m:t>
-                    </m:r>
-                    <m:r>
-                      <a:rPr lang="es-MX" sz="2200" b="0" i="1" smtClean="0">
-                        <a:solidFill>
-                          <a:srgbClr val="5C5962"/>
-                        </a:solidFill>
-                        <a:effectLst/>
-                        <a:latin typeface="Cambria Math" panose="02040503050406030204" pitchFamily="18" charset="0"/>
-                        <a:ea typeface="Cambria Math" panose="02040503050406030204" pitchFamily="18" charset="0"/>
-                      </a:rPr>
-                      <m:t>𝑆</m:t>
-                    </m:r>
-                    <m:r>
-                      <a:rPr lang="es-MX" sz="2200" b="0" i="1" smtClean="0">
-                        <a:solidFill>
-                          <a:srgbClr val="5C5962"/>
-                        </a:solidFill>
-                        <a:effectLst/>
-                        <a:latin typeface="Cambria Math" panose="02040503050406030204" pitchFamily="18" charset="0"/>
-                        <a:ea typeface="Cambria Math" panose="02040503050406030204" pitchFamily="18" charset="0"/>
-                      </a:rPr>
-                      <m:t>→¬</m:t>
-                    </m:r>
-                    <m:r>
-                      <a:rPr lang="es-MX" sz="2200" b="0" i="1" smtClean="0">
-                        <a:solidFill>
-                          <a:srgbClr val="5C5962"/>
-                        </a:solidFill>
-                        <a:effectLst/>
-                        <a:latin typeface="Cambria Math" panose="02040503050406030204" pitchFamily="18" charset="0"/>
-                        <a:ea typeface="Cambria Math" panose="02040503050406030204" pitchFamily="18" charset="0"/>
-                      </a:rPr>
-                      <m:t>𝑇</m:t>
-                    </m:r>
-                  </m:oMath>
-                </a14:m>
-                <a:endParaRPr lang="es-MX" sz="2200" b="0" i="0" dirty="0">
-                  <a:solidFill>
-                    <a:srgbClr val="131314"/>
-                  </a:solidFill>
-                  <a:effectLst/>
-                  <a:latin typeface="Google Sans Text"/>
-                </a:endParaRPr>
-              </a:p>
-              <a:p>
-                <a:pPr lvl="1"/>
-                <a:endParaRPr lang="es-MX" sz="1600" b="0" i="0" dirty="0">
-                  <a:solidFill>
-                    <a:srgbClr val="131314"/>
-                  </a:solidFill>
-                  <a:effectLst/>
-                  <a:latin typeface="Google Sans Text"/>
-                </a:endParaRPr>
-              </a:p>
-              <a:p>
-                <a:pPr marL="0" indent="0">
-                  <a:buNone/>
-                </a:pPr>
-                <a:endParaRPr lang="es-MX" dirty="0"/>
-              </a:p>
-            </p:txBody>
-          </p:sp>
-        </mc:Choice>
-        <mc:Fallback>
-          <p:sp>
-            <p:nvSpPr>
-              <p:cNvPr id="3" name="Marcador de contenido 2">
-                <a:extLst>
-                  <a:ext uri="{FF2B5EF4-FFF2-40B4-BE49-F238E27FC236}">
-                    <a16:creationId xmlns:a16="http://schemas.microsoft.com/office/drawing/2014/main" id="{8C611C1C-AB20-4127-87E3-88401D8503D0}"/>
-                  </a:ext>
-                </a:extLst>
-              </p:cNvPr>
-              <p:cNvSpPr>
-                <a:spLocks noGrp="1" noRot="1" noChangeAspect="1" noMove="1" noResize="1" noEditPoints="1" noAdjustHandles="1" noChangeArrowheads="1" noChangeShapeType="1" noTextEdit="1"/>
-              </p:cNvSpPr>
-              <p:nvPr>
-                <p:ph idx="1"/>
-              </p:nvPr>
-            </p:nvSpPr>
-            <p:spPr>
-              <a:xfrm>
-                <a:off x="360218" y="1375234"/>
-                <a:ext cx="11471563" cy="2448621"/>
-              </a:xfrm>
-              <a:blipFill>
-                <a:blip r:embed="rId2"/>
-                <a:stretch>
-                  <a:fillRect l="-956" t="-5237"/>
-                </a:stretch>
-              </a:blipFill>
-            </p:spPr>
-            <p:txBody>
-              <a:bodyPr/>
-              <a:lstStyle/>
-              <a:p>
-                <a:r>
-                  <a:rPr lang="es-CO">
-                    <a:noFill/>
-                  </a:rPr>
-                  <a:t> </a:t>
-                </a:r>
-              </a:p>
-            </p:txBody>
-          </p:sp>
-        </mc:Fallback>
-      </mc:AlternateContent>
-    </p:spTree>
-    <p:extLst>
-      <p:ext uri="{BB962C8B-B14F-4D97-AF65-F5344CB8AC3E}">
-        <p14:creationId xmlns:p14="http://schemas.microsoft.com/office/powerpoint/2010/main" val="1697583589"/>
-      </p:ext>
-    </p:extLst>
-  </p:cSld>
-  <p:clrMapOvr>
-    <a:masterClrMapping/>
-  </p:clrMapOvr>
-</p:sld>
-</file>
-
-<file path=ppt/slides/slide35.xml><?xml version="1.0" encoding="utf-8"?>
-<p:sld xmlns:a="http://schemas.openxmlformats.org/drawingml/2006/main" xmlns:r="http://schemas.openxmlformats.org/officeDocument/2006/relationships" xmlns:p="http://schemas.openxmlformats.org/presentationml/2006/main">
-  <p:cSld>
-    <p:spTree>
-      <p:nvGrpSpPr>
-        <p:cNvPr id="1" name=""/>
-        <p:cNvGrpSpPr/>
-        <p:nvPr/>
-      </p:nvGrpSpPr>
-      <p:grpSpPr>
-        <a:xfrm>
-          <a:off x="0" y="0"/>
-          <a:ext cx="0" cy="0"/>
-          <a:chOff x="0" y="0"/>
-          <a:chExt cx="0" cy="0"/>
-        </a:xfrm>
-      </p:grpSpPr>
-      <p:sp>
-        <p:nvSpPr>
-          <p:cNvPr id="2" name="Título 1">
-            <a:extLst>
-              <a:ext uri="{FF2B5EF4-FFF2-40B4-BE49-F238E27FC236}">
-                <a16:creationId xmlns:a16="http://schemas.microsoft.com/office/drawing/2014/main" id="{363AF66F-7D38-4DEC-A157-5A496140F1BF}"/>
-              </a:ext>
-            </a:extLst>
-          </p:cNvPr>
-          <p:cNvSpPr>
-            <a:spLocks noGrp="1"/>
-          </p:cNvSpPr>
-          <p:nvPr>
-            <p:ph type="title"/>
-          </p:nvPr>
-        </p:nvSpPr>
-        <p:spPr>
-          <a:xfrm>
-            <a:off x="838199" y="226580"/>
-            <a:ext cx="10515600" cy="1325563"/>
-          </a:xfrm>
-        </p:spPr>
-        <p:txBody>
-          <a:bodyPr/>
-          <a:lstStyle/>
-          <a:p>
-            <a:r>
-              <a:rPr lang="es-CO" dirty="0"/>
-              <a:t>Tablas de verdad</a:t>
-            </a:r>
-          </a:p>
-        </p:txBody>
-      </p:sp>
-      <mc:AlternateContent xmlns:mc="http://schemas.openxmlformats.org/markup-compatibility/2006">
-        <mc:Choice xmlns:a14="http://schemas.microsoft.com/office/drawing/2010/main" Requires="a14">
-          <p:sp>
-            <p:nvSpPr>
-              <p:cNvPr id="3" name="Marcador de contenido 2">
-                <a:extLst>
-                  <a:ext uri="{FF2B5EF4-FFF2-40B4-BE49-F238E27FC236}">
-                    <a16:creationId xmlns:a16="http://schemas.microsoft.com/office/drawing/2014/main" id="{8C611C1C-AB20-4127-87E3-88401D8503D0}"/>
-                  </a:ext>
-                </a:extLst>
-              </p:cNvPr>
-              <p:cNvSpPr>
-                <a:spLocks noGrp="1"/>
-              </p:cNvSpPr>
-              <p:nvPr>
-                <p:ph idx="1"/>
-              </p:nvPr>
-            </p:nvSpPr>
-            <p:spPr>
-              <a:xfrm>
-                <a:off x="360218" y="1375235"/>
-                <a:ext cx="11471563" cy="495130"/>
-              </a:xfrm>
-            </p:spPr>
-            <p:txBody>
-              <a:bodyPr>
-                <a:normAutofit/>
-              </a:bodyPr>
-              <a:lstStyle/>
-              <a:p>
-                <a:pPr marL="0" indent="0">
-                  <a:buNone/>
-                </a:pPr>
-                <a:r>
-                  <a:rPr lang="es-MX" sz="2200" b="1" i="0" dirty="0">
-                    <a:solidFill>
-                      <a:srgbClr val="5C5962"/>
-                    </a:solidFill>
-                    <a:effectLst/>
-                    <a:latin typeface="system-ui"/>
-                  </a:rPr>
-                  <a:t>Ejemplo 1</a:t>
-                </a:r>
-                <a:r>
-                  <a:rPr lang="es-MX" sz="2200" b="0" i="0" dirty="0">
-                    <a:solidFill>
-                      <a:srgbClr val="5C5962"/>
-                    </a:solidFill>
-                    <a:effectLst/>
-                    <a:latin typeface="system-ui"/>
-                  </a:rPr>
-                  <a:t>: </a:t>
-                </a:r>
-                <a14:m>
-                  <m:oMath xmlns:m="http://schemas.openxmlformats.org/officeDocument/2006/math">
-                    <m:r>
-                      <a:rPr lang="es-MX" sz="2200" b="0" i="1" smtClean="0">
-                        <a:solidFill>
-                          <a:srgbClr val="5C5962"/>
-                        </a:solidFill>
-                        <a:effectLst/>
-                        <a:latin typeface="Cambria Math" panose="02040503050406030204" pitchFamily="18" charset="0"/>
-                        <a:ea typeface="Cambria Math" panose="02040503050406030204" pitchFamily="18" charset="0"/>
-                      </a:rPr>
-                      <m:t>𝑃</m:t>
-                    </m:r>
-                  </m:oMath>
-                </a14:m>
-                <a:r>
-                  <a:rPr lang="es-MX" sz="2200" b="0" dirty="0">
-                    <a:solidFill>
-                      <a:srgbClr val="5C5962"/>
-                    </a:solidFill>
-                    <a:effectLst/>
-                    <a:ea typeface="Cambria Math" panose="02040503050406030204" pitchFamily="18" charset="0"/>
-                  </a:rPr>
-                  <a:t> </a:t>
-                </a:r>
-                <a14:m>
-                  <m:oMath xmlns:m="http://schemas.openxmlformats.org/officeDocument/2006/math">
-                    <m:r>
-                      <a:rPr lang="es-MX" sz="2200" b="0" i="1" smtClean="0">
-                        <a:solidFill>
-                          <a:srgbClr val="5C5962"/>
-                        </a:solidFill>
-                        <a:effectLst/>
-                        <a:latin typeface="Cambria Math" panose="02040503050406030204" pitchFamily="18" charset="0"/>
-                        <a:ea typeface="Cambria Math" panose="02040503050406030204" pitchFamily="18" charset="0"/>
-                      </a:rPr>
-                      <m:t>∧</m:t>
-                    </m:r>
-                  </m:oMath>
-                </a14:m>
-                <a:r>
-                  <a:rPr lang="es-MX" sz="2200" b="0" dirty="0">
-                    <a:solidFill>
-                      <a:srgbClr val="5C5962"/>
-                    </a:solidFill>
-                    <a:effectLst/>
-                    <a:ea typeface="Cambria Math" panose="02040503050406030204" pitchFamily="18" charset="0"/>
-                  </a:rPr>
-                  <a:t> </a:t>
-                </a:r>
-                <a14:m>
-                  <m:oMath xmlns:m="http://schemas.openxmlformats.org/officeDocument/2006/math">
-                    <m:r>
-                      <a:rPr lang="es-MX" sz="2200" b="0" i="1" smtClean="0">
-                        <a:solidFill>
-                          <a:srgbClr val="5C5962"/>
-                        </a:solidFill>
-                        <a:effectLst/>
-                        <a:latin typeface="Cambria Math" panose="02040503050406030204" pitchFamily="18" charset="0"/>
-                        <a:ea typeface="Cambria Math" panose="02040503050406030204" pitchFamily="18" charset="0"/>
-                      </a:rPr>
-                      <m:t>¬</m:t>
-                    </m:r>
-                    <m:r>
-                      <a:rPr lang="es-MX" sz="2200" b="0" i="1" smtClean="0">
-                        <a:solidFill>
-                          <a:srgbClr val="5C5962"/>
-                        </a:solidFill>
-                        <a:effectLst/>
-                        <a:latin typeface="Cambria Math" panose="02040503050406030204" pitchFamily="18" charset="0"/>
-                        <a:ea typeface="Cambria Math" panose="02040503050406030204" pitchFamily="18" charset="0"/>
-                      </a:rPr>
-                      <m:t>𝑃</m:t>
-                    </m:r>
-                  </m:oMath>
-                </a14:m>
-                <a:endParaRPr lang="es-MX" sz="2200" b="0" i="1" dirty="0">
-                  <a:solidFill>
-                    <a:srgbClr val="5C5962"/>
-                  </a:solidFill>
-                  <a:effectLst/>
-                  <a:latin typeface="Cambria Math" panose="02040503050406030204" pitchFamily="18" charset="0"/>
-                  <a:ea typeface="Cambria Math" panose="02040503050406030204" pitchFamily="18" charset="0"/>
-                </a:endParaRPr>
-              </a:p>
-              <a:p>
-                <a:pPr lvl="1"/>
-                <a:endParaRPr lang="es-MX" sz="1600" b="0" i="0" dirty="0">
-                  <a:solidFill>
-                    <a:srgbClr val="131314"/>
-                  </a:solidFill>
-                  <a:effectLst/>
-                  <a:latin typeface="Google Sans Text"/>
-                </a:endParaRPr>
-              </a:p>
-              <a:p>
-                <a:pPr marL="0" indent="0">
-                  <a:buNone/>
-                </a:pPr>
-                <a:endParaRPr lang="es-MX" dirty="0"/>
-              </a:p>
-            </p:txBody>
-          </p:sp>
-        </mc:Choice>
-        <mc:Fallback>
-          <p:sp>
-            <p:nvSpPr>
-              <p:cNvPr id="3" name="Marcador de contenido 2">
-                <a:extLst>
-                  <a:ext uri="{FF2B5EF4-FFF2-40B4-BE49-F238E27FC236}">
-                    <a16:creationId xmlns:a16="http://schemas.microsoft.com/office/drawing/2014/main" id="{8C611C1C-AB20-4127-87E3-88401D8503D0}"/>
-                  </a:ext>
-                </a:extLst>
-              </p:cNvPr>
-              <p:cNvSpPr>
-                <a:spLocks noGrp="1" noRot="1" noChangeAspect="1" noMove="1" noResize="1" noEditPoints="1" noAdjustHandles="1" noChangeArrowheads="1" noChangeShapeType="1" noTextEdit="1"/>
-              </p:cNvSpPr>
-              <p:nvPr>
-                <p:ph idx="1"/>
-              </p:nvPr>
-            </p:nvSpPr>
-            <p:spPr>
-              <a:xfrm>
-                <a:off x="360218" y="1375235"/>
-                <a:ext cx="11471563" cy="495130"/>
-              </a:xfrm>
-              <a:blipFill>
-                <a:blip r:embed="rId2"/>
-                <a:stretch>
-                  <a:fillRect l="-691" t="-14815" b="-4938"/>
-                </a:stretch>
-              </a:blipFill>
-            </p:spPr>
-            <p:txBody>
-              <a:bodyPr/>
-              <a:lstStyle/>
-              <a:p>
-                <a:r>
-                  <a:rPr lang="es-CO">
-                    <a:noFill/>
-                  </a:rPr>
-                  <a:t> </a:t>
-                </a:r>
-              </a:p>
-            </p:txBody>
-          </p:sp>
-        </mc:Fallback>
-      </mc:AlternateContent>
-    </p:spTree>
-    <p:extLst>
-      <p:ext uri="{BB962C8B-B14F-4D97-AF65-F5344CB8AC3E}">
-        <p14:creationId xmlns:p14="http://schemas.microsoft.com/office/powerpoint/2010/main" val="2937695362"/>
-      </p:ext>
-    </p:extLst>
-  </p:cSld>
-  <p:clrMapOvr>
-    <a:masterClrMapping/>
-  </p:clrMapOvr>
-</p:sld>
-</file>
-
-<file path=ppt/slides/slide36.xml><?xml version="1.0" encoding="utf-8"?>
-<p:sld xmlns:a="http://schemas.openxmlformats.org/drawingml/2006/main" xmlns:r="http://schemas.openxmlformats.org/officeDocument/2006/relationships" xmlns:p="http://schemas.openxmlformats.org/presentationml/2006/main">
-  <p:cSld>
-    <p:spTree>
-      <p:nvGrpSpPr>
-        <p:cNvPr id="1" name=""/>
-        <p:cNvGrpSpPr/>
-        <p:nvPr/>
-      </p:nvGrpSpPr>
-      <p:grpSpPr>
-        <a:xfrm>
-          <a:off x="0" y="0"/>
-          <a:ext cx="0" cy="0"/>
-          <a:chOff x="0" y="0"/>
-          <a:chExt cx="0" cy="0"/>
-        </a:xfrm>
-      </p:grpSpPr>
-      <p:sp>
-        <p:nvSpPr>
-          <p:cNvPr id="2" name="Título 1">
-            <a:extLst>
-              <a:ext uri="{FF2B5EF4-FFF2-40B4-BE49-F238E27FC236}">
-                <a16:creationId xmlns:a16="http://schemas.microsoft.com/office/drawing/2014/main" id="{363AF66F-7D38-4DEC-A157-5A496140F1BF}"/>
-              </a:ext>
-            </a:extLst>
-          </p:cNvPr>
-          <p:cNvSpPr>
-            <a:spLocks noGrp="1"/>
-          </p:cNvSpPr>
-          <p:nvPr>
-            <p:ph type="title"/>
-          </p:nvPr>
-        </p:nvSpPr>
-        <p:spPr>
-          <a:xfrm>
-            <a:off x="838199" y="226580"/>
-            <a:ext cx="10515600" cy="1325563"/>
-          </a:xfrm>
-        </p:spPr>
-        <p:txBody>
-          <a:bodyPr/>
-          <a:lstStyle/>
-          <a:p>
-            <a:r>
-              <a:rPr lang="es-CO" dirty="0"/>
-              <a:t>Tablas de verdad</a:t>
-            </a:r>
-          </a:p>
-        </p:txBody>
-      </p:sp>
-      <mc:AlternateContent xmlns:mc="http://schemas.openxmlformats.org/markup-compatibility/2006">
-        <mc:Choice xmlns:a14="http://schemas.microsoft.com/office/drawing/2010/main" Requires="a14">
-          <p:sp>
-            <p:nvSpPr>
-              <p:cNvPr id="3" name="Marcador de contenido 2">
-                <a:extLst>
-                  <a:ext uri="{FF2B5EF4-FFF2-40B4-BE49-F238E27FC236}">
-                    <a16:creationId xmlns:a16="http://schemas.microsoft.com/office/drawing/2014/main" id="{8C611C1C-AB20-4127-87E3-88401D8503D0}"/>
-                  </a:ext>
-                </a:extLst>
-              </p:cNvPr>
-              <p:cNvSpPr>
-                <a:spLocks noGrp="1"/>
-              </p:cNvSpPr>
-              <p:nvPr>
-                <p:ph idx="1"/>
-              </p:nvPr>
-            </p:nvSpPr>
-            <p:spPr>
-              <a:xfrm>
-                <a:off x="360218" y="1375234"/>
-                <a:ext cx="11471563" cy="2448621"/>
-              </a:xfrm>
-            </p:spPr>
-            <p:txBody>
-              <a:bodyPr>
-                <a:normAutofit/>
-              </a:bodyPr>
-              <a:lstStyle/>
-              <a:p>
-                <a:pPr marL="0" indent="0">
-                  <a:buNone/>
-                </a:pPr>
-                <a:r>
-                  <a:rPr lang="es-MX" sz="2200" b="1" i="0" dirty="0">
-                    <a:solidFill>
-                      <a:srgbClr val="5C5962"/>
-                    </a:solidFill>
-                    <a:effectLst/>
-                    <a:latin typeface="system-ui"/>
-                  </a:rPr>
-                  <a:t>Ejemplo 2</a:t>
-                </a:r>
-                <a:r>
-                  <a:rPr lang="es-MX" sz="2200" b="0" i="0" dirty="0">
-                    <a:solidFill>
-                      <a:srgbClr val="5C5962"/>
-                    </a:solidFill>
-                    <a:effectLst/>
-                    <a:latin typeface="system-ui"/>
-                  </a:rPr>
-                  <a:t>: </a:t>
-                </a:r>
-                <a14:m>
-                  <m:oMath xmlns:m="http://schemas.openxmlformats.org/officeDocument/2006/math">
-                    <m:d>
-                      <m:dPr>
-                        <m:ctrlPr>
-                          <a:rPr lang="es-MX" sz="2200" b="0" i="1" smtClean="0">
-                            <a:solidFill>
-                              <a:srgbClr val="5C5962"/>
-                            </a:solidFill>
-                            <a:effectLst/>
-                            <a:latin typeface="Cambria Math" panose="02040503050406030204" pitchFamily="18" charset="0"/>
-                            <a:ea typeface="Cambria Math" panose="02040503050406030204" pitchFamily="18" charset="0"/>
-                          </a:rPr>
-                        </m:ctrlPr>
-                      </m:dPr>
-                      <m:e>
-                        <m:r>
-                          <a:rPr lang="es-MX" sz="2200" b="0" i="1" smtClean="0">
-                            <a:solidFill>
-                              <a:srgbClr val="5C5962"/>
-                            </a:solidFill>
-                            <a:effectLst/>
-                            <a:latin typeface="Cambria Math" panose="02040503050406030204" pitchFamily="18" charset="0"/>
-                            <a:ea typeface="Cambria Math" panose="02040503050406030204" pitchFamily="18" charset="0"/>
-                          </a:rPr>
-                          <m:t>𝑃</m:t>
-                        </m:r>
-                        <m:r>
-                          <a:rPr lang="es-MX" sz="2200" b="0" i="1" smtClean="0">
-                            <a:solidFill>
-                              <a:srgbClr val="5C5962"/>
-                            </a:solidFill>
-                            <a:effectLst/>
-                            <a:latin typeface="Cambria Math" panose="02040503050406030204" pitchFamily="18" charset="0"/>
-                            <a:ea typeface="Cambria Math" panose="02040503050406030204" pitchFamily="18" charset="0"/>
-                          </a:rPr>
-                          <m:t>→</m:t>
-                        </m:r>
-                        <m:r>
-                          <a:rPr lang="es-MX" sz="2200" b="0" i="1" smtClean="0">
-                            <a:solidFill>
-                              <a:srgbClr val="5C5962"/>
-                            </a:solidFill>
-                            <a:effectLst/>
-                            <a:latin typeface="Cambria Math" panose="02040503050406030204" pitchFamily="18" charset="0"/>
-                            <a:ea typeface="Cambria Math" panose="02040503050406030204" pitchFamily="18" charset="0"/>
-                          </a:rPr>
-                          <m:t>𝑄</m:t>
-                        </m:r>
-                      </m:e>
-                    </m:d>
-                    <m:r>
-                      <a:rPr lang="es-MX" sz="2200" b="0" i="1" smtClean="0">
-                        <a:solidFill>
-                          <a:srgbClr val="5C5962"/>
-                        </a:solidFill>
-                        <a:effectLst/>
-                        <a:latin typeface="Cambria Math" panose="02040503050406030204" pitchFamily="18" charset="0"/>
-                        <a:ea typeface="Cambria Math" panose="02040503050406030204" pitchFamily="18" charset="0"/>
-                      </a:rPr>
-                      <m:t>→</m:t>
-                    </m:r>
-                    <m:d>
-                      <m:dPr>
-                        <m:ctrlPr>
-                          <a:rPr lang="es-MX" sz="2200" b="0" i="1" smtClean="0">
-                            <a:solidFill>
-                              <a:srgbClr val="5C5962"/>
-                            </a:solidFill>
-                            <a:effectLst/>
-                            <a:latin typeface="Cambria Math" panose="02040503050406030204" pitchFamily="18" charset="0"/>
-                            <a:ea typeface="Cambria Math" panose="02040503050406030204" pitchFamily="18" charset="0"/>
-                          </a:rPr>
-                        </m:ctrlPr>
-                      </m:dPr>
-                      <m:e>
-                        <m:r>
-                          <a:rPr lang="es-MX" sz="2200" b="0" i="1" smtClean="0">
-                            <a:solidFill>
-                              <a:srgbClr val="5C5962"/>
-                            </a:solidFill>
-                            <a:effectLst/>
-                            <a:latin typeface="Cambria Math" panose="02040503050406030204" pitchFamily="18" charset="0"/>
-                            <a:ea typeface="Cambria Math" panose="02040503050406030204" pitchFamily="18" charset="0"/>
-                          </a:rPr>
-                          <m:t>¬</m:t>
-                        </m:r>
-                        <m:r>
-                          <a:rPr lang="es-MX" sz="2200" b="0" i="1" smtClean="0">
-                            <a:solidFill>
-                              <a:srgbClr val="5C5962"/>
-                            </a:solidFill>
-                            <a:effectLst/>
-                            <a:latin typeface="Cambria Math" panose="02040503050406030204" pitchFamily="18" charset="0"/>
-                            <a:ea typeface="Cambria Math" panose="02040503050406030204" pitchFamily="18" charset="0"/>
-                          </a:rPr>
-                          <m:t>𝑃</m:t>
-                        </m:r>
-                        <m:r>
-                          <a:rPr lang="es-MX" sz="2200" b="0" i="1" smtClean="0">
-                            <a:solidFill>
-                              <a:srgbClr val="5C5962"/>
-                            </a:solidFill>
-                            <a:effectLst/>
-                            <a:latin typeface="Cambria Math" panose="02040503050406030204" pitchFamily="18" charset="0"/>
-                            <a:ea typeface="Cambria Math" panose="02040503050406030204" pitchFamily="18" charset="0"/>
-                          </a:rPr>
-                          <m:t> ∨</m:t>
-                        </m:r>
-                        <m:r>
-                          <a:rPr lang="es-MX" sz="2200" b="0" i="1" smtClean="0">
-                            <a:solidFill>
-                              <a:srgbClr val="5C5962"/>
-                            </a:solidFill>
-                            <a:effectLst/>
-                            <a:latin typeface="Cambria Math" panose="02040503050406030204" pitchFamily="18" charset="0"/>
-                            <a:ea typeface="Cambria Math" panose="02040503050406030204" pitchFamily="18" charset="0"/>
-                          </a:rPr>
-                          <m:t>𝑄</m:t>
-                        </m:r>
-                      </m:e>
-                    </m:d>
-                  </m:oMath>
-                </a14:m>
-                <a:endParaRPr lang="es-MX" sz="2200" b="0" i="0" dirty="0">
-                  <a:solidFill>
-                    <a:srgbClr val="5C5962"/>
-                  </a:solidFill>
-                  <a:effectLst/>
-                  <a:latin typeface="Google Sans Text"/>
-                  <a:ea typeface="Cambria Math" panose="02040503050406030204" pitchFamily="18" charset="0"/>
-                </a:endParaRPr>
-              </a:p>
-              <a:p>
-                <a:pPr lvl="1"/>
-                <a:endParaRPr lang="es-MX" sz="1600" b="0" i="0" dirty="0">
-                  <a:solidFill>
-                    <a:srgbClr val="131314"/>
-                  </a:solidFill>
-                  <a:effectLst/>
-                  <a:latin typeface="Google Sans Text"/>
-                </a:endParaRPr>
-              </a:p>
-              <a:p>
-                <a:pPr marL="0" indent="0">
-                  <a:buNone/>
-                </a:pPr>
-                <a:endParaRPr lang="es-MX" dirty="0"/>
-              </a:p>
-            </p:txBody>
-          </p:sp>
-        </mc:Choice>
-        <mc:Fallback>
-          <p:sp>
-            <p:nvSpPr>
-              <p:cNvPr id="3" name="Marcador de contenido 2">
-                <a:extLst>
-                  <a:ext uri="{FF2B5EF4-FFF2-40B4-BE49-F238E27FC236}">
-                    <a16:creationId xmlns:a16="http://schemas.microsoft.com/office/drawing/2014/main" id="{8C611C1C-AB20-4127-87E3-88401D8503D0}"/>
-                  </a:ext>
-                </a:extLst>
-              </p:cNvPr>
-              <p:cNvSpPr>
-                <a:spLocks noGrp="1" noRot="1" noChangeAspect="1" noMove="1" noResize="1" noEditPoints="1" noAdjustHandles="1" noChangeArrowheads="1" noChangeShapeType="1" noTextEdit="1"/>
-              </p:cNvSpPr>
-              <p:nvPr>
-                <p:ph idx="1"/>
-              </p:nvPr>
-            </p:nvSpPr>
-            <p:spPr>
-              <a:xfrm>
-                <a:off x="360218" y="1375234"/>
-                <a:ext cx="11471563" cy="2448621"/>
-              </a:xfrm>
-              <a:blipFill>
-                <a:blip r:embed="rId2"/>
-                <a:stretch>
-                  <a:fillRect l="-691" t="-2993"/>
-                </a:stretch>
-              </a:blipFill>
-            </p:spPr>
-            <p:txBody>
-              <a:bodyPr/>
-              <a:lstStyle/>
-              <a:p>
-                <a:r>
-                  <a:rPr lang="es-CO">
-                    <a:noFill/>
-                  </a:rPr>
-                  <a:t> </a:t>
-                </a:r>
-              </a:p>
-            </p:txBody>
-          </p:sp>
-        </mc:Fallback>
-      </mc:AlternateContent>
-    </p:spTree>
-    <p:extLst>
-      <p:ext uri="{BB962C8B-B14F-4D97-AF65-F5344CB8AC3E}">
-        <p14:creationId xmlns:p14="http://schemas.microsoft.com/office/powerpoint/2010/main" val="152652116"/>
-      </p:ext>
-    </p:extLst>
-  </p:cSld>
-  <p:clrMapOvr>
-    <a:masterClrMapping/>
-  </p:clrMapOvr>
-</p:sld>
-</file>
-
-<file path=ppt/slides/slide37.xml><?xml version="1.0" encoding="utf-8"?>
-<p:sld xmlns:a="http://schemas.openxmlformats.org/drawingml/2006/main" xmlns:r="http://schemas.openxmlformats.org/officeDocument/2006/relationships" xmlns:p="http://schemas.openxmlformats.org/presentationml/2006/main">
-  <p:cSld>
-    <p:spTree>
-      <p:nvGrpSpPr>
-        <p:cNvPr id="1" name=""/>
-        <p:cNvGrpSpPr/>
-        <p:nvPr/>
-      </p:nvGrpSpPr>
-      <p:grpSpPr>
-        <a:xfrm>
-          <a:off x="0" y="0"/>
-          <a:ext cx="0" cy="0"/>
-          <a:chOff x="0" y="0"/>
-          <a:chExt cx="0" cy="0"/>
-        </a:xfrm>
-      </p:grpSpPr>
-      <p:sp>
-        <p:nvSpPr>
-          <p:cNvPr id="2" name="Título 1">
-            <a:extLst>
-              <a:ext uri="{FF2B5EF4-FFF2-40B4-BE49-F238E27FC236}">
-                <a16:creationId xmlns:a16="http://schemas.microsoft.com/office/drawing/2014/main" id="{363AF66F-7D38-4DEC-A157-5A496140F1BF}"/>
-              </a:ext>
-            </a:extLst>
-          </p:cNvPr>
-          <p:cNvSpPr>
-            <a:spLocks noGrp="1"/>
-          </p:cNvSpPr>
-          <p:nvPr>
-            <p:ph type="title"/>
-          </p:nvPr>
-        </p:nvSpPr>
-        <p:spPr>
-          <a:xfrm>
-            <a:off x="838199" y="226580"/>
-            <a:ext cx="10515600" cy="1325563"/>
-          </a:xfrm>
-        </p:spPr>
-        <p:txBody>
-          <a:bodyPr/>
-          <a:lstStyle/>
-          <a:p>
-            <a:r>
-              <a:rPr lang="es-CO" dirty="0"/>
-              <a:t>Tablas de verdad</a:t>
-            </a:r>
-          </a:p>
-        </p:txBody>
-      </p:sp>
-      <mc:AlternateContent xmlns:mc="http://schemas.openxmlformats.org/markup-compatibility/2006">
-        <mc:Choice xmlns:a14="http://schemas.microsoft.com/office/drawing/2010/main" Requires="a14">
-          <p:sp>
-            <p:nvSpPr>
-              <p:cNvPr id="3" name="Marcador de contenido 2">
-                <a:extLst>
-                  <a:ext uri="{FF2B5EF4-FFF2-40B4-BE49-F238E27FC236}">
-                    <a16:creationId xmlns:a16="http://schemas.microsoft.com/office/drawing/2014/main" id="{8C611C1C-AB20-4127-87E3-88401D8503D0}"/>
-                  </a:ext>
-                </a:extLst>
-              </p:cNvPr>
-              <p:cNvSpPr>
-                <a:spLocks noGrp="1"/>
-              </p:cNvSpPr>
-              <p:nvPr>
-                <p:ph idx="1"/>
-              </p:nvPr>
-            </p:nvSpPr>
-            <p:spPr>
-              <a:xfrm>
-                <a:off x="360218" y="1375234"/>
-                <a:ext cx="11471563" cy="439711"/>
-              </a:xfrm>
-            </p:spPr>
-            <p:txBody>
-              <a:bodyPr>
-                <a:normAutofit/>
-              </a:bodyPr>
-              <a:lstStyle/>
-              <a:p>
-                <a:pPr marL="0" indent="0">
-                  <a:buNone/>
-                </a:pPr>
-                <a:r>
-                  <a:rPr lang="es-MX" sz="2000" b="1" i="0" dirty="0">
-                    <a:solidFill>
-                      <a:srgbClr val="5C5962"/>
-                    </a:solidFill>
-                    <a:effectLst/>
-                    <a:latin typeface="system-ui"/>
-                  </a:rPr>
-                  <a:t>Ejemplo 3</a:t>
-                </a:r>
-                <a:r>
-                  <a:rPr lang="es-MX" sz="2000" b="0" i="0" dirty="0">
-                    <a:solidFill>
-                      <a:srgbClr val="5C5962"/>
-                    </a:solidFill>
-                    <a:effectLst/>
-                    <a:latin typeface="system-ui"/>
-                  </a:rPr>
-                  <a:t>: </a:t>
-                </a:r>
-                <a14:m>
-                  <m:oMath xmlns:m="http://schemas.openxmlformats.org/officeDocument/2006/math">
-                    <m:d>
-                      <m:dPr>
-                        <m:begChr m:val="["/>
-                        <m:endChr m:val="]"/>
-                        <m:ctrlPr>
-                          <a:rPr lang="es-MX" sz="2000" i="1">
-                            <a:solidFill>
-                              <a:srgbClr val="5C5962"/>
-                            </a:solidFill>
-                            <a:latin typeface="Cambria Math" panose="02040503050406030204" pitchFamily="18" charset="0"/>
-                            <a:ea typeface="Cambria Math" panose="02040503050406030204" pitchFamily="18" charset="0"/>
-                          </a:rPr>
-                        </m:ctrlPr>
-                      </m:dPr>
-                      <m:e>
-                        <m:d>
-                          <m:dPr>
-                            <m:ctrlPr>
-                              <a:rPr lang="es-MX" sz="2000" i="1">
-                                <a:solidFill>
-                                  <a:srgbClr val="5C5962"/>
-                                </a:solidFill>
-                                <a:latin typeface="Cambria Math" panose="02040503050406030204" pitchFamily="18" charset="0"/>
-                                <a:ea typeface="Cambria Math" panose="02040503050406030204" pitchFamily="18" charset="0"/>
-                              </a:rPr>
-                            </m:ctrlPr>
-                          </m:dPr>
-                          <m:e>
-                            <m:r>
-                              <a:rPr lang="es-MX" sz="2000" i="1">
-                                <a:solidFill>
-                                  <a:srgbClr val="5C5962"/>
-                                </a:solidFill>
-                                <a:latin typeface="Cambria Math" panose="02040503050406030204" pitchFamily="18" charset="0"/>
-                                <a:ea typeface="Cambria Math" panose="02040503050406030204" pitchFamily="18" charset="0"/>
-                              </a:rPr>
-                              <m:t>𝑃</m:t>
-                            </m:r>
-                            <m:r>
-                              <a:rPr lang="es-MX" sz="2000" i="1">
-                                <a:solidFill>
-                                  <a:srgbClr val="5C5962"/>
-                                </a:solidFill>
-                                <a:latin typeface="Cambria Math" panose="02040503050406030204" pitchFamily="18" charset="0"/>
-                                <a:ea typeface="Cambria Math" panose="02040503050406030204" pitchFamily="18" charset="0"/>
-                              </a:rPr>
-                              <m:t>→</m:t>
-                            </m:r>
-                            <m:r>
-                              <a:rPr lang="es-MX" sz="2000" i="1">
-                                <a:solidFill>
-                                  <a:srgbClr val="5C5962"/>
-                                </a:solidFill>
-                                <a:latin typeface="Cambria Math" panose="02040503050406030204" pitchFamily="18" charset="0"/>
-                                <a:ea typeface="Cambria Math" panose="02040503050406030204" pitchFamily="18" charset="0"/>
-                              </a:rPr>
-                              <m:t>𝑄</m:t>
-                            </m:r>
-                          </m:e>
-                        </m:d>
-                        <m:r>
-                          <a:rPr lang="es-MX" sz="2000" i="1">
-                            <a:solidFill>
-                              <a:srgbClr val="5C5962"/>
-                            </a:solidFill>
-                            <a:latin typeface="Cambria Math" panose="02040503050406030204" pitchFamily="18" charset="0"/>
-                            <a:ea typeface="Cambria Math" panose="02040503050406030204" pitchFamily="18" charset="0"/>
-                          </a:rPr>
-                          <m:t>∧¬</m:t>
-                        </m:r>
-                        <m:r>
-                          <a:rPr lang="es-MX" sz="2000" i="1">
-                            <a:solidFill>
-                              <a:srgbClr val="5C5962"/>
-                            </a:solidFill>
-                            <a:latin typeface="Cambria Math" panose="02040503050406030204" pitchFamily="18" charset="0"/>
-                            <a:ea typeface="Cambria Math" panose="02040503050406030204" pitchFamily="18" charset="0"/>
-                          </a:rPr>
-                          <m:t>𝑄</m:t>
-                        </m:r>
-                      </m:e>
-                    </m:d>
-                    <m:r>
-                      <a:rPr lang="es-MX" sz="2000" i="1">
-                        <a:solidFill>
-                          <a:srgbClr val="5C5962"/>
-                        </a:solidFill>
-                        <a:latin typeface="Cambria Math" panose="02040503050406030204" pitchFamily="18" charset="0"/>
-                        <a:ea typeface="Cambria Math" panose="02040503050406030204" pitchFamily="18" charset="0"/>
-                      </a:rPr>
-                      <m:t>→¬</m:t>
-                    </m:r>
-                    <m:r>
-                      <a:rPr lang="es-MX" sz="2000" i="1">
-                        <a:solidFill>
-                          <a:srgbClr val="5C5962"/>
-                        </a:solidFill>
-                        <a:latin typeface="Cambria Math" panose="02040503050406030204" pitchFamily="18" charset="0"/>
-                        <a:ea typeface="Cambria Math" panose="02040503050406030204" pitchFamily="18" charset="0"/>
-                      </a:rPr>
-                      <m:t>𝑃</m:t>
-                    </m:r>
-                  </m:oMath>
-                </a14:m>
-                <a:endParaRPr lang="es-MX" sz="2000" dirty="0">
-                  <a:solidFill>
-                    <a:srgbClr val="5C5962"/>
-                  </a:solidFill>
-                  <a:latin typeface="Google Sans Text"/>
-                  <a:ea typeface="Cambria Math" panose="02040503050406030204" pitchFamily="18" charset="0"/>
-                </a:endParaRPr>
-              </a:p>
-              <a:p>
-                <a:pPr lvl="1"/>
-                <a:endParaRPr lang="es-MX" sz="1600" b="0" i="0" dirty="0">
-                  <a:solidFill>
-                    <a:srgbClr val="131314"/>
-                  </a:solidFill>
-                  <a:effectLst/>
-                  <a:latin typeface="Google Sans Text"/>
-                </a:endParaRPr>
-              </a:p>
-              <a:p>
-                <a:pPr marL="0" indent="0">
-                  <a:buNone/>
-                </a:pPr>
-                <a:endParaRPr lang="es-MX" dirty="0"/>
-              </a:p>
-            </p:txBody>
-          </p:sp>
-        </mc:Choice>
-        <mc:Fallback>
-          <p:sp>
-            <p:nvSpPr>
-              <p:cNvPr id="3" name="Marcador de contenido 2">
-                <a:extLst>
-                  <a:ext uri="{FF2B5EF4-FFF2-40B4-BE49-F238E27FC236}">
-                    <a16:creationId xmlns:a16="http://schemas.microsoft.com/office/drawing/2014/main" id="{8C611C1C-AB20-4127-87E3-88401D8503D0}"/>
-                  </a:ext>
-                </a:extLst>
-              </p:cNvPr>
-              <p:cNvSpPr>
-                <a:spLocks noGrp="1" noRot="1" noChangeAspect="1" noMove="1" noResize="1" noEditPoints="1" noAdjustHandles="1" noChangeArrowheads="1" noChangeShapeType="1" noTextEdit="1"/>
-              </p:cNvSpPr>
-              <p:nvPr>
-                <p:ph idx="1"/>
-              </p:nvPr>
-            </p:nvSpPr>
-            <p:spPr>
-              <a:xfrm>
-                <a:off x="360218" y="1375234"/>
-                <a:ext cx="11471563" cy="439711"/>
-              </a:xfrm>
-              <a:blipFill>
-                <a:blip r:embed="rId2"/>
-                <a:stretch>
-                  <a:fillRect l="-531" t="-15278" b="-8333"/>
-                </a:stretch>
-              </a:blipFill>
-            </p:spPr>
-            <p:txBody>
-              <a:bodyPr/>
-              <a:lstStyle/>
-              <a:p>
-                <a:r>
-                  <a:rPr lang="es-CO">
-                    <a:noFill/>
-                  </a:rPr>
-                  <a:t> </a:t>
-                </a:r>
-              </a:p>
-            </p:txBody>
-          </p:sp>
-        </mc:Fallback>
-      </mc:AlternateContent>
-    </p:spTree>
-    <p:extLst>
-      <p:ext uri="{BB962C8B-B14F-4D97-AF65-F5344CB8AC3E}">
-        <p14:creationId xmlns:p14="http://schemas.microsoft.com/office/powerpoint/2010/main" val="281186859"/>
-      </p:ext>
-    </p:extLst>
-  </p:cSld>
-  <p:clrMapOvr>
-    <a:masterClrMapping/>
-  </p:clrMapOvr>
-</p:sld>
-</file>
-
-<file path=ppt/slides/slide38.xml><?xml version="1.0" encoding="utf-8"?>
 <p:sld xmlns:a="http://schemas.openxmlformats.org/drawingml/2006/main" xmlns:r="http://schemas.openxmlformats.org/officeDocument/2006/relationships" xmlns:p="http://schemas.openxmlformats.org/presentationml/2006/main">
   <p:cSld>
     <p:spTree>
